--- a/_lectures/week11/api_visualization.pptx
+++ b/_lectures/week11/api_visualization.pptx
@@ -115,6 +115,28 @@
     </a:lvl9pPr>
   </p:defaultTextStyle>
   <p:extLst>
+    <p:ext uri="{521415D9-36F7-43E2-AB2F-B90AF26B5E84}">
+      <p14:sectionLst xmlns:p14="http://schemas.microsoft.com/office/powerpoint/2010/main">
+        <p14:section name="No Mustache Template" id="{23AFE620-C1BB-43A3-9172-A1A0C0E8E5E8}">
+          <p14:sldIdLst/>
+        </p14:section>
+        <p14:section name="Mustache Template" id="{D354D02B-623E-45C0-B07A-ACFF8008C411}">
+          <p14:sldIdLst>
+            <p14:sldId id="256"/>
+            <p14:sldId id="257"/>
+            <p14:sldId id="258"/>
+            <p14:sldId id="259"/>
+            <p14:sldId id="262"/>
+            <p14:sldId id="260"/>
+            <p14:sldId id="263"/>
+            <p14:sldId id="264"/>
+            <p14:sldId id="265"/>
+            <p14:sldId id="268"/>
+            <p14:sldId id="261"/>
+          </p14:sldIdLst>
+        </p14:section>
+      </p14:sectionLst>
+    </p:ext>
     <p:ext uri="{EFAFB233-063F-42B5-8137-9DF3F51BA10A}">
       <p15:sldGuideLst xmlns:p15="http://schemas.microsoft.com/office/powerpoint/2012/main"/>
     </p:ext>
@@ -269,7 +291,7 @@
           <a:p>
             <a:fld id="{90CDDACB-AA34-4501-B984-01C37FDD50C3}" type="datetimeFigureOut">
               <a:rPr lang="en-US" smtClean="0"/>
-              <a:t>10/25/2023</a:t>
+              <a:t>10/25/2025</a:t>
             </a:fld>
             <a:endParaRPr lang="en-US"/>
           </a:p>
@@ -467,7 +489,7 @@
           <a:p>
             <a:fld id="{90CDDACB-AA34-4501-B984-01C37FDD50C3}" type="datetimeFigureOut">
               <a:rPr lang="en-US" smtClean="0"/>
-              <a:t>10/25/2023</a:t>
+              <a:t>10/25/2025</a:t>
             </a:fld>
             <a:endParaRPr lang="en-US"/>
           </a:p>
@@ -675,7 +697,7 @@
           <a:p>
             <a:fld id="{90CDDACB-AA34-4501-B984-01C37FDD50C3}" type="datetimeFigureOut">
               <a:rPr lang="en-US" smtClean="0"/>
-              <a:t>10/25/2023</a:t>
+              <a:t>10/25/2025</a:t>
             </a:fld>
             <a:endParaRPr lang="en-US"/>
           </a:p>
@@ -873,7 +895,7 @@
           <a:p>
             <a:fld id="{90CDDACB-AA34-4501-B984-01C37FDD50C3}" type="datetimeFigureOut">
               <a:rPr lang="en-US" smtClean="0"/>
-              <a:t>10/25/2023</a:t>
+              <a:t>10/25/2025</a:t>
             </a:fld>
             <a:endParaRPr lang="en-US"/>
           </a:p>
@@ -1148,7 +1170,7 @@
           <a:p>
             <a:fld id="{90CDDACB-AA34-4501-B984-01C37FDD50C3}" type="datetimeFigureOut">
               <a:rPr lang="en-US" smtClean="0"/>
-              <a:t>10/25/2023</a:t>
+              <a:t>10/25/2025</a:t>
             </a:fld>
             <a:endParaRPr lang="en-US"/>
           </a:p>
@@ -1413,7 +1435,7 @@
           <a:p>
             <a:fld id="{90CDDACB-AA34-4501-B984-01C37FDD50C3}" type="datetimeFigureOut">
               <a:rPr lang="en-US" smtClean="0"/>
-              <a:t>10/25/2023</a:t>
+              <a:t>10/25/2025</a:t>
             </a:fld>
             <a:endParaRPr lang="en-US"/>
           </a:p>
@@ -1825,7 +1847,7 @@
           <a:p>
             <a:fld id="{90CDDACB-AA34-4501-B984-01C37FDD50C3}" type="datetimeFigureOut">
               <a:rPr lang="en-US" smtClean="0"/>
-              <a:t>10/25/2023</a:t>
+              <a:t>10/25/2025</a:t>
             </a:fld>
             <a:endParaRPr lang="en-US"/>
           </a:p>
@@ -1966,7 +1988,7 @@
           <a:p>
             <a:fld id="{90CDDACB-AA34-4501-B984-01C37FDD50C3}" type="datetimeFigureOut">
               <a:rPr lang="en-US" smtClean="0"/>
-              <a:t>10/25/2023</a:t>
+              <a:t>10/25/2025</a:t>
             </a:fld>
             <a:endParaRPr lang="en-US"/>
           </a:p>
@@ -2079,7 +2101,7 @@
           <a:p>
             <a:fld id="{90CDDACB-AA34-4501-B984-01C37FDD50C3}" type="datetimeFigureOut">
               <a:rPr lang="en-US" smtClean="0"/>
-              <a:t>10/25/2023</a:t>
+              <a:t>10/25/2025</a:t>
             </a:fld>
             <a:endParaRPr lang="en-US"/>
           </a:p>
@@ -2390,7 +2412,7 @@
           <a:p>
             <a:fld id="{90CDDACB-AA34-4501-B984-01C37FDD50C3}" type="datetimeFigureOut">
               <a:rPr lang="en-US" smtClean="0"/>
-              <a:t>10/25/2023</a:t>
+              <a:t>10/25/2025</a:t>
             </a:fld>
             <a:endParaRPr lang="en-US"/>
           </a:p>
@@ -2678,7 +2700,7 @@
           <a:p>
             <a:fld id="{90CDDACB-AA34-4501-B984-01C37FDD50C3}" type="datetimeFigureOut">
               <a:rPr lang="en-US" smtClean="0"/>
-              <a:t>10/25/2023</a:t>
+              <a:t>10/25/2025</a:t>
             </a:fld>
             <a:endParaRPr lang="en-US"/>
           </a:p>
@@ -2919,7 +2941,7 @@
           <a:p>
             <a:fld id="{90CDDACB-AA34-4501-B984-01C37FDD50C3}" type="datetimeFigureOut">
               <a:rPr lang="en-US" smtClean="0"/>
-              <a:t>10/25/2023</a:t>
+              <a:t>10/25/2025</a:t>
             </a:fld>
             <a:endParaRPr lang="en-US"/>
           </a:p>
@@ -3338,7 +3360,7 @@
       </p:grpSpPr>
       <p:pic>
         <p:nvPicPr>
-          <p:cNvPr id="5" name="Picture 4" descr="Qr code&#10;&#10;Description automatically generated">
+          <p:cNvPr id="5" name="Picture 4">
             <a:extLst>
               <a:ext uri="{FF2B5EF4-FFF2-40B4-BE49-F238E27FC236}">
                 <a16:creationId xmlns:a16="http://schemas.microsoft.com/office/drawing/2014/main" id="{C04133BD-C7DA-4A5B-86FC-4CD20E82A00C}"/>
@@ -3358,14 +3380,13 @@
               </a:ext>
             </a:extLst>
           </a:blip>
-          <a:stretch>
-            <a:fillRect/>
-          </a:stretch>
+          <a:srcRect/>
+          <a:stretch/>
         </p:blipFill>
         <p:spPr>
           <a:xfrm>
-            <a:off x="867820" y="2324796"/>
-            <a:ext cx="1189579" cy="2691972"/>
+            <a:off x="867820" y="2333051"/>
+            <a:ext cx="1189579" cy="2675462"/>
           </a:xfrm>
           <a:prstGeom prst="rect">
             <a:avLst/>
@@ -3620,7 +3641,7 @@
         <p:spPr>
           <a:xfrm>
             <a:off x="1056209" y="5553333"/>
-            <a:ext cx="812800" cy="369332"/>
+            <a:ext cx="812800" cy="646331"/>
           </a:xfrm>
           <a:prstGeom prst="rect">
             <a:avLst/>
@@ -3636,7 +3657,7 @@
             <a:pPr algn="ctr"/>
             <a:r>
               <a:rPr lang="en-US" b="1" dirty="0"/>
-              <a:t>Argon</a:t>
+              <a:t>Photon</a:t>
             </a:r>
           </a:p>
         </p:txBody>
@@ -3745,10 +3766,10 @@
       </p:grpSpPr>
       <p:pic>
         <p:nvPicPr>
-          <p:cNvPr id="5" name="Picture 4" descr="Qr code&#10;&#10;Description automatically generated">
-            <a:extLst>
-              <a:ext uri="{FF2B5EF4-FFF2-40B4-BE49-F238E27FC236}">
-                <a16:creationId xmlns:a16="http://schemas.microsoft.com/office/drawing/2014/main" id="{C04133BD-C7DA-4A5B-86FC-4CD20E82A00C}"/>
+          <p:cNvPr id="7" name="Graphic 6" descr="Cloud">
+            <a:extLst>
+              <a:ext uri="{FF2B5EF4-FFF2-40B4-BE49-F238E27FC236}">
+                <a16:creationId xmlns:a16="http://schemas.microsoft.com/office/drawing/2014/main" id="{3A87124C-1FD9-4AE0-A262-F1564B6C0154}"/>
               </a:ext>
             </a:extLst>
           </p:cNvPr>
@@ -3762,6 +3783,9 @@
             <a:extLst>
               <a:ext uri="{28A0092B-C50C-407E-A947-70E740481C1C}">
                 <a14:useLocalDpi xmlns:a14="http://schemas.microsoft.com/office/drawing/2010/main" val="0"/>
+              </a:ext>
+              <a:ext uri="{96DAC541-7B7A-43D3-8B79-37D633B846F1}">
+                <asvg:svgBlip xmlns:asvg="http://schemas.microsoft.com/office/drawing/2016/SVG/main" r:embed="rId3"/>
               </a:ext>
             </a:extLst>
           </a:blip>
@@ -3771,8 +3795,1608 @@
         </p:blipFill>
         <p:spPr>
           <a:xfrm>
-            <a:off x="867820" y="2324796"/>
-            <a:ext cx="1189579" cy="2691972"/>
+            <a:off x="4181462" y="-138063"/>
+            <a:ext cx="2868079" cy="2868079"/>
+          </a:xfrm>
+          <a:prstGeom prst="rect">
+            <a:avLst/>
+          </a:prstGeom>
+        </p:spPr>
+      </p:pic>
+      <p:grpSp>
+        <p:nvGrpSpPr>
+          <p:cNvPr id="15" name="Group 14">
+            <a:extLst>
+              <a:ext uri="{FF2B5EF4-FFF2-40B4-BE49-F238E27FC236}">
+                <a16:creationId xmlns:a16="http://schemas.microsoft.com/office/drawing/2014/main" id="{40C5B209-4AA9-4DED-8227-297A42EC8449}"/>
+              </a:ext>
+            </a:extLst>
+          </p:cNvPr>
+          <p:cNvGrpSpPr/>
+          <p:nvPr/>
+        </p:nvGrpSpPr>
+        <p:grpSpPr>
+          <a:xfrm>
+            <a:off x="8810605" y="2058065"/>
+            <a:ext cx="2915728" cy="2551953"/>
+            <a:chOff x="6109739" y="2155513"/>
+            <a:chExt cx="2915728" cy="2551953"/>
+          </a:xfrm>
+        </p:grpSpPr>
+        <p:sp>
+          <p:nvSpPr>
+            <p:cNvPr id="14" name="Rectangle: Rounded Corners 13">
+              <a:extLst>
+                <a:ext uri="{FF2B5EF4-FFF2-40B4-BE49-F238E27FC236}">
+                  <a16:creationId xmlns:a16="http://schemas.microsoft.com/office/drawing/2014/main" id="{2EEE5A17-A7AE-42DB-AC77-31B86878D050}"/>
+                </a:ext>
+              </a:extLst>
+            </p:cNvPr>
+            <p:cNvSpPr/>
+            <p:nvPr/>
+          </p:nvSpPr>
+          <p:spPr>
+            <a:xfrm>
+              <a:off x="6109739" y="2215165"/>
+              <a:ext cx="2915728" cy="2492301"/>
+            </a:xfrm>
+            <a:prstGeom prst="roundRect">
+              <a:avLst/>
+            </a:prstGeom>
+            <a:solidFill>
+              <a:schemeClr val="accent2">
+                <a:lumMod val="40000"/>
+                <a:lumOff val="60000"/>
+                <a:alpha val="50000"/>
+              </a:schemeClr>
+            </a:solidFill>
+            <a:ln>
+              <a:solidFill>
+                <a:schemeClr val="tx1"/>
+              </a:solidFill>
+            </a:ln>
+          </p:spPr>
+          <p:style>
+            <a:lnRef idx="0">
+              <a:scrgbClr r="0" g="0" b="0"/>
+            </a:lnRef>
+            <a:fillRef idx="0">
+              <a:scrgbClr r="0" g="0" b="0"/>
+            </a:fillRef>
+            <a:effectRef idx="0">
+              <a:scrgbClr r="0" g="0" b="0"/>
+            </a:effectRef>
+            <a:fontRef idx="minor">
+              <a:schemeClr val="lt1"/>
+            </a:fontRef>
+          </p:style>
+          <p:txBody>
+            <a:bodyPr rtlCol="0" anchor="ctr"/>
+            <a:lstStyle/>
+            <a:p>
+              <a:pPr algn="ctr"/>
+              <a:endParaRPr lang="en-US" dirty="0"/>
+            </a:p>
+          </p:txBody>
+        </p:sp>
+        <p:pic>
+          <p:nvPicPr>
+            <p:cNvPr id="9" name="Graphic 8" descr="Snowflake">
+              <a:extLst>
+                <a:ext uri="{FF2B5EF4-FFF2-40B4-BE49-F238E27FC236}">
+                  <a16:creationId xmlns:a16="http://schemas.microsoft.com/office/drawing/2014/main" id="{FC727A84-CBF2-49F0-9E8E-1B2922386E78}"/>
+                </a:ext>
+              </a:extLst>
+            </p:cNvPr>
+            <p:cNvPicPr>
+              <a:picLocks noChangeAspect="1"/>
+            </p:cNvPicPr>
+            <p:nvPr/>
+          </p:nvPicPr>
+          <p:blipFill>
+            <a:blip r:embed="rId4">
+              <a:extLst>
+                <a:ext uri="{28A0092B-C50C-407E-A947-70E740481C1C}">
+                  <a14:useLocalDpi xmlns:a14="http://schemas.microsoft.com/office/drawing/2010/main" val="0"/>
+                </a:ext>
+                <a:ext uri="{96DAC541-7B7A-43D3-8B79-37D633B846F1}">
+                  <asvg:svgBlip xmlns:asvg="http://schemas.microsoft.com/office/drawing/2016/SVG/main" r:embed="rId5"/>
+                </a:ext>
+              </a:extLst>
+            </a:blip>
+            <a:stretch>
+              <a:fillRect/>
+            </a:stretch>
+          </p:blipFill>
+          <p:spPr>
+            <a:xfrm>
+              <a:off x="6267446" y="2155513"/>
+              <a:ext cx="1384727" cy="1384727"/>
+            </a:xfrm>
+            <a:prstGeom prst="rect">
+              <a:avLst/>
+            </a:prstGeom>
+          </p:spPr>
+        </p:pic>
+        <p:pic>
+          <p:nvPicPr>
+            <p:cNvPr id="11" name="Graphic 10" descr="Sun">
+              <a:extLst>
+                <a:ext uri="{FF2B5EF4-FFF2-40B4-BE49-F238E27FC236}">
+                  <a16:creationId xmlns:a16="http://schemas.microsoft.com/office/drawing/2014/main" id="{B8B76924-6095-48AC-ADE0-2531BF0FB1B7}"/>
+                </a:ext>
+              </a:extLst>
+            </p:cNvPr>
+            <p:cNvPicPr>
+              <a:picLocks noChangeAspect="1"/>
+            </p:cNvPicPr>
+            <p:nvPr/>
+          </p:nvPicPr>
+          <p:blipFill>
+            <a:blip r:embed="rId6">
+              <a:extLst>
+                <a:ext uri="{28A0092B-C50C-407E-A947-70E740481C1C}">
+                  <a14:useLocalDpi xmlns:a14="http://schemas.microsoft.com/office/drawing/2010/main" val="0"/>
+                </a:ext>
+                <a:ext uri="{96DAC541-7B7A-43D3-8B79-37D633B846F1}">
+                  <asvg:svgBlip xmlns:asvg="http://schemas.microsoft.com/office/drawing/2016/SVG/main" r:embed="rId7"/>
+                </a:ext>
+              </a:extLst>
+            </a:blip>
+            <a:stretch>
+              <a:fillRect/>
+            </a:stretch>
+          </p:blipFill>
+          <p:spPr>
+            <a:xfrm>
+              <a:off x="6736918" y="3234662"/>
+              <a:ext cx="1384727" cy="1384727"/>
+            </a:xfrm>
+            <a:prstGeom prst="rect">
+              <a:avLst/>
+            </a:prstGeom>
+          </p:spPr>
+        </p:pic>
+        <p:pic>
+          <p:nvPicPr>
+            <p:cNvPr id="13" name="Graphic 12" descr="Thermometer">
+              <a:extLst>
+                <a:ext uri="{FF2B5EF4-FFF2-40B4-BE49-F238E27FC236}">
+                  <a16:creationId xmlns:a16="http://schemas.microsoft.com/office/drawing/2014/main" id="{1D866872-9456-46EB-A190-D86AE4E3D0E3}"/>
+                </a:ext>
+              </a:extLst>
+            </p:cNvPr>
+            <p:cNvPicPr>
+              <a:picLocks noChangeAspect="1"/>
+            </p:cNvPicPr>
+            <p:nvPr/>
+          </p:nvPicPr>
+          <p:blipFill>
+            <a:blip r:embed="rId8">
+              <a:extLst>
+                <a:ext uri="{28A0092B-C50C-407E-A947-70E740481C1C}">
+                  <a14:useLocalDpi xmlns:a14="http://schemas.microsoft.com/office/drawing/2010/main" val="0"/>
+                </a:ext>
+                <a:ext uri="{96DAC541-7B7A-43D3-8B79-37D633B846F1}">
+                  <asvg:svgBlip xmlns:asvg="http://schemas.microsoft.com/office/drawing/2016/SVG/main" r:embed="rId9"/>
+                </a:ext>
+              </a:extLst>
+            </a:blip>
+            <a:stretch>
+              <a:fillRect/>
+            </a:stretch>
+          </p:blipFill>
+          <p:spPr>
+            <a:xfrm>
+              <a:off x="7571312" y="2378732"/>
+              <a:ext cx="1384727" cy="1384727"/>
+            </a:xfrm>
+            <a:prstGeom prst="rect">
+              <a:avLst/>
+            </a:prstGeom>
+          </p:spPr>
+        </p:pic>
+      </p:grpSp>
+      <p:sp>
+        <p:nvSpPr>
+          <p:cNvPr id="16" name="TextBox 15">
+            <a:extLst>
+              <a:ext uri="{FF2B5EF4-FFF2-40B4-BE49-F238E27FC236}">
+                <a16:creationId xmlns:a16="http://schemas.microsoft.com/office/drawing/2014/main" id="{7F3F1ED2-9593-4327-A919-6F94842E9FF0}"/>
+              </a:ext>
+            </a:extLst>
+          </p:cNvPr>
+          <p:cNvSpPr txBox="1"/>
+          <p:nvPr/>
+        </p:nvSpPr>
+        <p:spPr>
+          <a:xfrm>
+            <a:off x="883592" y="5690975"/>
+            <a:ext cx="1158034" cy="461665"/>
+          </a:xfrm>
+          <a:prstGeom prst="rect">
+            <a:avLst/>
+          </a:prstGeom>
+        </p:spPr>
+        <p:style>
+          <a:lnRef idx="2">
+            <a:schemeClr val="dk1"/>
+          </a:lnRef>
+          <a:fillRef idx="1">
+            <a:schemeClr val="lt1"/>
+          </a:fillRef>
+          <a:effectRef idx="0">
+            <a:schemeClr val="dk1"/>
+          </a:effectRef>
+          <a:fontRef idx="minor">
+            <a:schemeClr val="dk1"/>
+          </a:fontRef>
+        </p:style>
+        <p:txBody>
+          <a:bodyPr wrap="square" rtlCol="0">
+            <a:spAutoFit/>
+          </a:bodyPr>
+          <a:lstStyle/>
+          <a:p>
+            <a:pPr algn="ctr"/>
+            <a:r>
+              <a:rPr lang="en-US" sz="2400" b="1" dirty="0"/>
+              <a:t>Photon</a:t>
+            </a:r>
+          </a:p>
+        </p:txBody>
+      </p:sp>
+      <p:sp>
+        <p:nvSpPr>
+          <p:cNvPr id="17" name="TextBox 16">
+            <a:extLst>
+              <a:ext uri="{FF2B5EF4-FFF2-40B4-BE49-F238E27FC236}">
+                <a16:creationId xmlns:a16="http://schemas.microsoft.com/office/drawing/2014/main" id="{C3CD7E23-4859-4854-85A9-32CCFD2CBFB4}"/>
+              </a:ext>
+            </a:extLst>
+          </p:cNvPr>
+          <p:cNvSpPr txBox="1"/>
+          <p:nvPr/>
+        </p:nvSpPr>
+        <p:spPr>
+          <a:xfrm>
+            <a:off x="4489117" y="5690975"/>
+            <a:ext cx="2252770" cy="461665"/>
+          </a:xfrm>
+          <a:prstGeom prst="rect">
+            <a:avLst/>
+          </a:prstGeom>
+        </p:spPr>
+        <p:style>
+          <a:lnRef idx="2">
+            <a:schemeClr val="dk1"/>
+          </a:lnRef>
+          <a:fillRef idx="1">
+            <a:schemeClr val="lt1"/>
+          </a:fillRef>
+          <a:effectRef idx="0">
+            <a:schemeClr val="dk1"/>
+          </a:effectRef>
+          <a:fontRef idx="minor">
+            <a:schemeClr val="dk1"/>
+          </a:fontRef>
+        </p:style>
+        <p:txBody>
+          <a:bodyPr wrap="square" rtlCol="0">
+            <a:spAutoFit/>
+          </a:bodyPr>
+          <a:lstStyle/>
+          <a:p>
+            <a:pPr algn="ctr"/>
+            <a:r>
+              <a:rPr lang="en-US" sz="2400" b="1" dirty="0"/>
+              <a:t>Particle Cloud</a:t>
+            </a:r>
+          </a:p>
+        </p:txBody>
+      </p:sp>
+      <p:sp>
+        <p:nvSpPr>
+          <p:cNvPr id="18" name="TextBox 17">
+            <a:extLst>
+              <a:ext uri="{FF2B5EF4-FFF2-40B4-BE49-F238E27FC236}">
+                <a16:creationId xmlns:a16="http://schemas.microsoft.com/office/drawing/2014/main" id="{78DF10E0-2FF4-4ACD-B086-F78C18167F2A}"/>
+              </a:ext>
+            </a:extLst>
+          </p:cNvPr>
+          <p:cNvSpPr txBox="1"/>
+          <p:nvPr/>
+        </p:nvSpPr>
+        <p:spPr>
+          <a:xfrm>
+            <a:off x="9142085" y="5690975"/>
+            <a:ext cx="2252770" cy="461665"/>
+          </a:xfrm>
+          <a:prstGeom prst="rect">
+            <a:avLst/>
+          </a:prstGeom>
+        </p:spPr>
+        <p:style>
+          <a:lnRef idx="2">
+            <a:schemeClr val="dk1"/>
+          </a:lnRef>
+          <a:fillRef idx="1">
+            <a:schemeClr val="lt1"/>
+          </a:fillRef>
+          <a:effectRef idx="0">
+            <a:schemeClr val="dk1"/>
+          </a:effectRef>
+          <a:fontRef idx="minor">
+            <a:schemeClr val="dk1"/>
+          </a:fontRef>
+        </p:style>
+        <p:txBody>
+          <a:bodyPr wrap="square" rtlCol="0">
+            <a:spAutoFit/>
+          </a:bodyPr>
+          <a:lstStyle/>
+          <a:p>
+            <a:pPr algn="ctr"/>
+            <a:r>
+              <a:rPr lang="en-US" sz="2400" b="1" dirty="0"/>
+              <a:t>Weather API</a:t>
+            </a:r>
+          </a:p>
+        </p:txBody>
+      </p:sp>
+      <p:pic>
+        <p:nvPicPr>
+          <p:cNvPr id="6" name="Picture 5">
+            <a:extLst>
+              <a:ext uri="{FF2B5EF4-FFF2-40B4-BE49-F238E27FC236}">
+                <a16:creationId xmlns:a16="http://schemas.microsoft.com/office/drawing/2014/main" id="{11F63FB4-7BB7-5BCD-BD0A-4CA553AA8FF4}"/>
+              </a:ext>
+            </a:extLst>
+          </p:cNvPr>
+          <p:cNvPicPr>
+            <a:picLocks noChangeAspect="1"/>
+          </p:cNvPicPr>
+          <p:nvPr/>
+        </p:nvPicPr>
+        <p:blipFill>
+          <a:blip r:embed="rId10"/>
+          <a:stretch>
+            <a:fillRect/>
+          </a:stretch>
+        </p:blipFill>
+        <p:spPr>
+          <a:xfrm>
+            <a:off x="5614958" y="2324796"/>
+            <a:ext cx="3126219" cy="2339622"/>
+          </a:xfrm>
+          <a:prstGeom prst="rect">
+            <a:avLst/>
+          </a:prstGeom>
+          <a:ln>
+            <a:solidFill>
+              <a:schemeClr val="tx1"/>
+            </a:solidFill>
+          </a:ln>
+        </p:spPr>
+      </p:pic>
+      <p:sp>
+        <p:nvSpPr>
+          <p:cNvPr id="8" name="Rectangle: Rounded Corners 7">
+            <a:extLst>
+              <a:ext uri="{FF2B5EF4-FFF2-40B4-BE49-F238E27FC236}">
+                <a16:creationId xmlns:a16="http://schemas.microsoft.com/office/drawing/2014/main" id="{E3A9AEC4-F071-170A-E336-B8C83FA0EE31}"/>
+              </a:ext>
+            </a:extLst>
+          </p:cNvPr>
+          <p:cNvSpPr/>
+          <p:nvPr/>
+        </p:nvSpPr>
+        <p:spPr>
+          <a:xfrm>
+            <a:off x="5824694" y="2588747"/>
+            <a:ext cx="2206426" cy="384900"/>
+          </a:xfrm>
+          <a:prstGeom prst="roundRect">
+            <a:avLst/>
+          </a:prstGeom>
+          <a:noFill/>
+          <a:ln w="57150">
+            <a:solidFill>
+              <a:srgbClr val="7030A0"/>
+            </a:solidFill>
+          </a:ln>
+        </p:spPr>
+        <p:style>
+          <a:lnRef idx="2">
+            <a:schemeClr val="accent1">
+              <a:shade val="15000"/>
+            </a:schemeClr>
+          </a:lnRef>
+          <a:fillRef idx="1">
+            <a:schemeClr val="accent1"/>
+          </a:fillRef>
+          <a:effectRef idx="0">
+            <a:schemeClr val="accent1"/>
+          </a:effectRef>
+          <a:fontRef idx="minor">
+            <a:schemeClr val="lt1"/>
+          </a:fontRef>
+        </p:style>
+        <p:txBody>
+          <a:bodyPr rtlCol="0" anchor="ctr"/>
+          <a:lstStyle/>
+          <a:p>
+            <a:pPr algn="ctr"/>
+            <a:endParaRPr lang="en-US"/>
+          </a:p>
+        </p:txBody>
+      </p:sp>
+      <p:sp>
+        <p:nvSpPr>
+          <p:cNvPr id="19" name="TextBox 18">
+            <a:extLst>
+              <a:ext uri="{FF2B5EF4-FFF2-40B4-BE49-F238E27FC236}">
+                <a16:creationId xmlns:a16="http://schemas.microsoft.com/office/drawing/2014/main" id="{EFED0B18-36D5-04CE-05A5-A927FD9F98CA}"/>
+              </a:ext>
+            </a:extLst>
+          </p:cNvPr>
+          <p:cNvSpPr txBox="1"/>
+          <p:nvPr/>
+        </p:nvSpPr>
+        <p:spPr>
+          <a:xfrm>
+            <a:off x="6454376" y="1976082"/>
+            <a:ext cx="2277375" cy="307777"/>
+          </a:xfrm>
+          <a:prstGeom prst="rect">
+            <a:avLst/>
+          </a:prstGeom>
+          <a:solidFill>
+            <a:srgbClr val="FFFF00"/>
+          </a:solidFill>
+          <a:ln>
+            <a:noFill/>
+          </a:ln>
+        </p:spPr>
+        <p:style>
+          <a:lnRef idx="2">
+            <a:schemeClr val="dk1"/>
+          </a:lnRef>
+          <a:fillRef idx="1">
+            <a:schemeClr val="lt1"/>
+          </a:fillRef>
+          <a:effectRef idx="0">
+            <a:schemeClr val="dk1"/>
+          </a:effectRef>
+          <a:fontRef idx="minor">
+            <a:schemeClr val="dk1"/>
+          </a:fontRef>
+        </p:style>
+        <p:txBody>
+          <a:bodyPr wrap="square" rtlCol="0">
+            <a:spAutoFit/>
+          </a:bodyPr>
+          <a:lstStyle/>
+          <a:p>
+            <a:pPr algn="ctr"/>
+            <a:r>
+              <a:rPr lang="en-US" sz="1400" b="1" dirty="0"/>
+              <a:t>JSON from </a:t>
+            </a:r>
+            <a:r>
+              <a:rPr lang="en-US" sz="1400" b="1" dirty="0" err="1"/>
+              <a:t>Weatherstack</a:t>
+            </a:r>
+            <a:endParaRPr lang="en-US" sz="1400" b="1" dirty="0"/>
+          </a:p>
+        </p:txBody>
+      </p:sp>
+      <p:sp>
+        <p:nvSpPr>
+          <p:cNvPr id="24" name="Arc 23">
+            <a:extLst>
+              <a:ext uri="{FF2B5EF4-FFF2-40B4-BE49-F238E27FC236}">
+                <a16:creationId xmlns:a16="http://schemas.microsoft.com/office/drawing/2014/main" id="{B94720B2-15C5-4040-BBAB-CEF7AF33872D}"/>
+              </a:ext>
+            </a:extLst>
+          </p:cNvPr>
+          <p:cNvSpPr/>
+          <p:nvPr/>
+        </p:nvSpPr>
+        <p:spPr>
+          <a:xfrm>
+            <a:off x="6055847" y="1037667"/>
+            <a:ext cx="4595119" cy="1646003"/>
+          </a:xfrm>
+          <a:prstGeom prst="arc">
+            <a:avLst>
+              <a:gd name="adj1" fmla="val 4386021"/>
+              <a:gd name="adj2" fmla="val 10484368"/>
+            </a:avLst>
+          </a:prstGeom>
+          <a:ln w="57150">
+            <a:solidFill>
+              <a:srgbClr val="FF0000"/>
+            </a:solidFill>
+            <a:tailEnd type="triangle" w="lg" len="med"/>
+          </a:ln>
+        </p:spPr>
+        <p:style>
+          <a:lnRef idx="1">
+            <a:schemeClr val="accent1"/>
+          </a:lnRef>
+          <a:fillRef idx="0">
+            <a:schemeClr val="accent1"/>
+          </a:fillRef>
+          <a:effectRef idx="0">
+            <a:schemeClr val="accent1"/>
+          </a:effectRef>
+          <a:fontRef idx="minor">
+            <a:schemeClr val="tx1"/>
+          </a:fontRef>
+        </p:style>
+        <p:txBody>
+          <a:bodyPr rtlCol="0" anchor="ctr"/>
+          <a:lstStyle/>
+          <a:p>
+            <a:pPr algn="ctr"/>
+            <a:endParaRPr lang="en-US"/>
+          </a:p>
+        </p:txBody>
+      </p:sp>
+      <p:sp>
+        <p:nvSpPr>
+          <p:cNvPr id="2" name="Arc 1">
+            <a:extLst>
+              <a:ext uri="{FF2B5EF4-FFF2-40B4-BE49-F238E27FC236}">
+                <a16:creationId xmlns:a16="http://schemas.microsoft.com/office/drawing/2014/main" id="{44918D8E-5C38-0766-CC1D-2CE156E934C4}"/>
+              </a:ext>
+            </a:extLst>
+          </p:cNvPr>
+          <p:cNvSpPr/>
+          <p:nvPr/>
+        </p:nvSpPr>
+        <p:spPr>
+          <a:xfrm>
+            <a:off x="447681" y="1343880"/>
+            <a:ext cx="4595119" cy="1646003"/>
+          </a:xfrm>
+          <a:prstGeom prst="arc">
+            <a:avLst>
+              <a:gd name="adj1" fmla="val 93392"/>
+              <a:gd name="adj2" fmla="val 7647074"/>
+            </a:avLst>
+          </a:prstGeom>
+          <a:ln w="57150">
+            <a:solidFill>
+              <a:srgbClr val="FF0000"/>
+            </a:solidFill>
+            <a:tailEnd type="triangle" w="lg" len="med"/>
+          </a:ln>
+        </p:spPr>
+        <p:style>
+          <a:lnRef idx="1">
+            <a:schemeClr val="accent1"/>
+          </a:lnRef>
+          <a:fillRef idx="0">
+            <a:schemeClr val="accent1"/>
+          </a:fillRef>
+          <a:effectRef idx="0">
+            <a:schemeClr val="accent1"/>
+          </a:effectRef>
+          <a:fontRef idx="minor">
+            <a:schemeClr val="tx1"/>
+          </a:fontRef>
+        </p:style>
+        <p:txBody>
+          <a:bodyPr rtlCol="0" anchor="ctr"/>
+          <a:lstStyle/>
+          <a:p>
+            <a:pPr algn="ctr"/>
+            <a:endParaRPr lang="en-US"/>
+          </a:p>
+        </p:txBody>
+      </p:sp>
+      <p:pic>
+        <p:nvPicPr>
+          <p:cNvPr id="3" name="Picture 2">
+            <a:extLst>
+              <a:ext uri="{FF2B5EF4-FFF2-40B4-BE49-F238E27FC236}">
+                <a16:creationId xmlns:a16="http://schemas.microsoft.com/office/drawing/2014/main" id="{F4E2D449-7331-0F71-EF50-3B380EA1F75B}"/>
+              </a:ext>
+            </a:extLst>
+          </p:cNvPr>
+          <p:cNvPicPr>
+            <a:picLocks noChangeAspect="1"/>
+          </p:cNvPicPr>
+          <p:nvPr/>
+        </p:nvPicPr>
+        <p:blipFill rotWithShape="1">
+          <a:blip r:embed="rId11"/>
+          <a:srcRect t="3148" r="6212" b="11252"/>
+          <a:stretch/>
+        </p:blipFill>
+        <p:spPr>
+          <a:xfrm>
+            <a:off x="2170395" y="3417077"/>
+            <a:ext cx="2689654" cy="678991"/>
+          </a:xfrm>
+          <a:prstGeom prst="rect">
+            <a:avLst/>
+          </a:prstGeom>
+          <a:ln>
+            <a:solidFill>
+              <a:schemeClr val="tx1"/>
+            </a:solidFill>
+          </a:ln>
+        </p:spPr>
+      </p:pic>
+      <p:sp>
+        <p:nvSpPr>
+          <p:cNvPr id="4" name="TextBox 3">
+            <a:extLst>
+              <a:ext uri="{FF2B5EF4-FFF2-40B4-BE49-F238E27FC236}">
+                <a16:creationId xmlns:a16="http://schemas.microsoft.com/office/drawing/2014/main" id="{A0043A6C-194E-3E65-9A99-73C28DB7E24C}"/>
+              </a:ext>
+            </a:extLst>
+          </p:cNvPr>
+          <p:cNvSpPr txBox="1"/>
+          <p:nvPr/>
+        </p:nvSpPr>
+        <p:spPr>
+          <a:xfrm>
+            <a:off x="2481069" y="3104544"/>
+            <a:ext cx="2277375" cy="307777"/>
+          </a:xfrm>
+          <a:prstGeom prst="rect">
+            <a:avLst/>
+          </a:prstGeom>
+          <a:solidFill>
+            <a:srgbClr val="FFFF00"/>
+          </a:solidFill>
+          <a:ln>
+            <a:noFill/>
+          </a:ln>
+        </p:spPr>
+        <p:style>
+          <a:lnRef idx="2">
+            <a:schemeClr val="dk1"/>
+          </a:lnRef>
+          <a:fillRef idx="1">
+            <a:schemeClr val="lt1"/>
+          </a:fillRef>
+          <a:effectRef idx="0">
+            <a:schemeClr val="dk1"/>
+          </a:effectRef>
+          <a:fontRef idx="minor">
+            <a:schemeClr val="dk1"/>
+          </a:fontRef>
+        </p:style>
+        <p:txBody>
+          <a:bodyPr wrap="square" rtlCol="0">
+            <a:spAutoFit/>
+          </a:bodyPr>
+          <a:lstStyle/>
+          <a:p>
+            <a:pPr algn="ctr"/>
+            <a:r>
+              <a:rPr lang="en-US" sz="1400" b="1" dirty="0"/>
+              <a:t>JSON from Particle Cloud</a:t>
+            </a:r>
+          </a:p>
+        </p:txBody>
+      </p:sp>
+      <p:pic>
+        <p:nvPicPr>
+          <p:cNvPr id="10" name="Picture 9">
+            <a:extLst>
+              <a:ext uri="{FF2B5EF4-FFF2-40B4-BE49-F238E27FC236}">
+                <a16:creationId xmlns:a16="http://schemas.microsoft.com/office/drawing/2014/main" id="{E9156384-DA15-F794-2AF1-44DC8287C467}"/>
+              </a:ext>
+            </a:extLst>
+          </p:cNvPr>
+          <p:cNvPicPr>
+            <a:picLocks noChangeAspect="1"/>
+          </p:cNvPicPr>
+          <p:nvPr/>
+        </p:nvPicPr>
+        <p:blipFill>
+          <a:blip r:embed="rId12">
+            <a:extLst>
+              <a:ext uri="{28A0092B-C50C-407E-A947-70E740481C1C}">
+                <a14:useLocalDpi xmlns:a14="http://schemas.microsoft.com/office/drawing/2010/main" val="0"/>
+              </a:ext>
+            </a:extLst>
+          </a:blip>
+          <a:srcRect/>
+          <a:stretch/>
+        </p:blipFill>
+        <p:spPr>
+          <a:xfrm>
+            <a:off x="867820" y="2333051"/>
+            <a:ext cx="1189579" cy="2675462"/>
+          </a:xfrm>
+          <a:prstGeom prst="rect">
+            <a:avLst/>
+          </a:prstGeom>
+        </p:spPr>
+      </p:pic>
+    </p:spTree>
+    <p:extLst>
+      <p:ext uri="{BB962C8B-B14F-4D97-AF65-F5344CB8AC3E}">
+        <p14:creationId xmlns:p14="http://schemas.microsoft.com/office/powerpoint/2010/main" val="276576301"/>
+      </p:ext>
+    </p:extLst>
+  </p:cSld>
+  <p:clrMapOvr>
+    <a:masterClrMapping/>
+  </p:clrMapOvr>
+</p:sld>
+</file>
+
+<file path=ppt/slides/slide11.xml><?xml version="1.0" encoding="utf-8"?>
+<p:sld xmlns:a="http://schemas.openxmlformats.org/drawingml/2006/main" xmlns:r="http://schemas.openxmlformats.org/officeDocument/2006/relationships" xmlns:p="http://schemas.openxmlformats.org/presentationml/2006/main">
+  <p:cSld>
+    <p:spTree>
+      <p:nvGrpSpPr>
+        <p:cNvPr id="1" name=""/>
+        <p:cNvGrpSpPr/>
+        <p:nvPr/>
+      </p:nvGrpSpPr>
+      <p:grpSpPr>
+        <a:xfrm>
+          <a:off x="0" y="0"/>
+          <a:ext cx="0" cy="0"/>
+          <a:chOff x="0" y="0"/>
+          <a:chExt cx="0" cy="0"/>
+        </a:xfrm>
+      </p:grpSpPr>
+      <p:pic>
+        <p:nvPicPr>
+          <p:cNvPr id="7" name="Graphic 6" descr="Cloud">
+            <a:extLst>
+              <a:ext uri="{FF2B5EF4-FFF2-40B4-BE49-F238E27FC236}">
+                <a16:creationId xmlns:a16="http://schemas.microsoft.com/office/drawing/2014/main" id="{3A87124C-1FD9-4AE0-A262-F1564B6C0154}"/>
+              </a:ext>
+            </a:extLst>
+          </p:cNvPr>
+          <p:cNvPicPr>
+            <a:picLocks noChangeAspect="1"/>
+          </p:cNvPicPr>
+          <p:nvPr/>
+        </p:nvPicPr>
+        <p:blipFill>
+          <a:blip r:embed="rId2">
+            <a:extLst>
+              <a:ext uri="{28A0092B-C50C-407E-A947-70E740481C1C}">
+                <a14:useLocalDpi xmlns:a14="http://schemas.microsoft.com/office/drawing/2010/main" val="0"/>
+              </a:ext>
+              <a:ext uri="{96DAC541-7B7A-43D3-8B79-37D633B846F1}">
+                <asvg:svgBlip xmlns:asvg="http://schemas.microsoft.com/office/drawing/2016/SVG/main" r:embed="rId3"/>
+              </a:ext>
+            </a:extLst>
+          </a:blip>
+          <a:stretch>
+            <a:fillRect/>
+          </a:stretch>
+        </p:blipFill>
+        <p:spPr>
+          <a:xfrm>
+            <a:off x="4181462" y="-138063"/>
+            <a:ext cx="2868079" cy="2868079"/>
+          </a:xfrm>
+          <a:prstGeom prst="rect">
+            <a:avLst/>
+          </a:prstGeom>
+        </p:spPr>
+      </p:pic>
+      <p:grpSp>
+        <p:nvGrpSpPr>
+          <p:cNvPr id="15" name="Group 14">
+            <a:extLst>
+              <a:ext uri="{FF2B5EF4-FFF2-40B4-BE49-F238E27FC236}">
+                <a16:creationId xmlns:a16="http://schemas.microsoft.com/office/drawing/2014/main" id="{40C5B209-4AA9-4DED-8227-297A42EC8449}"/>
+              </a:ext>
+            </a:extLst>
+          </p:cNvPr>
+          <p:cNvGrpSpPr/>
+          <p:nvPr/>
+        </p:nvGrpSpPr>
+        <p:grpSpPr>
+          <a:xfrm>
+            <a:off x="8810605" y="2058065"/>
+            <a:ext cx="2915728" cy="2551953"/>
+            <a:chOff x="6109739" y="2155513"/>
+            <a:chExt cx="2915728" cy="2551953"/>
+          </a:xfrm>
+        </p:grpSpPr>
+        <p:sp>
+          <p:nvSpPr>
+            <p:cNvPr id="14" name="Rectangle: Rounded Corners 13">
+              <a:extLst>
+                <a:ext uri="{FF2B5EF4-FFF2-40B4-BE49-F238E27FC236}">
+                  <a16:creationId xmlns:a16="http://schemas.microsoft.com/office/drawing/2014/main" id="{2EEE5A17-A7AE-42DB-AC77-31B86878D050}"/>
+                </a:ext>
+              </a:extLst>
+            </p:cNvPr>
+            <p:cNvSpPr/>
+            <p:nvPr/>
+          </p:nvSpPr>
+          <p:spPr>
+            <a:xfrm>
+              <a:off x="6109739" y="2215165"/>
+              <a:ext cx="2915728" cy="2492301"/>
+            </a:xfrm>
+            <a:prstGeom prst="roundRect">
+              <a:avLst/>
+            </a:prstGeom>
+            <a:solidFill>
+              <a:schemeClr val="accent2">
+                <a:lumMod val="40000"/>
+                <a:lumOff val="60000"/>
+                <a:alpha val="50000"/>
+              </a:schemeClr>
+            </a:solidFill>
+            <a:ln>
+              <a:solidFill>
+                <a:schemeClr val="tx1"/>
+              </a:solidFill>
+            </a:ln>
+          </p:spPr>
+          <p:style>
+            <a:lnRef idx="0">
+              <a:scrgbClr r="0" g="0" b="0"/>
+            </a:lnRef>
+            <a:fillRef idx="0">
+              <a:scrgbClr r="0" g="0" b="0"/>
+            </a:fillRef>
+            <a:effectRef idx="0">
+              <a:scrgbClr r="0" g="0" b="0"/>
+            </a:effectRef>
+            <a:fontRef idx="minor">
+              <a:schemeClr val="lt1"/>
+            </a:fontRef>
+          </p:style>
+          <p:txBody>
+            <a:bodyPr rtlCol="0" anchor="ctr"/>
+            <a:lstStyle/>
+            <a:p>
+              <a:pPr algn="ctr"/>
+              <a:endParaRPr lang="en-US" dirty="0"/>
+            </a:p>
+          </p:txBody>
+        </p:sp>
+        <p:pic>
+          <p:nvPicPr>
+            <p:cNvPr id="9" name="Graphic 8" descr="Snowflake">
+              <a:extLst>
+                <a:ext uri="{FF2B5EF4-FFF2-40B4-BE49-F238E27FC236}">
+                  <a16:creationId xmlns:a16="http://schemas.microsoft.com/office/drawing/2014/main" id="{FC727A84-CBF2-49F0-9E8E-1B2922386E78}"/>
+                </a:ext>
+              </a:extLst>
+            </p:cNvPr>
+            <p:cNvPicPr>
+              <a:picLocks noChangeAspect="1"/>
+            </p:cNvPicPr>
+            <p:nvPr/>
+          </p:nvPicPr>
+          <p:blipFill>
+            <a:blip r:embed="rId4">
+              <a:extLst>
+                <a:ext uri="{28A0092B-C50C-407E-A947-70E740481C1C}">
+                  <a14:useLocalDpi xmlns:a14="http://schemas.microsoft.com/office/drawing/2010/main" val="0"/>
+                </a:ext>
+                <a:ext uri="{96DAC541-7B7A-43D3-8B79-37D633B846F1}">
+                  <asvg:svgBlip xmlns:asvg="http://schemas.microsoft.com/office/drawing/2016/SVG/main" r:embed="rId5"/>
+                </a:ext>
+              </a:extLst>
+            </a:blip>
+            <a:stretch>
+              <a:fillRect/>
+            </a:stretch>
+          </p:blipFill>
+          <p:spPr>
+            <a:xfrm>
+              <a:off x="6267446" y="2155513"/>
+              <a:ext cx="1384727" cy="1384727"/>
+            </a:xfrm>
+            <a:prstGeom prst="rect">
+              <a:avLst/>
+            </a:prstGeom>
+          </p:spPr>
+        </p:pic>
+        <p:pic>
+          <p:nvPicPr>
+            <p:cNvPr id="11" name="Graphic 10" descr="Sun">
+              <a:extLst>
+                <a:ext uri="{FF2B5EF4-FFF2-40B4-BE49-F238E27FC236}">
+                  <a16:creationId xmlns:a16="http://schemas.microsoft.com/office/drawing/2014/main" id="{B8B76924-6095-48AC-ADE0-2531BF0FB1B7}"/>
+                </a:ext>
+              </a:extLst>
+            </p:cNvPr>
+            <p:cNvPicPr>
+              <a:picLocks noChangeAspect="1"/>
+            </p:cNvPicPr>
+            <p:nvPr/>
+          </p:nvPicPr>
+          <p:blipFill>
+            <a:blip r:embed="rId6">
+              <a:extLst>
+                <a:ext uri="{28A0092B-C50C-407E-A947-70E740481C1C}">
+                  <a14:useLocalDpi xmlns:a14="http://schemas.microsoft.com/office/drawing/2010/main" val="0"/>
+                </a:ext>
+                <a:ext uri="{96DAC541-7B7A-43D3-8B79-37D633B846F1}">
+                  <asvg:svgBlip xmlns:asvg="http://schemas.microsoft.com/office/drawing/2016/SVG/main" r:embed="rId7"/>
+                </a:ext>
+              </a:extLst>
+            </a:blip>
+            <a:stretch>
+              <a:fillRect/>
+            </a:stretch>
+          </p:blipFill>
+          <p:spPr>
+            <a:xfrm>
+              <a:off x="6736918" y="3234662"/>
+              <a:ext cx="1384727" cy="1384727"/>
+            </a:xfrm>
+            <a:prstGeom prst="rect">
+              <a:avLst/>
+            </a:prstGeom>
+          </p:spPr>
+        </p:pic>
+        <p:pic>
+          <p:nvPicPr>
+            <p:cNvPr id="13" name="Graphic 12" descr="Thermometer">
+              <a:extLst>
+                <a:ext uri="{FF2B5EF4-FFF2-40B4-BE49-F238E27FC236}">
+                  <a16:creationId xmlns:a16="http://schemas.microsoft.com/office/drawing/2014/main" id="{1D866872-9456-46EB-A190-D86AE4E3D0E3}"/>
+                </a:ext>
+              </a:extLst>
+            </p:cNvPr>
+            <p:cNvPicPr>
+              <a:picLocks noChangeAspect="1"/>
+            </p:cNvPicPr>
+            <p:nvPr/>
+          </p:nvPicPr>
+          <p:blipFill>
+            <a:blip r:embed="rId8">
+              <a:extLst>
+                <a:ext uri="{28A0092B-C50C-407E-A947-70E740481C1C}">
+                  <a14:useLocalDpi xmlns:a14="http://schemas.microsoft.com/office/drawing/2010/main" val="0"/>
+                </a:ext>
+                <a:ext uri="{96DAC541-7B7A-43D3-8B79-37D633B846F1}">
+                  <asvg:svgBlip xmlns:asvg="http://schemas.microsoft.com/office/drawing/2016/SVG/main" r:embed="rId9"/>
+                </a:ext>
+              </a:extLst>
+            </a:blip>
+            <a:stretch>
+              <a:fillRect/>
+            </a:stretch>
+          </p:blipFill>
+          <p:spPr>
+            <a:xfrm>
+              <a:off x="7571312" y="2378732"/>
+              <a:ext cx="1384727" cy="1384727"/>
+            </a:xfrm>
+            <a:prstGeom prst="rect">
+              <a:avLst/>
+            </a:prstGeom>
+          </p:spPr>
+        </p:pic>
+      </p:grpSp>
+      <p:sp>
+        <p:nvSpPr>
+          <p:cNvPr id="16" name="TextBox 15">
+            <a:extLst>
+              <a:ext uri="{FF2B5EF4-FFF2-40B4-BE49-F238E27FC236}">
+                <a16:creationId xmlns:a16="http://schemas.microsoft.com/office/drawing/2014/main" id="{7F3F1ED2-9593-4327-A919-6F94842E9FF0}"/>
+              </a:ext>
+            </a:extLst>
+          </p:cNvPr>
+          <p:cNvSpPr txBox="1"/>
+          <p:nvPr/>
+        </p:nvSpPr>
+        <p:spPr>
+          <a:xfrm>
+            <a:off x="883592" y="5690975"/>
+            <a:ext cx="1158034" cy="461665"/>
+          </a:xfrm>
+          <a:prstGeom prst="rect">
+            <a:avLst/>
+          </a:prstGeom>
+        </p:spPr>
+        <p:style>
+          <a:lnRef idx="2">
+            <a:schemeClr val="dk1"/>
+          </a:lnRef>
+          <a:fillRef idx="1">
+            <a:schemeClr val="lt1"/>
+          </a:fillRef>
+          <a:effectRef idx="0">
+            <a:schemeClr val="dk1"/>
+          </a:effectRef>
+          <a:fontRef idx="minor">
+            <a:schemeClr val="dk1"/>
+          </a:fontRef>
+        </p:style>
+        <p:txBody>
+          <a:bodyPr wrap="square" rtlCol="0">
+            <a:spAutoFit/>
+          </a:bodyPr>
+          <a:lstStyle/>
+          <a:p>
+            <a:pPr algn="ctr"/>
+            <a:r>
+              <a:rPr lang="en-US" sz="2400" b="1" dirty="0"/>
+              <a:t>Photon</a:t>
+            </a:r>
+          </a:p>
+        </p:txBody>
+      </p:sp>
+      <p:sp>
+        <p:nvSpPr>
+          <p:cNvPr id="17" name="TextBox 16">
+            <a:extLst>
+              <a:ext uri="{FF2B5EF4-FFF2-40B4-BE49-F238E27FC236}">
+                <a16:creationId xmlns:a16="http://schemas.microsoft.com/office/drawing/2014/main" id="{C3CD7E23-4859-4854-85A9-32CCFD2CBFB4}"/>
+              </a:ext>
+            </a:extLst>
+          </p:cNvPr>
+          <p:cNvSpPr txBox="1"/>
+          <p:nvPr/>
+        </p:nvSpPr>
+        <p:spPr>
+          <a:xfrm>
+            <a:off x="4489117" y="5690975"/>
+            <a:ext cx="2252770" cy="461665"/>
+          </a:xfrm>
+          <a:prstGeom prst="rect">
+            <a:avLst/>
+          </a:prstGeom>
+        </p:spPr>
+        <p:style>
+          <a:lnRef idx="2">
+            <a:schemeClr val="dk1"/>
+          </a:lnRef>
+          <a:fillRef idx="1">
+            <a:schemeClr val="lt1"/>
+          </a:fillRef>
+          <a:effectRef idx="0">
+            <a:schemeClr val="dk1"/>
+          </a:effectRef>
+          <a:fontRef idx="minor">
+            <a:schemeClr val="dk1"/>
+          </a:fontRef>
+        </p:style>
+        <p:txBody>
+          <a:bodyPr wrap="square" rtlCol="0">
+            <a:spAutoFit/>
+          </a:bodyPr>
+          <a:lstStyle/>
+          <a:p>
+            <a:pPr algn="ctr"/>
+            <a:r>
+              <a:rPr lang="en-US" sz="2400" b="1" dirty="0"/>
+              <a:t>Particle Cloud</a:t>
+            </a:r>
+          </a:p>
+        </p:txBody>
+      </p:sp>
+      <p:sp>
+        <p:nvSpPr>
+          <p:cNvPr id="18" name="TextBox 17">
+            <a:extLst>
+              <a:ext uri="{FF2B5EF4-FFF2-40B4-BE49-F238E27FC236}">
+                <a16:creationId xmlns:a16="http://schemas.microsoft.com/office/drawing/2014/main" id="{78DF10E0-2FF4-4ACD-B086-F78C18167F2A}"/>
+              </a:ext>
+            </a:extLst>
+          </p:cNvPr>
+          <p:cNvSpPr txBox="1"/>
+          <p:nvPr/>
+        </p:nvSpPr>
+        <p:spPr>
+          <a:xfrm>
+            <a:off x="9142085" y="5690975"/>
+            <a:ext cx="2252770" cy="461665"/>
+          </a:xfrm>
+          <a:prstGeom prst="rect">
+            <a:avLst/>
+          </a:prstGeom>
+        </p:spPr>
+        <p:style>
+          <a:lnRef idx="2">
+            <a:schemeClr val="dk1"/>
+          </a:lnRef>
+          <a:fillRef idx="1">
+            <a:schemeClr val="lt1"/>
+          </a:fillRef>
+          <a:effectRef idx="0">
+            <a:schemeClr val="dk1"/>
+          </a:effectRef>
+          <a:fontRef idx="minor">
+            <a:schemeClr val="dk1"/>
+          </a:fontRef>
+        </p:style>
+        <p:txBody>
+          <a:bodyPr wrap="square" rtlCol="0">
+            <a:spAutoFit/>
+          </a:bodyPr>
+          <a:lstStyle/>
+          <a:p>
+            <a:pPr algn="ctr"/>
+            <a:r>
+              <a:rPr lang="en-US" sz="2400" b="1" dirty="0"/>
+              <a:t>Weather API</a:t>
+            </a:r>
+          </a:p>
+        </p:txBody>
+      </p:sp>
+      <p:sp>
+        <p:nvSpPr>
+          <p:cNvPr id="4" name="Arc 3">
+            <a:extLst>
+              <a:ext uri="{FF2B5EF4-FFF2-40B4-BE49-F238E27FC236}">
+                <a16:creationId xmlns:a16="http://schemas.microsoft.com/office/drawing/2014/main" id="{BD1EE0FC-033B-42EB-BD4E-A75E1076F0C6}"/>
+              </a:ext>
+            </a:extLst>
+          </p:cNvPr>
+          <p:cNvSpPr/>
+          <p:nvPr/>
+        </p:nvSpPr>
+        <p:spPr>
+          <a:xfrm>
+            <a:off x="1602481" y="1277055"/>
+            <a:ext cx="4595119" cy="1646003"/>
+          </a:xfrm>
+          <a:prstGeom prst="arc">
+            <a:avLst>
+              <a:gd name="adj1" fmla="val 11292682"/>
+              <a:gd name="adj2" fmla="val 16981830"/>
+            </a:avLst>
+          </a:prstGeom>
+          <a:ln w="57150">
+            <a:solidFill>
+              <a:srgbClr val="7030A0"/>
+            </a:solidFill>
+            <a:tailEnd type="triangle" w="lg" len="med"/>
+          </a:ln>
+        </p:spPr>
+        <p:style>
+          <a:lnRef idx="1">
+            <a:schemeClr val="accent1"/>
+          </a:lnRef>
+          <a:fillRef idx="0">
+            <a:schemeClr val="accent1"/>
+          </a:fillRef>
+          <a:effectRef idx="0">
+            <a:schemeClr val="accent1"/>
+          </a:effectRef>
+          <a:fontRef idx="minor">
+            <a:schemeClr val="tx1"/>
+          </a:fontRef>
+        </p:style>
+        <p:txBody>
+          <a:bodyPr rtlCol="0" anchor="ctr"/>
+          <a:lstStyle/>
+          <a:p>
+            <a:pPr algn="ctr"/>
+            <a:endParaRPr lang="en-US"/>
+          </a:p>
+        </p:txBody>
+      </p:sp>
+      <p:sp>
+        <p:nvSpPr>
+          <p:cNvPr id="19" name="TextBox 18">
+            <a:extLst>
+              <a:ext uri="{FF2B5EF4-FFF2-40B4-BE49-F238E27FC236}">
+                <a16:creationId xmlns:a16="http://schemas.microsoft.com/office/drawing/2014/main" id="{2D4149D2-611E-4090-B69A-E92276D44F48}"/>
+              </a:ext>
+            </a:extLst>
+          </p:cNvPr>
+          <p:cNvSpPr txBox="1"/>
+          <p:nvPr/>
+        </p:nvSpPr>
+        <p:spPr>
+          <a:xfrm>
+            <a:off x="1872254" y="243695"/>
+            <a:ext cx="2027786" cy="923330"/>
+          </a:xfrm>
+          <a:prstGeom prst="rect">
+            <a:avLst/>
+          </a:prstGeom>
+          <a:noFill/>
+        </p:spPr>
+        <p:txBody>
+          <a:bodyPr wrap="square" rtlCol="0">
+            <a:spAutoFit/>
+          </a:bodyPr>
+          <a:lstStyle/>
+          <a:p>
+            <a:pPr algn="ctr"/>
+            <a:r>
+              <a:rPr lang="en-US" b="1" dirty="0"/>
+              <a:t>Send request via </a:t>
+            </a:r>
+            <a:r>
+              <a:rPr lang="en-US" b="1" dirty="0" err="1"/>
+              <a:t>Particle.publish</a:t>
+            </a:r>
+            <a:r>
+              <a:rPr lang="en-US" b="1" dirty="0"/>
+              <a:t>() to webhook</a:t>
+            </a:r>
+          </a:p>
+        </p:txBody>
+      </p:sp>
+      <p:sp>
+        <p:nvSpPr>
+          <p:cNvPr id="20" name="TextBox 19">
+            <a:extLst>
+              <a:ext uri="{FF2B5EF4-FFF2-40B4-BE49-F238E27FC236}">
+                <a16:creationId xmlns:a16="http://schemas.microsoft.com/office/drawing/2014/main" id="{181926D2-6827-4E7F-87F9-59F421A23196}"/>
+              </a:ext>
+            </a:extLst>
+          </p:cNvPr>
+          <p:cNvSpPr txBox="1"/>
+          <p:nvPr/>
+        </p:nvSpPr>
+        <p:spPr>
+          <a:xfrm>
+            <a:off x="7761587" y="520694"/>
+            <a:ext cx="2261373" cy="923330"/>
+          </a:xfrm>
+          <a:prstGeom prst="rect">
+            <a:avLst/>
+          </a:prstGeom>
+          <a:noFill/>
+        </p:spPr>
+        <p:txBody>
+          <a:bodyPr wrap="square" rtlCol="0">
+            <a:spAutoFit/>
+          </a:bodyPr>
+          <a:lstStyle/>
+          <a:p>
+            <a:pPr algn="ctr"/>
+            <a:r>
+              <a:rPr lang="en-US" b="1" dirty="0"/>
+              <a:t>Particle webhook connects to API endpoint</a:t>
+            </a:r>
+          </a:p>
+        </p:txBody>
+      </p:sp>
+      <p:sp>
+        <p:nvSpPr>
+          <p:cNvPr id="22" name="Arc 21">
+            <a:extLst>
+              <a:ext uri="{FF2B5EF4-FFF2-40B4-BE49-F238E27FC236}">
+                <a16:creationId xmlns:a16="http://schemas.microsoft.com/office/drawing/2014/main" id="{53158D47-55D2-4762-A3BA-61D655491B12}"/>
+              </a:ext>
+            </a:extLst>
+          </p:cNvPr>
+          <p:cNvSpPr/>
+          <p:nvPr/>
+        </p:nvSpPr>
+        <p:spPr>
+          <a:xfrm>
+            <a:off x="4751981" y="1277055"/>
+            <a:ext cx="4595119" cy="1646003"/>
+          </a:xfrm>
+          <a:prstGeom prst="arc">
+            <a:avLst>
+              <a:gd name="adj1" fmla="val 15081720"/>
+              <a:gd name="adj2" fmla="val 21236164"/>
+            </a:avLst>
+          </a:prstGeom>
+          <a:ln w="57150">
+            <a:solidFill>
+              <a:srgbClr val="7030A0"/>
+            </a:solidFill>
+            <a:tailEnd type="triangle" w="lg" len="med"/>
+          </a:ln>
+        </p:spPr>
+        <p:style>
+          <a:lnRef idx="1">
+            <a:schemeClr val="accent1"/>
+          </a:lnRef>
+          <a:fillRef idx="0">
+            <a:schemeClr val="accent1"/>
+          </a:fillRef>
+          <a:effectRef idx="0">
+            <a:schemeClr val="accent1"/>
+          </a:effectRef>
+          <a:fontRef idx="minor">
+            <a:schemeClr val="tx1"/>
+          </a:fontRef>
+        </p:style>
+        <p:txBody>
+          <a:bodyPr rtlCol="0" anchor="ctr"/>
+          <a:lstStyle/>
+          <a:p>
+            <a:pPr algn="ctr"/>
+            <a:endParaRPr lang="en-US"/>
+          </a:p>
+        </p:txBody>
+      </p:sp>
+      <p:sp>
+        <p:nvSpPr>
+          <p:cNvPr id="24" name="Arc 23">
+            <a:extLst>
+              <a:ext uri="{FF2B5EF4-FFF2-40B4-BE49-F238E27FC236}">
+                <a16:creationId xmlns:a16="http://schemas.microsoft.com/office/drawing/2014/main" id="{B94720B2-15C5-4040-BBAB-CEF7AF33872D}"/>
+              </a:ext>
+            </a:extLst>
+          </p:cNvPr>
+          <p:cNvSpPr/>
+          <p:nvPr/>
+        </p:nvSpPr>
+        <p:spPr>
+          <a:xfrm>
+            <a:off x="6055847" y="1037667"/>
+            <a:ext cx="4595119" cy="1646003"/>
+          </a:xfrm>
+          <a:prstGeom prst="arc">
+            <a:avLst>
+              <a:gd name="adj1" fmla="val 4386021"/>
+              <a:gd name="adj2" fmla="val 10484368"/>
+            </a:avLst>
+          </a:prstGeom>
+          <a:ln w="57150">
+            <a:solidFill>
+              <a:srgbClr val="FF0000"/>
+            </a:solidFill>
+            <a:tailEnd type="triangle" w="lg" len="med"/>
+          </a:ln>
+        </p:spPr>
+        <p:style>
+          <a:lnRef idx="1">
+            <a:schemeClr val="accent1"/>
+          </a:lnRef>
+          <a:fillRef idx="0">
+            <a:schemeClr val="accent1"/>
+          </a:fillRef>
+          <a:effectRef idx="0">
+            <a:schemeClr val="accent1"/>
+          </a:effectRef>
+          <a:fontRef idx="minor">
+            <a:schemeClr val="tx1"/>
+          </a:fontRef>
+        </p:style>
+        <p:txBody>
+          <a:bodyPr rtlCol="0" anchor="ctr"/>
+          <a:lstStyle/>
+          <a:p>
+            <a:pPr algn="ctr"/>
+            <a:endParaRPr lang="en-US"/>
+          </a:p>
+        </p:txBody>
+      </p:sp>
+      <p:sp>
+        <p:nvSpPr>
+          <p:cNvPr id="25" name="Arc 24">
+            <a:extLst>
+              <a:ext uri="{FF2B5EF4-FFF2-40B4-BE49-F238E27FC236}">
+                <a16:creationId xmlns:a16="http://schemas.microsoft.com/office/drawing/2014/main" id="{B02ACC8B-4F90-4DA9-BA13-551E4DFE3C35}"/>
+              </a:ext>
+            </a:extLst>
+          </p:cNvPr>
+          <p:cNvSpPr/>
+          <p:nvPr/>
+        </p:nvSpPr>
+        <p:spPr>
+          <a:xfrm>
+            <a:off x="447681" y="1343880"/>
+            <a:ext cx="4595119" cy="1646003"/>
+          </a:xfrm>
+          <a:prstGeom prst="arc">
+            <a:avLst>
+              <a:gd name="adj1" fmla="val 93392"/>
+              <a:gd name="adj2" fmla="val 7647074"/>
+            </a:avLst>
+          </a:prstGeom>
+          <a:ln w="57150">
+            <a:solidFill>
+              <a:srgbClr val="FF0000"/>
+            </a:solidFill>
+            <a:tailEnd type="triangle" w="lg" len="med"/>
+          </a:ln>
+        </p:spPr>
+        <p:style>
+          <a:lnRef idx="1">
+            <a:schemeClr val="accent1"/>
+          </a:lnRef>
+          <a:fillRef idx="0">
+            <a:schemeClr val="accent1"/>
+          </a:fillRef>
+          <a:effectRef idx="0">
+            <a:schemeClr val="accent1"/>
+          </a:effectRef>
+          <a:fontRef idx="minor">
+            <a:schemeClr val="tx1"/>
+          </a:fontRef>
+        </p:style>
+        <p:txBody>
+          <a:bodyPr rtlCol="0" anchor="ctr"/>
+          <a:lstStyle/>
+          <a:p>
+            <a:pPr algn="ctr"/>
+            <a:endParaRPr lang="en-US"/>
+          </a:p>
+        </p:txBody>
+      </p:sp>
+      <p:sp>
+        <p:nvSpPr>
+          <p:cNvPr id="26" name="TextBox 25">
+            <a:extLst>
+              <a:ext uri="{FF2B5EF4-FFF2-40B4-BE49-F238E27FC236}">
+                <a16:creationId xmlns:a16="http://schemas.microsoft.com/office/drawing/2014/main" id="{C616FBDC-574E-4D29-B3F3-541CF31BB759}"/>
+              </a:ext>
+            </a:extLst>
+          </p:cNvPr>
+          <p:cNvSpPr txBox="1"/>
+          <p:nvPr/>
+        </p:nvSpPr>
+        <p:spPr>
+          <a:xfrm>
+            <a:off x="6132035" y="2863548"/>
+            <a:ext cx="2261373" cy="923330"/>
+          </a:xfrm>
+          <a:prstGeom prst="rect">
+            <a:avLst/>
+          </a:prstGeom>
+          <a:noFill/>
+        </p:spPr>
+        <p:txBody>
+          <a:bodyPr wrap="square" rtlCol="0">
+            <a:spAutoFit/>
+          </a:bodyPr>
+          <a:lstStyle/>
+          <a:p>
+            <a:pPr algn="ctr"/>
+            <a:r>
+              <a:rPr lang="en-US" b="1" dirty="0"/>
+              <a:t>API responds with request JSON-formatted data</a:t>
+            </a:r>
+          </a:p>
+        </p:txBody>
+      </p:sp>
+      <p:sp>
+        <p:nvSpPr>
+          <p:cNvPr id="27" name="TextBox 26">
+            <a:extLst>
+              <a:ext uri="{FF2B5EF4-FFF2-40B4-BE49-F238E27FC236}">
+                <a16:creationId xmlns:a16="http://schemas.microsoft.com/office/drawing/2014/main" id="{E567FEA7-6394-4FC3-ABC5-0DE1D3832F99}"/>
+              </a:ext>
+            </a:extLst>
+          </p:cNvPr>
+          <p:cNvSpPr txBox="1"/>
+          <p:nvPr/>
+        </p:nvSpPr>
+        <p:spPr>
+          <a:xfrm>
+            <a:off x="2441190" y="3079995"/>
+            <a:ext cx="2261373" cy="923330"/>
+          </a:xfrm>
+          <a:prstGeom prst="rect">
+            <a:avLst/>
+          </a:prstGeom>
+          <a:noFill/>
+        </p:spPr>
+        <p:txBody>
+          <a:bodyPr wrap="square" rtlCol="0">
+            <a:spAutoFit/>
+          </a:bodyPr>
+          <a:lstStyle/>
+          <a:p>
+            <a:pPr algn="ctr"/>
+            <a:r>
+              <a:rPr lang="en-US" b="1" dirty="0"/>
+              <a:t>Photon receives JSON data via </a:t>
+            </a:r>
+            <a:r>
+              <a:rPr lang="en-US" b="1" dirty="0" err="1"/>
+              <a:t>Particle.subscribe</a:t>
+            </a:r>
+            <a:r>
+              <a:rPr lang="en-US" b="1" dirty="0"/>
+              <a:t>()</a:t>
+            </a:r>
+          </a:p>
+        </p:txBody>
+      </p:sp>
+      <p:pic>
+        <p:nvPicPr>
+          <p:cNvPr id="2" name="Picture 1">
+            <a:extLst>
+              <a:ext uri="{FF2B5EF4-FFF2-40B4-BE49-F238E27FC236}">
+                <a16:creationId xmlns:a16="http://schemas.microsoft.com/office/drawing/2014/main" id="{6264E772-563F-D3B5-B45C-6355BC1F467C}"/>
+              </a:ext>
+            </a:extLst>
+          </p:cNvPr>
+          <p:cNvPicPr>
+            <a:picLocks noChangeAspect="1"/>
+          </p:cNvPicPr>
+          <p:nvPr/>
+        </p:nvPicPr>
+        <p:blipFill>
+          <a:blip r:embed="rId10">
+            <a:extLst>
+              <a:ext uri="{28A0092B-C50C-407E-A947-70E740481C1C}">
+                <a14:useLocalDpi xmlns:a14="http://schemas.microsoft.com/office/drawing/2010/main" val="0"/>
+              </a:ext>
+            </a:extLst>
+          </a:blip>
+          <a:srcRect/>
+          <a:stretch/>
+        </p:blipFill>
+        <p:spPr>
+          <a:xfrm>
+            <a:off x="867820" y="2333051"/>
+            <a:ext cx="1189579" cy="2675462"/>
+          </a:xfrm>
+          <a:prstGeom prst="rect">
+            <a:avLst/>
+          </a:prstGeom>
+        </p:spPr>
+      </p:pic>
+    </p:spTree>
+    <p:extLst>
+      <p:ext uri="{BB962C8B-B14F-4D97-AF65-F5344CB8AC3E}">
+        <p14:creationId xmlns:p14="http://schemas.microsoft.com/office/powerpoint/2010/main" val="1119803911"/>
+      </p:ext>
+    </p:extLst>
+  </p:cSld>
+  <p:clrMapOvr>
+    <a:masterClrMapping/>
+  </p:clrMapOvr>
+</p:sld>
+</file>
+
+<file path=ppt/slides/slide2.xml><?xml version="1.0" encoding="utf-8"?>
+<p:sld xmlns:a="http://schemas.openxmlformats.org/drawingml/2006/main" xmlns:r="http://schemas.openxmlformats.org/officeDocument/2006/relationships" xmlns:p="http://schemas.openxmlformats.org/presentationml/2006/main">
+  <p:cSld>
+    <p:spTree>
+      <p:nvGrpSpPr>
+        <p:cNvPr id="1" name=""/>
+        <p:cNvGrpSpPr/>
+        <p:nvPr/>
+      </p:nvGrpSpPr>
+      <p:grpSpPr>
+        <a:xfrm>
+          <a:off x="0" y="0"/>
+          <a:ext cx="0" cy="0"/>
+          <a:chOff x="0" y="0"/>
+          <a:chExt cx="0" cy="0"/>
+        </a:xfrm>
+      </p:grpSpPr>
+      <p:pic>
+        <p:nvPicPr>
+          <p:cNvPr id="5" name="Picture 4">
+            <a:extLst>
+              <a:ext uri="{FF2B5EF4-FFF2-40B4-BE49-F238E27FC236}">
+                <a16:creationId xmlns:a16="http://schemas.microsoft.com/office/drawing/2014/main" id="{C04133BD-C7DA-4A5B-86FC-4CD20E82A00C}"/>
+              </a:ext>
+            </a:extLst>
+          </p:cNvPr>
+          <p:cNvPicPr>
+            <a:picLocks noChangeAspect="1"/>
+          </p:cNvPicPr>
+          <p:nvPr/>
+        </p:nvPicPr>
+        <p:blipFill>
+          <a:blip r:embed="rId2">
+            <a:extLst>
+              <a:ext uri="{28A0092B-C50C-407E-A947-70E740481C1C}">
+                <a14:useLocalDpi xmlns:a14="http://schemas.microsoft.com/office/drawing/2010/main" val="0"/>
+              </a:ext>
+            </a:extLst>
+          </a:blip>
+          <a:srcRect/>
+          <a:stretch/>
+        </p:blipFill>
+        <p:spPr>
+          <a:xfrm>
+            <a:off x="867820" y="2333051"/>
+            <a:ext cx="1189579" cy="2675462"/>
           </a:xfrm>
           <a:prstGeom prst="rect">
             <a:avLst/>
@@ -4056,7 +5680,7 @@
             <a:pPr algn="ctr"/>
             <a:r>
               <a:rPr lang="en-US" sz="2400" b="1" dirty="0"/>
-              <a:t>Argon</a:t>
+              <a:t>Photon</a:t>
             </a:r>
           </a:p>
         </p:txBody>
@@ -4159,47 +5783,12 @@
           </a:p>
         </p:txBody>
       </p:sp>
-      <p:pic>
-        <p:nvPicPr>
-          <p:cNvPr id="6" name="Picture 5">
-            <a:extLst>
-              <a:ext uri="{FF2B5EF4-FFF2-40B4-BE49-F238E27FC236}">
-                <a16:creationId xmlns:a16="http://schemas.microsoft.com/office/drawing/2014/main" id="{11F63FB4-7BB7-5BCD-BD0A-4CA553AA8FF4}"/>
-              </a:ext>
-            </a:extLst>
-          </p:cNvPr>
-          <p:cNvPicPr>
-            <a:picLocks noChangeAspect="1"/>
-          </p:cNvPicPr>
-          <p:nvPr/>
-        </p:nvPicPr>
-        <p:blipFill>
-          <a:blip r:embed="rId11"/>
-          <a:stretch>
-            <a:fillRect/>
-          </a:stretch>
-        </p:blipFill>
-        <p:spPr>
-          <a:xfrm>
-            <a:off x="5614958" y="2324796"/>
-            <a:ext cx="3126219" cy="2339622"/>
-          </a:xfrm>
-          <a:prstGeom prst="rect">
-            <a:avLst/>
-          </a:prstGeom>
-          <a:ln>
-            <a:solidFill>
-              <a:schemeClr val="tx1"/>
-            </a:solidFill>
-          </a:ln>
-        </p:spPr>
-      </p:pic>
-      <p:sp>
-        <p:nvSpPr>
-          <p:cNvPr id="8" name="Rectangle: Rounded Corners 7">
-            <a:extLst>
-              <a:ext uri="{FF2B5EF4-FFF2-40B4-BE49-F238E27FC236}">
-                <a16:creationId xmlns:a16="http://schemas.microsoft.com/office/drawing/2014/main" id="{E3A9AEC4-F071-170A-E336-B8C83FA0EE31}"/>
+      <p:sp>
+        <p:nvSpPr>
+          <p:cNvPr id="4" name="Arc 3">
+            <a:extLst>
+              <a:ext uri="{FF2B5EF4-FFF2-40B4-BE49-F238E27FC236}">
+                <a16:creationId xmlns:a16="http://schemas.microsoft.com/office/drawing/2014/main" id="{BD1EE0FC-033B-42EB-BD4E-A75E1076F0C6}"/>
               </a:ext>
             </a:extLst>
           </p:cNvPr>
@@ -4208,130 +5797,18 @@
         </p:nvSpPr>
         <p:spPr>
           <a:xfrm>
-            <a:off x="5824694" y="2588747"/>
-            <a:ext cx="2206426" cy="384900"/>
-          </a:xfrm>
-          <a:prstGeom prst="roundRect">
-            <a:avLst/>
-          </a:prstGeom>
-          <a:noFill/>
+            <a:off x="1602481" y="1277055"/>
+            <a:ext cx="4595119" cy="1646003"/>
+          </a:xfrm>
+          <a:prstGeom prst="arc">
+            <a:avLst>
+              <a:gd name="adj1" fmla="val 11292682"/>
+              <a:gd name="adj2" fmla="val 16981830"/>
+            </a:avLst>
+          </a:prstGeom>
           <a:ln w="57150">
             <a:solidFill>
               <a:srgbClr val="7030A0"/>
-            </a:solidFill>
-          </a:ln>
-        </p:spPr>
-        <p:style>
-          <a:lnRef idx="2">
-            <a:schemeClr val="accent1">
-              <a:shade val="15000"/>
-            </a:schemeClr>
-          </a:lnRef>
-          <a:fillRef idx="1">
-            <a:schemeClr val="accent1"/>
-          </a:fillRef>
-          <a:effectRef idx="0">
-            <a:schemeClr val="accent1"/>
-          </a:effectRef>
-          <a:fontRef idx="minor">
-            <a:schemeClr val="lt1"/>
-          </a:fontRef>
-        </p:style>
-        <p:txBody>
-          <a:bodyPr rtlCol="0" anchor="ctr"/>
-          <a:lstStyle/>
-          <a:p>
-            <a:pPr algn="ctr"/>
-            <a:endParaRPr lang="en-US"/>
-          </a:p>
-        </p:txBody>
-      </p:sp>
-      <p:sp>
-        <p:nvSpPr>
-          <p:cNvPr id="19" name="TextBox 18">
-            <a:extLst>
-              <a:ext uri="{FF2B5EF4-FFF2-40B4-BE49-F238E27FC236}">
-                <a16:creationId xmlns:a16="http://schemas.microsoft.com/office/drawing/2014/main" id="{EFED0B18-36D5-04CE-05A5-A927FD9F98CA}"/>
-              </a:ext>
-            </a:extLst>
-          </p:cNvPr>
-          <p:cNvSpPr txBox="1"/>
-          <p:nvPr/>
-        </p:nvSpPr>
-        <p:spPr>
-          <a:xfrm>
-            <a:off x="6454376" y="1976082"/>
-            <a:ext cx="2277375" cy="307777"/>
-          </a:xfrm>
-          <a:prstGeom prst="rect">
-            <a:avLst/>
-          </a:prstGeom>
-          <a:solidFill>
-            <a:srgbClr val="FFFF00"/>
-          </a:solidFill>
-          <a:ln>
-            <a:noFill/>
-          </a:ln>
-        </p:spPr>
-        <p:style>
-          <a:lnRef idx="2">
-            <a:schemeClr val="dk1"/>
-          </a:lnRef>
-          <a:fillRef idx="1">
-            <a:schemeClr val="lt1"/>
-          </a:fillRef>
-          <a:effectRef idx="0">
-            <a:schemeClr val="dk1"/>
-          </a:effectRef>
-          <a:fontRef idx="minor">
-            <a:schemeClr val="dk1"/>
-          </a:fontRef>
-        </p:style>
-        <p:txBody>
-          <a:bodyPr wrap="square" rtlCol="0">
-            <a:spAutoFit/>
-          </a:bodyPr>
-          <a:lstStyle/>
-          <a:p>
-            <a:pPr algn="ctr"/>
-            <a:r>
-              <a:rPr lang="en-US" sz="1400" b="1" dirty="0"/>
-              <a:t>JSON from </a:t>
-            </a:r>
-            <a:r>
-              <a:rPr lang="en-US" sz="1400" b="1" dirty="0" err="1"/>
-              <a:t>Weatherstack</a:t>
-            </a:r>
-            <a:endParaRPr lang="en-US" sz="1400" b="1" dirty="0"/>
-          </a:p>
-        </p:txBody>
-      </p:sp>
-      <p:sp>
-        <p:nvSpPr>
-          <p:cNvPr id="24" name="Arc 23">
-            <a:extLst>
-              <a:ext uri="{FF2B5EF4-FFF2-40B4-BE49-F238E27FC236}">
-                <a16:creationId xmlns:a16="http://schemas.microsoft.com/office/drawing/2014/main" id="{B94720B2-15C5-4040-BBAB-CEF7AF33872D}"/>
-              </a:ext>
-            </a:extLst>
-          </p:cNvPr>
-          <p:cNvSpPr/>
-          <p:nvPr/>
-        </p:nvSpPr>
-        <p:spPr>
-          <a:xfrm>
-            <a:off x="6055847" y="1037667"/>
-            <a:ext cx="4595119" cy="1646003"/>
-          </a:xfrm>
-          <a:prstGeom prst="arc">
-            <a:avLst>
-              <a:gd name="adj1" fmla="val 4386021"/>
-              <a:gd name="adj2" fmla="val 10484368"/>
-            </a:avLst>
-          </a:prstGeom>
-          <a:ln w="57150">
-            <a:solidFill>
-              <a:srgbClr val="FF0000"/>
             </a:solidFill>
             <a:tailEnd type="triangle" w="lg" len="med"/>
           </a:ln>
@@ -4361,132 +5838,26 @@
       </p:sp>
       <p:sp>
         <p:nvSpPr>
-          <p:cNvPr id="2" name="Arc 1">
-            <a:extLst>
-              <a:ext uri="{FF2B5EF4-FFF2-40B4-BE49-F238E27FC236}">
-                <a16:creationId xmlns:a16="http://schemas.microsoft.com/office/drawing/2014/main" id="{44918D8E-5C38-0766-CC1D-2CE156E934C4}"/>
-              </a:ext>
-            </a:extLst>
-          </p:cNvPr>
-          <p:cNvSpPr/>
-          <p:nvPr/>
-        </p:nvSpPr>
-        <p:spPr>
-          <a:xfrm>
-            <a:off x="447681" y="1343880"/>
-            <a:ext cx="4595119" cy="1646003"/>
-          </a:xfrm>
-          <a:prstGeom prst="arc">
-            <a:avLst>
-              <a:gd name="adj1" fmla="val 93392"/>
-              <a:gd name="adj2" fmla="val 7647074"/>
-            </a:avLst>
-          </a:prstGeom>
-          <a:ln w="57150">
-            <a:solidFill>
-              <a:srgbClr val="FF0000"/>
-            </a:solidFill>
-            <a:tailEnd type="triangle" w="lg" len="med"/>
-          </a:ln>
-        </p:spPr>
-        <p:style>
-          <a:lnRef idx="1">
-            <a:schemeClr val="accent1"/>
-          </a:lnRef>
-          <a:fillRef idx="0">
-            <a:schemeClr val="accent1"/>
-          </a:fillRef>
-          <a:effectRef idx="0">
-            <a:schemeClr val="accent1"/>
-          </a:effectRef>
-          <a:fontRef idx="minor">
-            <a:schemeClr val="tx1"/>
-          </a:fontRef>
-        </p:style>
-        <p:txBody>
-          <a:bodyPr rtlCol="0" anchor="ctr"/>
-          <a:lstStyle/>
-          <a:p>
-            <a:pPr algn="ctr"/>
-            <a:endParaRPr lang="en-US"/>
-          </a:p>
-        </p:txBody>
-      </p:sp>
-      <p:pic>
-        <p:nvPicPr>
-          <p:cNvPr id="3" name="Picture 2">
-            <a:extLst>
-              <a:ext uri="{FF2B5EF4-FFF2-40B4-BE49-F238E27FC236}">
-                <a16:creationId xmlns:a16="http://schemas.microsoft.com/office/drawing/2014/main" id="{F4E2D449-7331-0F71-EF50-3B380EA1F75B}"/>
-              </a:ext>
-            </a:extLst>
-          </p:cNvPr>
-          <p:cNvPicPr>
-            <a:picLocks noChangeAspect="1"/>
-          </p:cNvPicPr>
-          <p:nvPr/>
-        </p:nvPicPr>
-        <p:blipFill rotWithShape="1">
-          <a:blip r:embed="rId12"/>
-          <a:srcRect t="3148" r="6212" b="11252"/>
-          <a:stretch/>
-        </p:blipFill>
-        <p:spPr>
-          <a:xfrm>
-            <a:off x="2170395" y="3417077"/>
-            <a:ext cx="2689654" cy="678991"/>
+          <p:cNvPr id="19" name="TextBox 18">
+            <a:extLst>
+              <a:ext uri="{FF2B5EF4-FFF2-40B4-BE49-F238E27FC236}">
+                <a16:creationId xmlns:a16="http://schemas.microsoft.com/office/drawing/2014/main" id="{2D4149D2-611E-4090-B69A-E92276D44F48}"/>
+              </a:ext>
+            </a:extLst>
+          </p:cNvPr>
+          <p:cNvSpPr txBox="1"/>
+          <p:nvPr/>
+        </p:nvSpPr>
+        <p:spPr>
+          <a:xfrm>
+            <a:off x="1872254" y="243695"/>
+            <a:ext cx="2027786" cy="923330"/>
           </a:xfrm>
           <a:prstGeom prst="rect">
             <a:avLst/>
           </a:prstGeom>
-          <a:ln>
-            <a:solidFill>
-              <a:schemeClr val="tx1"/>
-            </a:solidFill>
-          </a:ln>
-        </p:spPr>
-      </p:pic>
-      <p:sp>
-        <p:nvSpPr>
-          <p:cNvPr id="4" name="TextBox 3">
-            <a:extLst>
-              <a:ext uri="{FF2B5EF4-FFF2-40B4-BE49-F238E27FC236}">
-                <a16:creationId xmlns:a16="http://schemas.microsoft.com/office/drawing/2014/main" id="{A0043A6C-194E-3E65-9A99-73C28DB7E24C}"/>
-              </a:ext>
-            </a:extLst>
-          </p:cNvPr>
-          <p:cNvSpPr txBox="1"/>
-          <p:nvPr/>
-        </p:nvSpPr>
-        <p:spPr>
-          <a:xfrm>
-            <a:off x="2481069" y="3104544"/>
-            <a:ext cx="2277375" cy="307777"/>
-          </a:xfrm>
-          <a:prstGeom prst="rect">
-            <a:avLst/>
-          </a:prstGeom>
-          <a:solidFill>
-            <a:srgbClr val="FFFF00"/>
-          </a:solidFill>
-          <a:ln>
-            <a:noFill/>
-          </a:ln>
-        </p:spPr>
-        <p:style>
-          <a:lnRef idx="2">
-            <a:schemeClr val="dk1"/>
-          </a:lnRef>
-          <a:fillRef idx="1">
-            <a:schemeClr val="lt1"/>
-          </a:fillRef>
-          <a:effectRef idx="0">
-            <a:schemeClr val="dk1"/>
-          </a:effectRef>
-          <a:fontRef idx="minor">
-            <a:schemeClr val="dk1"/>
-          </a:fontRef>
-        </p:style>
+          <a:noFill/>
+        </p:spPr>
         <p:txBody>
           <a:bodyPr wrap="square" rtlCol="0">
             <a:spAutoFit/>
@@ -4495,8 +5866,16 @@
           <a:p>
             <a:pPr algn="ctr"/>
             <a:r>
-              <a:rPr lang="en-US" sz="1400" b="1" dirty="0"/>
-              <a:t>JSON from Particle Cloud</a:t>
+              <a:rPr lang="en-US" b="1" dirty="0"/>
+              <a:t>Send request via </a:t>
+            </a:r>
+            <a:r>
+              <a:rPr lang="en-US" b="1" dirty="0" err="1"/>
+              <a:t>Particle.publish</a:t>
+            </a:r>
+            <a:r>
+              <a:rPr lang="en-US" b="1" dirty="0"/>
+              <a:t>() to webhook</a:t>
             </a:r>
           </a:p>
         </p:txBody>
@@ -4504,7 +5883,7 @@
     </p:spTree>
     <p:extLst>
       <p:ext uri="{BB962C8B-B14F-4D97-AF65-F5344CB8AC3E}">
-        <p14:creationId xmlns:p14="http://schemas.microsoft.com/office/powerpoint/2010/main" val="276576301"/>
+        <p14:creationId xmlns:p14="http://schemas.microsoft.com/office/powerpoint/2010/main" val="4194219760"/>
       </p:ext>
     </p:extLst>
   </p:cSld>
@@ -4514,7 +5893,7 @@
 </p:sld>
 </file>
 
-<file path=ppt/slides/slide11.xml><?xml version="1.0" encoding="utf-8"?>
+<file path=ppt/slides/slide3.xml><?xml version="1.0" encoding="utf-8"?>
 <p:sld xmlns:a="http://schemas.openxmlformats.org/drawingml/2006/main" xmlns:r="http://schemas.openxmlformats.org/officeDocument/2006/relationships" xmlns:p="http://schemas.openxmlformats.org/presentationml/2006/main">
   <p:cSld>
     <p:spTree>
@@ -4533,10 +5912,10 @@
       </p:grpSpPr>
       <p:pic>
         <p:nvPicPr>
-          <p:cNvPr id="5" name="Picture 4" descr="Qr code&#10;&#10;Description automatically generated">
-            <a:extLst>
-              <a:ext uri="{FF2B5EF4-FFF2-40B4-BE49-F238E27FC236}">
-                <a16:creationId xmlns:a16="http://schemas.microsoft.com/office/drawing/2014/main" id="{C04133BD-C7DA-4A5B-86FC-4CD20E82A00C}"/>
+          <p:cNvPr id="7" name="Graphic 6" descr="Cloud">
+            <a:extLst>
+              <a:ext uri="{FF2B5EF4-FFF2-40B4-BE49-F238E27FC236}">
+                <a16:creationId xmlns:a16="http://schemas.microsoft.com/office/drawing/2014/main" id="{3A87124C-1FD9-4AE0-A262-F1564B6C0154}"/>
               </a:ext>
             </a:extLst>
           </p:cNvPr>
@@ -4551,44 +5930,8 @@
               <a:ext uri="{28A0092B-C50C-407E-A947-70E740481C1C}">
                 <a14:useLocalDpi xmlns:a14="http://schemas.microsoft.com/office/drawing/2010/main" val="0"/>
               </a:ext>
-            </a:extLst>
-          </a:blip>
-          <a:stretch>
-            <a:fillRect/>
-          </a:stretch>
-        </p:blipFill>
-        <p:spPr>
-          <a:xfrm>
-            <a:off x="867820" y="2324796"/>
-            <a:ext cx="1189579" cy="2691972"/>
-          </a:xfrm>
-          <a:prstGeom prst="rect">
-            <a:avLst/>
-          </a:prstGeom>
-        </p:spPr>
-      </p:pic>
-      <p:pic>
-        <p:nvPicPr>
-          <p:cNvPr id="7" name="Graphic 6" descr="Cloud">
-            <a:extLst>
-              <a:ext uri="{FF2B5EF4-FFF2-40B4-BE49-F238E27FC236}">
-                <a16:creationId xmlns:a16="http://schemas.microsoft.com/office/drawing/2014/main" id="{3A87124C-1FD9-4AE0-A262-F1564B6C0154}"/>
-              </a:ext>
-            </a:extLst>
-          </p:cNvPr>
-          <p:cNvPicPr>
-            <a:picLocks noChangeAspect="1"/>
-          </p:cNvPicPr>
-          <p:nvPr/>
-        </p:nvPicPr>
-        <p:blipFill>
-          <a:blip r:embed="rId3">
-            <a:extLst>
-              <a:ext uri="{28A0092B-C50C-407E-A947-70E740481C1C}">
-                <a14:useLocalDpi xmlns:a14="http://schemas.microsoft.com/office/drawing/2010/main" val="0"/>
-              </a:ext>
               <a:ext uri="{96DAC541-7B7A-43D3-8B79-37D633B846F1}">
-                <asvg:svgBlip xmlns:asvg="http://schemas.microsoft.com/office/drawing/2016/SVG/main" r:embed="rId4"/>
+                <asvg:svgBlip xmlns:asvg="http://schemas.microsoft.com/office/drawing/2016/SVG/main" r:embed="rId3"/>
               </a:ext>
             </a:extLst>
           </a:blip>
@@ -4697,13 +6040,13 @@
             <p:nvPr/>
           </p:nvPicPr>
           <p:blipFill>
-            <a:blip r:embed="rId5">
+            <a:blip r:embed="rId4">
               <a:extLst>
                 <a:ext uri="{28A0092B-C50C-407E-A947-70E740481C1C}">
                   <a14:useLocalDpi xmlns:a14="http://schemas.microsoft.com/office/drawing/2010/main" val="0"/>
                 </a:ext>
                 <a:ext uri="{96DAC541-7B7A-43D3-8B79-37D633B846F1}">
-                  <asvg:svgBlip xmlns:asvg="http://schemas.microsoft.com/office/drawing/2016/SVG/main" r:embed="rId6"/>
+                  <asvg:svgBlip xmlns:asvg="http://schemas.microsoft.com/office/drawing/2016/SVG/main" r:embed="rId5"/>
                 </a:ext>
               </a:extLst>
             </a:blip>
@@ -4736,13 +6079,13 @@
             <p:nvPr/>
           </p:nvPicPr>
           <p:blipFill>
-            <a:blip r:embed="rId7">
+            <a:blip r:embed="rId6">
               <a:extLst>
                 <a:ext uri="{28A0092B-C50C-407E-A947-70E740481C1C}">
                   <a14:useLocalDpi xmlns:a14="http://schemas.microsoft.com/office/drawing/2010/main" val="0"/>
                 </a:ext>
                 <a:ext uri="{96DAC541-7B7A-43D3-8B79-37D633B846F1}">
-                  <asvg:svgBlip xmlns:asvg="http://schemas.microsoft.com/office/drawing/2016/SVG/main" r:embed="rId8"/>
+                  <asvg:svgBlip xmlns:asvg="http://schemas.microsoft.com/office/drawing/2016/SVG/main" r:embed="rId7"/>
                 </a:ext>
               </a:extLst>
             </a:blip>
@@ -4775,13 +6118,13 @@
             <p:nvPr/>
           </p:nvPicPr>
           <p:blipFill>
-            <a:blip r:embed="rId9">
+            <a:blip r:embed="rId8">
               <a:extLst>
                 <a:ext uri="{28A0092B-C50C-407E-A947-70E740481C1C}">
                   <a14:useLocalDpi xmlns:a14="http://schemas.microsoft.com/office/drawing/2010/main" val="0"/>
                 </a:ext>
                 <a:ext uri="{96DAC541-7B7A-43D3-8B79-37D633B846F1}">
-                  <asvg:svgBlip xmlns:asvg="http://schemas.microsoft.com/office/drawing/2016/SVG/main" r:embed="rId10"/>
+                  <asvg:svgBlip xmlns:asvg="http://schemas.microsoft.com/office/drawing/2016/SVG/main" r:embed="rId9"/>
                 </a:ext>
               </a:extLst>
             </a:blip>
@@ -4844,7 +6187,7 @@
             <a:pPr algn="ctr"/>
             <a:r>
               <a:rPr lang="en-US" sz="2400" b="1" dirty="0"/>
-              <a:t>Argon</a:t>
+              <a:t>Photon</a:t>
             </a:r>
           </a:p>
         </p:txBody>
@@ -4972,7 +6315,9 @@
           </a:prstGeom>
           <a:ln w="57150">
             <a:solidFill>
-              <a:srgbClr val="7030A0"/>
+              <a:schemeClr val="bg1">
+                <a:lumMod val="85000"/>
+              </a:schemeClr>
             </a:solidFill>
             <a:tailEnd type="triangle" w="lg" len="med"/>
           </a:ln>
@@ -4996,7 +6341,13 @@
           <a:lstStyle/>
           <a:p>
             <a:pPr algn="ctr"/>
-            <a:endParaRPr lang="en-US"/>
+            <a:endParaRPr lang="en-US">
+              <a:solidFill>
+                <a:schemeClr val="bg2">
+                  <a:lumMod val="75000"/>
+                </a:schemeClr>
+              </a:solidFill>
+            </a:endParaRPr>
           </a:p>
         </p:txBody>
       </p:sp>
@@ -5021,6 +6372,11 @@
             <a:avLst/>
           </a:prstGeom>
           <a:noFill/>
+          <a:ln>
+            <a:solidFill>
+              <a:schemeClr val="bg1"/>
+            </a:solidFill>
+          </a:ln>
         </p:spPr>
         <p:txBody>
           <a:bodyPr wrap="square" rtlCol="0">
@@ -5030,15 +6386,33 @@
           <a:p>
             <a:pPr algn="ctr"/>
             <a:r>
-              <a:rPr lang="en-US" b="1" dirty="0"/>
+              <a:rPr lang="en-US" b="1" dirty="0">
+                <a:solidFill>
+                  <a:schemeClr val="bg1">
+                    <a:lumMod val="85000"/>
+                  </a:schemeClr>
+                </a:solidFill>
+              </a:rPr>
               <a:t>Send request via </a:t>
             </a:r>
             <a:r>
-              <a:rPr lang="en-US" b="1" dirty="0" err="1"/>
+              <a:rPr lang="en-US" b="1" dirty="0" err="1">
+                <a:solidFill>
+                  <a:schemeClr val="bg1">
+                    <a:lumMod val="85000"/>
+                  </a:schemeClr>
+                </a:solidFill>
+              </a:rPr>
               <a:t>Particle.publish</a:t>
             </a:r>
             <a:r>
-              <a:rPr lang="en-US" b="1" dirty="0"/>
+              <a:rPr lang="en-US" b="1" dirty="0">
+                <a:solidFill>
+                  <a:schemeClr val="bg1">
+                    <a:lumMod val="85000"/>
+                  </a:schemeClr>
+                </a:solidFill>
+              </a:rPr>
               <a:t>() to webhook</a:t>
             </a:r>
           </a:p>
@@ -5133,196 +6507,45 @@
           </a:p>
         </p:txBody>
       </p:sp>
-      <p:sp>
-        <p:nvSpPr>
-          <p:cNvPr id="24" name="Arc 23">
-            <a:extLst>
-              <a:ext uri="{FF2B5EF4-FFF2-40B4-BE49-F238E27FC236}">
-                <a16:creationId xmlns:a16="http://schemas.microsoft.com/office/drawing/2014/main" id="{B94720B2-15C5-4040-BBAB-CEF7AF33872D}"/>
-              </a:ext>
-            </a:extLst>
-          </p:cNvPr>
-          <p:cNvSpPr/>
-          <p:nvPr/>
-        </p:nvSpPr>
-        <p:spPr>
-          <a:xfrm>
-            <a:off x="6055847" y="1037667"/>
-            <a:ext cx="4595119" cy="1646003"/>
-          </a:xfrm>
-          <a:prstGeom prst="arc">
-            <a:avLst>
-              <a:gd name="adj1" fmla="val 4386021"/>
-              <a:gd name="adj2" fmla="val 10484368"/>
-            </a:avLst>
-          </a:prstGeom>
-          <a:ln w="57150">
-            <a:solidFill>
-              <a:srgbClr val="FF0000"/>
-            </a:solidFill>
-            <a:tailEnd type="triangle" w="lg" len="med"/>
-          </a:ln>
-        </p:spPr>
-        <p:style>
-          <a:lnRef idx="1">
-            <a:schemeClr val="accent1"/>
-          </a:lnRef>
-          <a:fillRef idx="0">
-            <a:schemeClr val="accent1"/>
-          </a:fillRef>
-          <a:effectRef idx="0">
-            <a:schemeClr val="accent1"/>
-          </a:effectRef>
-          <a:fontRef idx="minor">
-            <a:schemeClr val="tx1"/>
-          </a:fontRef>
-        </p:style>
-        <p:txBody>
-          <a:bodyPr rtlCol="0" anchor="ctr"/>
-          <a:lstStyle/>
-          <a:p>
-            <a:pPr algn="ctr"/>
-            <a:endParaRPr lang="en-US"/>
-          </a:p>
-        </p:txBody>
-      </p:sp>
-      <p:sp>
-        <p:nvSpPr>
-          <p:cNvPr id="25" name="Arc 24">
-            <a:extLst>
-              <a:ext uri="{FF2B5EF4-FFF2-40B4-BE49-F238E27FC236}">
-                <a16:creationId xmlns:a16="http://schemas.microsoft.com/office/drawing/2014/main" id="{B02ACC8B-4F90-4DA9-BA13-551E4DFE3C35}"/>
-              </a:ext>
-            </a:extLst>
-          </p:cNvPr>
-          <p:cNvSpPr/>
-          <p:nvPr/>
-        </p:nvSpPr>
-        <p:spPr>
-          <a:xfrm>
-            <a:off x="447681" y="1343880"/>
-            <a:ext cx="4595119" cy="1646003"/>
-          </a:xfrm>
-          <a:prstGeom prst="arc">
-            <a:avLst>
-              <a:gd name="adj1" fmla="val 93392"/>
-              <a:gd name="adj2" fmla="val 7647074"/>
-            </a:avLst>
-          </a:prstGeom>
-          <a:ln w="57150">
-            <a:solidFill>
-              <a:srgbClr val="FF0000"/>
-            </a:solidFill>
-            <a:tailEnd type="triangle" w="lg" len="med"/>
-          </a:ln>
-        </p:spPr>
-        <p:style>
-          <a:lnRef idx="1">
-            <a:schemeClr val="accent1"/>
-          </a:lnRef>
-          <a:fillRef idx="0">
-            <a:schemeClr val="accent1"/>
-          </a:fillRef>
-          <a:effectRef idx="0">
-            <a:schemeClr val="accent1"/>
-          </a:effectRef>
-          <a:fontRef idx="minor">
-            <a:schemeClr val="tx1"/>
-          </a:fontRef>
-        </p:style>
-        <p:txBody>
-          <a:bodyPr rtlCol="0" anchor="ctr"/>
-          <a:lstStyle/>
-          <a:p>
-            <a:pPr algn="ctr"/>
-            <a:endParaRPr lang="en-US"/>
-          </a:p>
-        </p:txBody>
-      </p:sp>
-      <p:sp>
-        <p:nvSpPr>
-          <p:cNvPr id="26" name="TextBox 25">
-            <a:extLst>
-              <a:ext uri="{FF2B5EF4-FFF2-40B4-BE49-F238E27FC236}">
-                <a16:creationId xmlns:a16="http://schemas.microsoft.com/office/drawing/2014/main" id="{C616FBDC-574E-4D29-B3F3-541CF31BB759}"/>
-              </a:ext>
-            </a:extLst>
-          </p:cNvPr>
-          <p:cNvSpPr txBox="1"/>
-          <p:nvPr/>
-        </p:nvSpPr>
-        <p:spPr>
-          <a:xfrm>
-            <a:off x="6132035" y="2863548"/>
-            <a:ext cx="2261373" cy="923330"/>
+      <p:pic>
+        <p:nvPicPr>
+          <p:cNvPr id="2" name="Picture 1">
+            <a:extLst>
+              <a:ext uri="{FF2B5EF4-FFF2-40B4-BE49-F238E27FC236}">
+                <a16:creationId xmlns:a16="http://schemas.microsoft.com/office/drawing/2014/main" id="{3E87437F-3B18-6AD8-7110-A145DC2FC9D5}"/>
+              </a:ext>
+            </a:extLst>
+          </p:cNvPr>
+          <p:cNvPicPr>
+            <a:picLocks noChangeAspect="1"/>
+          </p:cNvPicPr>
+          <p:nvPr/>
+        </p:nvPicPr>
+        <p:blipFill>
+          <a:blip r:embed="rId10">
+            <a:extLst>
+              <a:ext uri="{28A0092B-C50C-407E-A947-70E740481C1C}">
+                <a14:useLocalDpi xmlns:a14="http://schemas.microsoft.com/office/drawing/2010/main" val="0"/>
+              </a:ext>
+            </a:extLst>
+          </a:blip>
+          <a:srcRect/>
+          <a:stretch/>
+        </p:blipFill>
+        <p:spPr>
+          <a:xfrm>
+            <a:off x="867820" y="2333051"/>
+            <a:ext cx="1189579" cy="2675462"/>
           </a:xfrm>
           <a:prstGeom prst="rect">
             <a:avLst/>
           </a:prstGeom>
-          <a:noFill/>
-        </p:spPr>
-        <p:txBody>
-          <a:bodyPr wrap="square" rtlCol="0">
-            <a:spAutoFit/>
-          </a:bodyPr>
-          <a:lstStyle/>
-          <a:p>
-            <a:pPr algn="ctr"/>
-            <a:r>
-              <a:rPr lang="en-US" b="1" dirty="0"/>
-              <a:t>API responds with request JSON-formatted data</a:t>
-            </a:r>
-          </a:p>
-        </p:txBody>
-      </p:sp>
-      <p:sp>
-        <p:nvSpPr>
-          <p:cNvPr id="27" name="TextBox 26">
-            <a:extLst>
-              <a:ext uri="{FF2B5EF4-FFF2-40B4-BE49-F238E27FC236}">
-                <a16:creationId xmlns:a16="http://schemas.microsoft.com/office/drawing/2014/main" id="{E567FEA7-6394-4FC3-ABC5-0DE1D3832F99}"/>
-              </a:ext>
-            </a:extLst>
-          </p:cNvPr>
-          <p:cNvSpPr txBox="1"/>
-          <p:nvPr/>
-        </p:nvSpPr>
-        <p:spPr>
-          <a:xfrm>
-            <a:off x="2441190" y="3079995"/>
-            <a:ext cx="2261373" cy="923330"/>
-          </a:xfrm>
-          <a:prstGeom prst="rect">
-            <a:avLst/>
-          </a:prstGeom>
-          <a:noFill/>
-        </p:spPr>
-        <p:txBody>
-          <a:bodyPr wrap="square" rtlCol="0">
-            <a:spAutoFit/>
-          </a:bodyPr>
-          <a:lstStyle/>
-          <a:p>
-            <a:pPr algn="ctr"/>
-            <a:r>
-              <a:rPr lang="en-US" b="1" dirty="0"/>
-              <a:t>Argon receives JSON data via </a:t>
-            </a:r>
-            <a:r>
-              <a:rPr lang="en-US" b="1" dirty="0" err="1"/>
-              <a:t>Particle.subscribe</a:t>
-            </a:r>
-            <a:r>
-              <a:rPr lang="en-US" b="1" dirty="0"/>
-              <a:t>()</a:t>
-            </a:r>
-          </a:p>
-        </p:txBody>
-      </p:sp>
+        </p:spPr>
+      </p:pic>
     </p:spTree>
     <p:extLst>
       <p:ext uri="{BB962C8B-B14F-4D97-AF65-F5344CB8AC3E}">
-        <p14:creationId xmlns:p14="http://schemas.microsoft.com/office/powerpoint/2010/main" val="1119803911"/>
+        <p14:creationId xmlns:p14="http://schemas.microsoft.com/office/powerpoint/2010/main" val="1947142998"/>
       </p:ext>
     </p:extLst>
   </p:cSld>
@@ -5332,7 +6555,7 @@
 </p:sld>
 </file>
 
-<file path=ppt/slides/slide2.xml><?xml version="1.0" encoding="utf-8"?>
+<file path=ppt/slides/slide4.xml><?xml version="1.0" encoding="utf-8"?>
 <p:sld xmlns:a="http://schemas.openxmlformats.org/drawingml/2006/main" xmlns:r="http://schemas.openxmlformats.org/officeDocument/2006/relationships" xmlns:p="http://schemas.openxmlformats.org/presentationml/2006/main">
   <p:cSld>
     <p:spTree>
@@ -5351,10 +6574,10 @@
       </p:grpSpPr>
       <p:pic>
         <p:nvPicPr>
-          <p:cNvPr id="5" name="Picture 4" descr="Qr code&#10;&#10;Description automatically generated">
-            <a:extLst>
-              <a:ext uri="{FF2B5EF4-FFF2-40B4-BE49-F238E27FC236}">
-                <a16:creationId xmlns:a16="http://schemas.microsoft.com/office/drawing/2014/main" id="{C04133BD-C7DA-4A5B-86FC-4CD20E82A00C}"/>
+          <p:cNvPr id="7" name="Graphic 6" descr="Cloud">
+            <a:extLst>
+              <a:ext uri="{FF2B5EF4-FFF2-40B4-BE49-F238E27FC236}">
+                <a16:creationId xmlns:a16="http://schemas.microsoft.com/office/drawing/2014/main" id="{3A87124C-1FD9-4AE0-A262-F1564B6C0154}"/>
               </a:ext>
             </a:extLst>
           </p:cNvPr>
@@ -5369,44 +6592,8 @@
               <a:ext uri="{28A0092B-C50C-407E-A947-70E740481C1C}">
                 <a14:useLocalDpi xmlns:a14="http://schemas.microsoft.com/office/drawing/2010/main" val="0"/>
               </a:ext>
-            </a:extLst>
-          </a:blip>
-          <a:stretch>
-            <a:fillRect/>
-          </a:stretch>
-        </p:blipFill>
-        <p:spPr>
-          <a:xfrm>
-            <a:off x="867820" y="2324796"/>
-            <a:ext cx="1189579" cy="2691972"/>
-          </a:xfrm>
-          <a:prstGeom prst="rect">
-            <a:avLst/>
-          </a:prstGeom>
-        </p:spPr>
-      </p:pic>
-      <p:pic>
-        <p:nvPicPr>
-          <p:cNvPr id="7" name="Graphic 6" descr="Cloud">
-            <a:extLst>
-              <a:ext uri="{FF2B5EF4-FFF2-40B4-BE49-F238E27FC236}">
-                <a16:creationId xmlns:a16="http://schemas.microsoft.com/office/drawing/2014/main" id="{3A87124C-1FD9-4AE0-A262-F1564B6C0154}"/>
-              </a:ext>
-            </a:extLst>
-          </p:cNvPr>
-          <p:cNvPicPr>
-            <a:picLocks noChangeAspect="1"/>
-          </p:cNvPicPr>
-          <p:nvPr/>
-        </p:nvPicPr>
-        <p:blipFill>
-          <a:blip r:embed="rId3">
-            <a:extLst>
-              <a:ext uri="{28A0092B-C50C-407E-A947-70E740481C1C}">
-                <a14:useLocalDpi xmlns:a14="http://schemas.microsoft.com/office/drawing/2010/main" val="0"/>
-              </a:ext>
               <a:ext uri="{96DAC541-7B7A-43D3-8B79-37D633B846F1}">
-                <asvg:svgBlip xmlns:asvg="http://schemas.microsoft.com/office/drawing/2016/SVG/main" r:embed="rId4"/>
+                <asvg:svgBlip xmlns:asvg="http://schemas.microsoft.com/office/drawing/2016/SVG/main" r:embed="rId3"/>
               </a:ext>
             </a:extLst>
           </a:blip>
@@ -5515,13 +6702,13 @@
             <p:nvPr/>
           </p:nvPicPr>
           <p:blipFill>
-            <a:blip r:embed="rId5">
+            <a:blip r:embed="rId4">
               <a:extLst>
                 <a:ext uri="{28A0092B-C50C-407E-A947-70E740481C1C}">
                   <a14:useLocalDpi xmlns:a14="http://schemas.microsoft.com/office/drawing/2010/main" val="0"/>
                 </a:ext>
                 <a:ext uri="{96DAC541-7B7A-43D3-8B79-37D633B846F1}">
-                  <asvg:svgBlip xmlns:asvg="http://schemas.microsoft.com/office/drawing/2016/SVG/main" r:embed="rId6"/>
+                  <asvg:svgBlip xmlns:asvg="http://schemas.microsoft.com/office/drawing/2016/SVG/main" r:embed="rId5"/>
                 </a:ext>
               </a:extLst>
             </a:blip>
@@ -5554,13 +6741,13 @@
             <p:nvPr/>
           </p:nvPicPr>
           <p:blipFill>
-            <a:blip r:embed="rId7">
+            <a:blip r:embed="rId6">
               <a:extLst>
                 <a:ext uri="{28A0092B-C50C-407E-A947-70E740481C1C}">
                   <a14:useLocalDpi xmlns:a14="http://schemas.microsoft.com/office/drawing/2010/main" val="0"/>
                 </a:ext>
                 <a:ext uri="{96DAC541-7B7A-43D3-8B79-37D633B846F1}">
-                  <asvg:svgBlip xmlns:asvg="http://schemas.microsoft.com/office/drawing/2016/SVG/main" r:embed="rId8"/>
+                  <asvg:svgBlip xmlns:asvg="http://schemas.microsoft.com/office/drawing/2016/SVG/main" r:embed="rId7"/>
                 </a:ext>
               </a:extLst>
             </a:blip>
@@ -5593,13 +6780,13 @@
             <p:nvPr/>
           </p:nvPicPr>
           <p:blipFill>
-            <a:blip r:embed="rId9">
+            <a:blip r:embed="rId8">
               <a:extLst>
                 <a:ext uri="{28A0092B-C50C-407E-A947-70E740481C1C}">
                   <a14:useLocalDpi xmlns:a14="http://schemas.microsoft.com/office/drawing/2010/main" val="0"/>
                 </a:ext>
                 <a:ext uri="{96DAC541-7B7A-43D3-8B79-37D633B846F1}">
-                  <asvg:svgBlip xmlns:asvg="http://schemas.microsoft.com/office/drawing/2016/SVG/main" r:embed="rId10"/>
+                  <asvg:svgBlip xmlns:asvg="http://schemas.microsoft.com/office/drawing/2016/SVG/main" r:embed="rId9"/>
                 </a:ext>
               </a:extLst>
             </a:blip>
@@ -5662,7 +6849,7 @@
             <a:pPr algn="ctr"/>
             <a:r>
               <a:rPr lang="en-US" sz="2400" b="1" dirty="0"/>
-              <a:t>Argon</a:t>
+              <a:t>Photon</a:t>
             </a:r>
           </a:p>
         </p:txBody>
@@ -5790,7 +6977,9 @@
           </a:prstGeom>
           <a:ln w="57150">
             <a:solidFill>
-              <a:srgbClr val="7030A0"/>
+              <a:schemeClr val="bg1">
+                <a:lumMod val="85000"/>
+              </a:schemeClr>
             </a:solidFill>
             <a:tailEnd type="triangle" w="lg" len="med"/>
           </a:ln>
@@ -5810,11 +6999,22 @@
           </a:fontRef>
         </p:style>
         <p:txBody>
-          <a:bodyPr rtlCol="0" anchor="ctr"/>
+          <a:bodyPr rot="0" spcFirstLastPara="0" vertOverflow="overflow" horzOverflow="overflow" vert="horz" wrap="square" lIns="91440" tIns="45720" rIns="91440" bIns="45720" numCol="1" spcCol="0" rtlCol="0" fromWordArt="0" anchor="ctr" anchorCtr="0" forceAA="0" compatLnSpc="1">
+            <a:prstTxWarp prst="textNoShape">
+              <a:avLst/>
+            </a:prstTxWarp>
+            <a:noAutofit/>
+          </a:bodyPr>
           <a:lstStyle/>
           <a:p>
             <a:pPr algn="ctr"/>
-            <a:endParaRPr lang="en-US"/>
+            <a:endParaRPr lang="en-US">
+              <a:solidFill>
+                <a:schemeClr val="bg2">
+                  <a:lumMod val="75000"/>
+                </a:schemeClr>
+              </a:solidFill>
+            </a:endParaRPr>
           </a:p>
         </p:txBody>
       </p:sp>
@@ -5848,24 +7048,274 @@
           <a:p>
             <a:pPr algn="ctr"/>
             <a:r>
+              <a:rPr lang="en-US" b="1" dirty="0">
+                <a:solidFill>
+                  <a:schemeClr val="bg1">
+                    <a:lumMod val="85000"/>
+                  </a:schemeClr>
+                </a:solidFill>
+              </a:rPr>
+              <a:t>Send request via </a:t>
+            </a:r>
+            <a:r>
+              <a:rPr lang="en-US" b="1" dirty="0" err="1">
+                <a:solidFill>
+                  <a:schemeClr val="bg1">
+                    <a:lumMod val="85000"/>
+                  </a:schemeClr>
+                </a:solidFill>
+              </a:rPr>
+              <a:t>Particle.publish</a:t>
+            </a:r>
+            <a:r>
+              <a:rPr lang="en-US" b="1" dirty="0">
+                <a:solidFill>
+                  <a:schemeClr val="bg1">
+                    <a:lumMod val="85000"/>
+                  </a:schemeClr>
+                </a:solidFill>
+              </a:rPr>
+              <a:t>() to webhook</a:t>
+            </a:r>
+          </a:p>
+        </p:txBody>
+      </p:sp>
+      <p:sp>
+        <p:nvSpPr>
+          <p:cNvPr id="20" name="TextBox 19">
+            <a:extLst>
+              <a:ext uri="{FF2B5EF4-FFF2-40B4-BE49-F238E27FC236}">
+                <a16:creationId xmlns:a16="http://schemas.microsoft.com/office/drawing/2014/main" id="{181926D2-6827-4E7F-87F9-59F421A23196}"/>
+              </a:ext>
+            </a:extLst>
+          </p:cNvPr>
+          <p:cNvSpPr txBox="1"/>
+          <p:nvPr/>
+        </p:nvSpPr>
+        <p:spPr>
+          <a:xfrm>
+            <a:off x="7761587" y="520694"/>
+            <a:ext cx="2261373" cy="923330"/>
+          </a:xfrm>
+          <a:prstGeom prst="rect">
+            <a:avLst/>
+          </a:prstGeom>
+          <a:noFill/>
+        </p:spPr>
+        <p:txBody>
+          <a:bodyPr wrap="square" rtlCol="0">
+            <a:spAutoFit/>
+          </a:bodyPr>
+          <a:lstStyle/>
+          <a:p>
+            <a:pPr algn="ctr"/>
+            <a:r>
+              <a:rPr lang="en-US" b="1" dirty="0">
+                <a:solidFill>
+                  <a:schemeClr val="bg1">
+                    <a:lumMod val="85000"/>
+                  </a:schemeClr>
+                </a:solidFill>
+              </a:rPr>
+              <a:t>Particle webhook connects to API endpoint</a:t>
+            </a:r>
+          </a:p>
+        </p:txBody>
+      </p:sp>
+      <p:sp>
+        <p:nvSpPr>
+          <p:cNvPr id="22" name="Arc 21">
+            <a:extLst>
+              <a:ext uri="{FF2B5EF4-FFF2-40B4-BE49-F238E27FC236}">
+                <a16:creationId xmlns:a16="http://schemas.microsoft.com/office/drawing/2014/main" id="{53158D47-55D2-4762-A3BA-61D655491B12}"/>
+              </a:ext>
+            </a:extLst>
+          </p:cNvPr>
+          <p:cNvSpPr/>
+          <p:nvPr/>
+        </p:nvSpPr>
+        <p:spPr>
+          <a:xfrm>
+            <a:off x="4751981" y="1277055"/>
+            <a:ext cx="4595119" cy="1646003"/>
+          </a:xfrm>
+          <a:prstGeom prst="arc">
+            <a:avLst>
+              <a:gd name="adj1" fmla="val 15081720"/>
+              <a:gd name="adj2" fmla="val 21236164"/>
+            </a:avLst>
+          </a:prstGeom>
+          <a:ln w="57150">
+            <a:solidFill>
+              <a:schemeClr val="bg1">
+                <a:lumMod val="85000"/>
+              </a:schemeClr>
+            </a:solidFill>
+            <a:tailEnd type="triangle" w="lg" len="med"/>
+          </a:ln>
+        </p:spPr>
+        <p:style>
+          <a:lnRef idx="1">
+            <a:schemeClr val="accent1"/>
+          </a:lnRef>
+          <a:fillRef idx="0">
+            <a:schemeClr val="accent1"/>
+          </a:fillRef>
+          <a:effectRef idx="0">
+            <a:schemeClr val="accent1"/>
+          </a:effectRef>
+          <a:fontRef idx="minor">
+            <a:schemeClr val="tx1"/>
+          </a:fontRef>
+        </p:style>
+        <p:txBody>
+          <a:bodyPr rot="0" spcFirstLastPara="0" vertOverflow="overflow" horzOverflow="overflow" vert="horz" wrap="square" lIns="91440" tIns="45720" rIns="91440" bIns="45720" numCol="1" spcCol="0" rtlCol="0" fromWordArt="0" anchor="ctr" anchorCtr="0" forceAA="0" compatLnSpc="1">
+            <a:prstTxWarp prst="textNoShape">
+              <a:avLst/>
+            </a:prstTxWarp>
+            <a:noAutofit/>
+          </a:bodyPr>
+          <a:lstStyle/>
+          <a:p>
+            <a:pPr algn="ctr"/>
+            <a:endParaRPr lang="en-US">
+              <a:solidFill>
+                <a:schemeClr val="bg2">
+                  <a:lumMod val="75000"/>
+                </a:schemeClr>
+              </a:solidFill>
+            </a:endParaRPr>
+          </a:p>
+        </p:txBody>
+      </p:sp>
+      <p:sp>
+        <p:nvSpPr>
+          <p:cNvPr id="24" name="Arc 23">
+            <a:extLst>
+              <a:ext uri="{FF2B5EF4-FFF2-40B4-BE49-F238E27FC236}">
+                <a16:creationId xmlns:a16="http://schemas.microsoft.com/office/drawing/2014/main" id="{B94720B2-15C5-4040-BBAB-CEF7AF33872D}"/>
+              </a:ext>
+            </a:extLst>
+          </p:cNvPr>
+          <p:cNvSpPr/>
+          <p:nvPr/>
+        </p:nvSpPr>
+        <p:spPr>
+          <a:xfrm>
+            <a:off x="6055847" y="1037667"/>
+            <a:ext cx="4595119" cy="1646003"/>
+          </a:xfrm>
+          <a:prstGeom prst="arc">
+            <a:avLst>
+              <a:gd name="adj1" fmla="val 4386021"/>
+              <a:gd name="adj2" fmla="val 10484368"/>
+            </a:avLst>
+          </a:prstGeom>
+          <a:ln w="57150">
+            <a:solidFill>
+              <a:srgbClr val="FF0000"/>
+            </a:solidFill>
+            <a:tailEnd type="triangle" w="lg" len="med"/>
+          </a:ln>
+        </p:spPr>
+        <p:style>
+          <a:lnRef idx="1">
+            <a:schemeClr val="accent1"/>
+          </a:lnRef>
+          <a:fillRef idx="0">
+            <a:schemeClr val="accent1"/>
+          </a:fillRef>
+          <a:effectRef idx="0">
+            <a:schemeClr val="accent1"/>
+          </a:effectRef>
+          <a:fontRef idx="minor">
+            <a:schemeClr val="tx1"/>
+          </a:fontRef>
+        </p:style>
+        <p:txBody>
+          <a:bodyPr rtlCol="0" anchor="ctr"/>
+          <a:lstStyle/>
+          <a:p>
+            <a:pPr algn="ctr"/>
+            <a:endParaRPr lang="en-US"/>
+          </a:p>
+        </p:txBody>
+      </p:sp>
+      <p:sp>
+        <p:nvSpPr>
+          <p:cNvPr id="26" name="TextBox 25">
+            <a:extLst>
+              <a:ext uri="{FF2B5EF4-FFF2-40B4-BE49-F238E27FC236}">
+                <a16:creationId xmlns:a16="http://schemas.microsoft.com/office/drawing/2014/main" id="{C616FBDC-574E-4D29-B3F3-541CF31BB759}"/>
+              </a:ext>
+            </a:extLst>
+          </p:cNvPr>
+          <p:cNvSpPr txBox="1"/>
+          <p:nvPr/>
+        </p:nvSpPr>
+        <p:spPr>
+          <a:xfrm>
+            <a:off x="6132035" y="2863548"/>
+            <a:ext cx="2261373" cy="923330"/>
+          </a:xfrm>
+          <a:prstGeom prst="rect">
+            <a:avLst/>
+          </a:prstGeom>
+          <a:noFill/>
+        </p:spPr>
+        <p:txBody>
+          <a:bodyPr wrap="square" rtlCol="0">
+            <a:spAutoFit/>
+          </a:bodyPr>
+          <a:lstStyle/>
+          <a:p>
+            <a:pPr algn="ctr"/>
+            <a:r>
               <a:rPr lang="en-US" b="1" dirty="0"/>
-              <a:t>Send request via </a:t>
-            </a:r>
-            <a:r>
-              <a:rPr lang="en-US" b="1" dirty="0" err="1"/>
-              <a:t>Particle.publish</a:t>
-            </a:r>
-            <a:r>
-              <a:rPr lang="en-US" b="1" dirty="0"/>
-              <a:t>() to webhook</a:t>
-            </a:r>
-          </a:p>
-        </p:txBody>
-      </p:sp>
+              <a:t>API responds with request JSON-formatted data</a:t>
+            </a:r>
+          </a:p>
+        </p:txBody>
+      </p:sp>
+      <p:pic>
+        <p:nvPicPr>
+          <p:cNvPr id="2" name="Picture 1">
+            <a:extLst>
+              <a:ext uri="{FF2B5EF4-FFF2-40B4-BE49-F238E27FC236}">
+                <a16:creationId xmlns:a16="http://schemas.microsoft.com/office/drawing/2014/main" id="{AC8CF8F1-A8FA-07D6-36B9-4FD5FB883831}"/>
+              </a:ext>
+            </a:extLst>
+          </p:cNvPr>
+          <p:cNvPicPr>
+            <a:picLocks noChangeAspect="1"/>
+          </p:cNvPicPr>
+          <p:nvPr/>
+        </p:nvPicPr>
+        <p:blipFill>
+          <a:blip r:embed="rId10">
+            <a:extLst>
+              <a:ext uri="{28A0092B-C50C-407E-A947-70E740481C1C}">
+                <a14:useLocalDpi xmlns:a14="http://schemas.microsoft.com/office/drawing/2010/main" val="0"/>
+              </a:ext>
+            </a:extLst>
+          </a:blip>
+          <a:srcRect/>
+          <a:stretch/>
+        </p:blipFill>
+        <p:spPr>
+          <a:xfrm>
+            <a:off x="867820" y="2333051"/>
+            <a:ext cx="1189579" cy="2675462"/>
+          </a:xfrm>
+          <a:prstGeom prst="rect">
+            <a:avLst/>
+          </a:prstGeom>
+        </p:spPr>
+      </p:pic>
     </p:spTree>
     <p:extLst>
       <p:ext uri="{BB962C8B-B14F-4D97-AF65-F5344CB8AC3E}">
-        <p14:creationId xmlns:p14="http://schemas.microsoft.com/office/powerpoint/2010/main" val="4194219760"/>
+        <p14:creationId xmlns:p14="http://schemas.microsoft.com/office/powerpoint/2010/main" val="3893865506"/>
       </p:ext>
     </p:extLst>
   </p:cSld>
@@ -5875,7 +7325,7 @@
 </p:sld>
 </file>
 
-<file path=ppt/slides/slide3.xml><?xml version="1.0" encoding="utf-8"?>
+<file path=ppt/slides/slide5.xml><?xml version="1.0" encoding="utf-8"?>
 <p:sld xmlns:a="http://schemas.openxmlformats.org/drawingml/2006/main" xmlns:r="http://schemas.openxmlformats.org/officeDocument/2006/relationships" xmlns:p="http://schemas.openxmlformats.org/presentationml/2006/main">
   <p:cSld>
     <p:spTree>
@@ -5894,10 +7344,10 @@
       </p:grpSpPr>
       <p:pic>
         <p:nvPicPr>
-          <p:cNvPr id="5" name="Picture 4" descr="Qr code&#10;&#10;Description automatically generated">
-            <a:extLst>
-              <a:ext uri="{FF2B5EF4-FFF2-40B4-BE49-F238E27FC236}">
-                <a16:creationId xmlns:a16="http://schemas.microsoft.com/office/drawing/2014/main" id="{C04133BD-C7DA-4A5B-86FC-4CD20E82A00C}"/>
+          <p:cNvPr id="7" name="Graphic 6" descr="Cloud">
+            <a:extLst>
+              <a:ext uri="{FF2B5EF4-FFF2-40B4-BE49-F238E27FC236}">
+                <a16:creationId xmlns:a16="http://schemas.microsoft.com/office/drawing/2014/main" id="{3A87124C-1FD9-4AE0-A262-F1564B6C0154}"/>
               </a:ext>
             </a:extLst>
           </p:cNvPr>
@@ -5912,44 +7362,8 @@
               <a:ext uri="{28A0092B-C50C-407E-A947-70E740481C1C}">
                 <a14:useLocalDpi xmlns:a14="http://schemas.microsoft.com/office/drawing/2010/main" val="0"/>
               </a:ext>
-            </a:extLst>
-          </a:blip>
-          <a:stretch>
-            <a:fillRect/>
-          </a:stretch>
-        </p:blipFill>
-        <p:spPr>
-          <a:xfrm>
-            <a:off x="867820" y="2324796"/>
-            <a:ext cx="1189579" cy="2691972"/>
-          </a:xfrm>
-          <a:prstGeom prst="rect">
-            <a:avLst/>
-          </a:prstGeom>
-        </p:spPr>
-      </p:pic>
-      <p:pic>
-        <p:nvPicPr>
-          <p:cNvPr id="7" name="Graphic 6" descr="Cloud">
-            <a:extLst>
-              <a:ext uri="{FF2B5EF4-FFF2-40B4-BE49-F238E27FC236}">
-                <a16:creationId xmlns:a16="http://schemas.microsoft.com/office/drawing/2014/main" id="{3A87124C-1FD9-4AE0-A262-F1564B6C0154}"/>
-              </a:ext>
-            </a:extLst>
-          </p:cNvPr>
-          <p:cNvPicPr>
-            <a:picLocks noChangeAspect="1"/>
-          </p:cNvPicPr>
-          <p:nvPr/>
-        </p:nvPicPr>
-        <p:blipFill>
-          <a:blip r:embed="rId3">
-            <a:extLst>
-              <a:ext uri="{28A0092B-C50C-407E-A947-70E740481C1C}">
-                <a14:useLocalDpi xmlns:a14="http://schemas.microsoft.com/office/drawing/2010/main" val="0"/>
-              </a:ext>
               <a:ext uri="{96DAC541-7B7A-43D3-8B79-37D633B846F1}">
-                <asvg:svgBlip xmlns:asvg="http://schemas.microsoft.com/office/drawing/2016/SVG/main" r:embed="rId4"/>
+                <asvg:svgBlip xmlns:asvg="http://schemas.microsoft.com/office/drawing/2016/SVG/main" r:embed="rId3"/>
               </a:ext>
             </a:extLst>
           </a:blip>
@@ -6058,13 +7472,13 @@
             <p:nvPr/>
           </p:nvPicPr>
           <p:blipFill>
-            <a:blip r:embed="rId5">
+            <a:blip r:embed="rId4">
               <a:extLst>
                 <a:ext uri="{28A0092B-C50C-407E-A947-70E740481C1C}">
                   <a14:useLocalDpi xmlns:a14="http://schemas.microsoft.com/office/drawing/2010/main" val="0"/>
                 </a:ext>
                 <a:ext uri="{96DAC541-7B7A-43D3-8B79-37D633B846F1}">
-                  <asvg:svgBlip xmlns:asvg="http://schemas.microsoft.com/office/drawing/2016/SVG/main" r:embed="rId6"/>
+                  <asvg:svgBlip xmlns:asvg="http://schemas.microsoft.com/office/drawing/2016/SVG/main" r:embed="rId5"/>
                 </a:ext>
               </a:extLst>
             </a:blip>
@@ -6097,13 +7511,13 @@
             <p:nvPr/>
           </p:nvPicPr>
           <p:blipFill>
-            <a:blip r:embed="rId7">
+            <a:blip r:embed="rId6">
               <a:extLst>
                 <a:ext uri="{28A0092B-C50C-407E-A947-70E740481C1C}">
                   <a14:useLocalDpi xmlns:a14="http://schemas.microsoft.com/office/drawing/2010/main" val="0"/>
                 </a:ext>
                 <a:ext uri="{96DAC541-7B7A-43D3-8B79-37D633B846F1}">
-                  <asvg:svgBlip xmlns:asvg="http://schemas.microsoft.com/office/drawing/2016/SVG/main" r:embed="rId8"/>
+                  <asvg:svgBlip xmlns:asvg="http://schemas.microsoft.com/office/drawing/2016/SVG/main" r:embed="rId7"/>
                 </a:ext>
               </a:extLst>
             </a:blip>
@@ -6136,13 +7550,13 @@
             <p:nvPr/>
           </p:nvPicPr>
           <p:blipFill>
-            <a:blip r:embed="rId9">
+            <a:blip r:embed="rId8">
               <a:extLst>
                 <a:ext uri="{28A0092B-C50C-407E-A947-70E740481C1C}">
                   <a14:useLocalDpi xmlns:a14="http://schemas.microsoft.com/office/drawing/2010/main" val="0"/>
                 </a:ext>
                 <a:ext uri="{96DAC541-7B7A-43D3-8B79-37D633B846F1}">
-                  <asvg:svgBlip xmlns:asvg="http://schemas.microsoft.com/office/drawing/2016/SVG/main" r:embed="rId10"/>
+                  <asvg:svgBlip xmlns:asvg="http://schemas.microsoft.com/office/drawing/2016/SVG/main" r:embed="rId9"/>
                 </a:ext>
               </a:extLst>
             </a:blip>
@@ -6205,1441 +7619,7 @@
             <a:pPr algn="ctr"/>
             <a:r>
               <a:rPr lang="en-US" sz="2400" b="1" dirty="0"/>
-              <a:t>Argon</a:t>
-            </a:r>
-          </a:p>
-        </p:txBody>
-      </p:sp>
-      <p:sp>
-        <p:nvSpPr>
-          <p:cNvPr id="17" name="TextBox 16">
-            <a:extLst>
-              <a:ext uri="{FF2B5EF4-FFF2-40B4-BE49-F238E27FC236}">
-                <a16:creationId xmlns:a16="http://schemas.microsoft.com/office/drawing/2014/main" id="{C3CD7E23-4859-4854-85A9-32CCFD2CBFB4}"/>
-              </a:ext>
-            </a:extLst>
-          </p:cNvPr>
-          <p:cNvSpPr txBox="1"/>
-          <p:nvPr/>
-        </p:nvSpPr>
-        <p:spPr>
-          <a:xfrm>
-            <a:off x="4489117" y="5690975"/>
-            <a:ext cx="2252770" cy="461665"/>
-          </a:xfrm>
-          <a:prstGeom prst="rect">
-            <a:avLst/>
-          </a:prstGeom>
-        </p:spPr>
-        <p:style>
-          <a:lnRef idx="2">
-            <a:schemeClr val="dk1"/>
-          </a:lnRef>
-          <a:fillRef idx="1">
-            <a:schemeClr val="lt1"/>
-          </a:fillRef>
-          <a:effectRef idx="0">
-            <a:schemeClr val="dk1"/>
-          </a:effectRef>
-          <a:fontRef idx="minor">
-            <a:schemeClr val="dk1"/>
-          </a:fontRef>
-        </p:style>
-        <p:txBody>
-          <a:bodyPr wrap="square" rtlCol="0">
-            <a:spAutoFit/>
-          </a:bodyPr>
-          <a:lstStyle/>
-          <a:p>
-            <a:pPr algn="ctr"/>
-            <a:r>
-              <a:rPr lang="en-US" sz="2400" b="1" dirty="0"/>
-              <a:t>Particle Cloud</a:t>
-            </a:r>
-          </a:p>
-        </p:txBody>
-      </p:sp>
-      <p:sp>
-        <p:nvSpPr>
-          <p:cNvPr id="18" name="TextBox 17">
-            <a:extLst>
-              <a:ext uri="{FF2B5EF4-FFF2-40B4-BE49-F238E27FC236}">
-                <a16:creationId xmlns:a16="http://schemas.microsoft.com/office/drawing/2014/main" id="{78DF10E0-2FF4-4ACD-B086-F78C18167F2A}"/>
-              </a:ext>
-            </a:extLst>
-          </p:cNvPr>
-          <p:cNvSpPr txBox="1"/>
-          <p:nvPr/>
-        </p:nvSpPr>
-        <p:spPr>
-          <a:xfrm>
-            <a:off x="9142085" y="5690975"/>
-            <a:ext cx="2252770" cy="461665"/>
-          </a:xfrm>
-          <a:prstGeom prst="rect">
-            <a:avLst/>
-          </a:prstGeom>
-        </p:spPr>
-        <p:style>
-          <a:lnRef idx="2">
-            <a:schemeClr val="dk1"/>
-          </a:lnRef>
-          <a:fillRef idx="1">
-            <a:schemeClr val="lt1"/>
-          </a:fillRef>
-          <a:effectRef idx="0">
-            <a:schemeClr val="dk1"/>
-          </a:effectRef>
-          <a:fontRef idx="minor">
-            <a:schemeClr val="dk1"/>
-          </a:fontRef>
-        </p:style>
-        <p:txBody>
-          <a:bodyPr wrap="square" rtlCol="0">
-            <a:spAutoFit/>
-          </a:bodyPr>
-          <a:lstStyle/>
-          <a:p>
-            <a:pPr algn="ctr"/>
-            <a:r>
-              <a:rPr lang="en-US" sz="2400" b="1" dirty="0"/>
-              <a:t>Weather API</a:t>
-            </a:r>
-          </a:p>
-        </p:txBody>
-      </p:sp>
-      <p:sp>
-        <p:nvSpPr>
-          <p:cNvPr id="4" name="Arc 3">
-            <a:extLst>
-              <a:ext uri="{FF2B5EF4-FFF2-40B4-BE49-F238E27FC236}">
-                <a16:creationId xmlns:a16="http://schemas.microsoft.com/office/drawing/2014/main" id="{BD1EE0FC-033B-42EB-BD4E-A75E1076F0C6}"/>
-              </a:ext>
-            </a:extLst>
-          </p:cNvPr>
-          <p:cNvSpPr/>
-          <p:nvPr/>
-        </p:nvSpPr>
-        <p:spPr>
-          <a:xfrm>
-            <a:off x="1602481" y="1277055"/>
-            <a:ext cx="4595119" cy="1646003"/>
-          </a:xfrm>
-          <a:prstGeom prst="arc">
-            <a:avLst>
-              <a:gd name="adj1" fmla="val 11292682"/>
-              <a:gd name="adj2" fmla="val 16981830"/>
-            </a:avLst>
-          </a:prstGeom>
-          <a:ln w="57150">
-            <a:solidFill>
-              <a:schemeClr val="bg1">
-                <a:lumMod val="85000"/>
-              </a:schemeClr>
-            </a:solidFill>
-            <a:tailEnd type="triangle" w="lg" len="med"/>
-          </a:ln>
-        </p:spPr>
-        <p:style>
-          <a:lnRef idx="1">
-            <a:schemeClr val="accent1"/>
-          </a:lnRef>
-          <a:fillRef idx="0">
-            <a:schemeClr val="accent1"/>
-          </a:fillRef>
-          <a:effectRef idx="0">
-            <a:schemeClr val="accent1"/>
-          </a:effectRef>
-          <a:fontRef idx="minor">
-            <a:schemeClr val="tx1"/>
-          </a:fontRef>
-        </p:style>
-        <p:txBody>
-          <a:bodyPr rtlCol="0" anchor="ctr"/>
-          <a:lstStyle/>
-          <a:p>
-            <a:pPr algn="ctr"/>
-            <a:endParaRPr lang="en-US">
-              <a:solidFill>
-                <a:schemeClr val="bg2">
-                  <a:lumMod val="75000"/>
-                </a:schemeClr>
-              </a:solidFill>
-            </a:endParaRPr>
-          </a:p>
-        </p:txBody>
-      </p:sp>
-      <p:sp>
-        <p:nvSpPr>
-          <p:cNvPr id="19" name="TextBox 18">
-            <a:extLst>
-              <a:ext uri="{FF2B5EF4-FFF2-40B4-BE49-F238E27FC236}">
-                <a16:creationId xmlns:a16="http://schemas.microsoft.com/office/drawing/2014/main" id="{2D4149D2-611E-4090-B69A-E92276D44F48}"/>
-              </a:ext>
-            </a:extLst>
-          </p:cNvPr>
-          <p:cNvSpPr txBox="1"/>
-          <p:nvPr/>
-        </p:nvSpPr>
-        <p:spPr>
-          <a:xfrm>
-            <a:off x="1872254" y="243695"/>
-            <a:ext cx="2027786" cy="923330"/>
-          </a:xfrm>
-          <a:prstGeom prst="rect">
-            <a:avLst/>
-          </a:prstGeom>
-          <a:noFill/>
-          <a:ln>
-            <a:solidFill>
-              <a:schemeClr val="bg1"/>
-            </a:solidFill>
-          </a:ln>
-        </p:spPr>
-        <p:txBody>
-          <a:bodyPr wrap="square" rtlCol="0">
-            <a:spAutoFit/>
-          </a:bodyPr>
-          <a:lstStyle/>
-          <a:p>
-            <a:pPr algn="ctr"/>
-            <a:r>
-              <a:rPr lang="en-US" b="1" dirty="0">
-                <a:solidFill>
-                  <a:schemeClr val="bg1">
-                    <a:lumMod val="85000"/>
-                  </a:schemeClr>
-                </a:solidFill>
-              </a:rPr>
-              <a:t>Send request via </a:t>
-            </a:r>
-            <a:r>
-              <a:rPr lang="en-US" b="1" dirty="0" err="1">
-                <a:solidFill>
-                  <a:schemeClr val="bg1">
-                    <a:lumMod val="85000"/>
-                  </a:schemeClr>
-                </a:solidFill>
-              </a:rPr>
-              <a:t>Particle.publish</a:t>
-            </a:r>
-            <a:r>
-              <a:rPr lang="en-US" b="1" dirty="0">
-                <a:solidFill>
-                  <a:schemeClr val="bg1">
-                    <a:lumMod val="85000"/>
-                  </a:schemeClr>
-                </a:solidFill>
-              </a:rPr>
-              <a:t>() to webhook</a:t>
-            </a:r>
-          </a:p>
-        </p:txBody>
-      </p:sp>
-      <p:sp>
-        <p:nvSpPr>
-          <p:cNvPr id="20" name="TextBox 19">
-            <a:extLst>
-              <a:ext uri="{FF2B5EF4-FFF2-40B4-BE49-F238E27FC236}">
-                <a16:creationId xmlns:a16="http://schemas.microsoft.com/office/drawing/2014/main" id="{181926D2-6827-4E7F-87F9-59F421A23196}"/>
-              </a:ext>
-            </a:extLst>
-          </p:cNvPr>
-          <p:cNvSpPr txBox="1"/>
-          <p:nvPr/>
-        </p:nvSpPr>
-        <p:spPr>
-          <a:xfrm>
-            <a:off x="7761587" y="520694"/>
-            <a:ext cx="2261373" cy="923330"/>
-          </a:xfrm>
-          <a:prstGeom prst="rect">
-            <a:avLst/>
-          </a:prstGeom>
-          <a:noFill/>
-        </p:spPr>
-        <p:txBody>
-          <a:bodyPr wrap="square" rtlCol="0">
-            <a:spAutoFit/>
-          </a:bodyPr>
-          <a:lstStyle/>
-          <a:p>
-            <a:pPr algn="ctr"/>
-            <a:r>
-              <a:rPr lang="en-US" b="1" dirty="0"/>
-              <a:t>Particle webhook connects to API endpoint</a:t>
-            </a:r>
-          </a:p>
-        </p:txBody>
-      </p:sp>
-      <p:sp>
-        <p:nvSpPr>
-          <p:cNvPr id="22" name="Arc 21">
-            <a:extLst>
-              <a:ext uri="{FF2B5EF4-FFF2-40B4-BE49-F238E27FC236}">
-                <a16:creationId xmlns:a16="http://schemas.microsoft.com/office/drawing/2014/main" id="{53158D47-55D2-4762-A3BA-61D655491B12}"/>
-              </a:ext>
-            </a:extLst>
-          </p:cNvPr>
-          <p:cNvSpPr/>
-          <p:nvPr/>
-        </p:nvSpPr>
-        <p:spPr>
-          <a:xfrm>
-            <a:off x="4751981" y="1277055"/>
-            <a:ext cx="4595119" cy="1646003"/>
-          </a:xfrm>
-          <a:prstGeom prst="arc">
-            <a:avLst>
-              <a:gd name="adj1" fmla="val 15081720"/>
-              <a:gd name="adj2" fmla="val 21236164"/>
-            </a:avLst>
-          </a:prstGeom>
-          <a:ln w="57150">
-            <a:solidFill>
-              <a:srgbClr val="7030A0"/>
-            </a:solidFill>
-            <a:tailEnd type="triangle" w="lg" len="med"/>
-          </a:ln>
-        </p:spPr>
-        <p:style>
-          <a:lnRef idx="1">
-            <a:schemeClr val="accent1"/>
-          </a:lnRef>
-          <a:fillRef idx="0">
-            <a:schemeClr val="accent1"/>
-          </a:fillRef>
-          <a:effectRef idx="0">
-            <a:schemeClr val="accent1"/>
-          </a:effectRef>
-          <a:fontRef idx="minor">
-            <a:schemeClr val="tx1"/>
-          </a:fontRef>
-        </p:style>
-        <p:txBody>
-          <a:bodyPr rtlCol="0" anchor="ctr"/>
-          <a:lstStyle/>
-          <a:p>
-            <a:pPr algn="ctr"/>
-            <a:endParaRPr lang="en-US"/>
-          </a:p>
-        </p:txBody>
-      </p:sp>
-    </p:spTree>
-    <p:extLst>
-      <p:ext uri="{BB962C8B-B14F-4D97-AF65-F5344CB8AC3E}">
-        <p14:creationId xmlns:p14="http://schemas.microsoft.com/office/powerpoint/2010/main" val="1947142998"/>
-      </p:ext>
-    </p:extLst>
-  </p:cSld>
-  <p:clrMapOvr>
-    <a:masterClrMapping/>
-  </p:clrMapOvr>
-</p:sld>
-</file>
-
-<file path=ppt/slides/slide4.xml><?xml version="1.0" encoding="utf-8"?>
-<p:sld xmlns:a="http://schemas.openxmlformats.org/drawingml/2006/main" xmlns:r="http://schemas.openxmlformats.org/officeDocument/2006/relationships" xmlns:p="http://schemas.openxmlformats.org/presentationml/2006/main">
-  <p:cSld>
-    <p:spTree>
-      <p:nvGrpSpPr>
-        <p:cNvPr id="1" name=""/>
-        <p:cNvGrpSpPr/>
-        <p:nvPr/>
-      </p:nvGrpSpPr>
-      <p:grpSpPr>
-        <a:xfrm>
-          <a:off x="0" y="0"/>
-          <a:ext cx="0" cy="0"/>
-          <a:chOff x="0" y="0"/>
-          <a:chExt cx="0" cy="0"/>
-        </a:xfrm>
-      </p:grpSpPr>
-      <p:pic>
-        <p:nvPicPr>
-          <p:cNvPr id="5" name="Picture 4" descr="Qr code&#10;&#10;Description automatically generated">
-            <a:extLst>
-              <a:ext uri="{FF2B5EF4-FFF2-40B4-BE49-F238E27FC236}">
-                <a16:creationId xmlns:a16="http://schemas.microsoft.com/office/drawing/2014/main" id="{C04133BD-C7DA-4A5B-86FC-4CD20E82A00C}"/>
-              </a:ext>
-            </a:extLst>
-          </p:cNvPr>
-          <p:cNvPicPr>
-            <a:picLocks noChangeAspect="1"/>
-          </p:cNvPicPr>
-          <p:nvPr/>
-        </p:nvPicPr>
-        <p:blipFill>
-          <a:blip r:embed="rId2">
-            <a:extLst>
-              <a:ext uri="{28A0092B-C50C-407E-A947-70E740481C1C}">
-                <a14:useLocalDpi xmlns:a14="http://schemas.microsoft.com/office/drawing/2010/main" val="0"/>
-              </a:ext>
-            </a:extLst>
-          </a:blip>
-          <a:stretch>
-            <a:fillRect/>
-          </a:stretch>
-        </p:blipFill>
-        <p:spPr>
-          <a:xfrm>
-            <a:off x="867820" y="2324796"/>
-            <a:ext cx="1189579" cy="2691972"/>
-          </a:xfrm>
-          <a:prstGeom prst="rect">
-            <a:avLst/>
-          </a:prstGeom>
-        </p:spPr>
-      </p:pic>
-      <p:pic>
-        <p:nvPicPr>
-          <p:cNvPr id="7" name="Graphic 6" descr="Cloud">
-            <a:extLst>
-              <a:ext uri="{FF2B5EF4-FFF2-40B4-BE49-F238E27FC236}">
-                <a16:creationId xmlns:a16="http://schemas.microsoft.com/office/drawing/2014/main" id="{3A87124C-1FD9-4AE0-A262-F1564B6C0154}"/>
-              </a:ext>
-            </a:extLst>
-          </p:cNvPr>
-          <p:cNvPicPr>
-            <a:picLocks noChangeAspect="1"/>
-          </p:cNvPicPr>
-          <p:nvPr/>
-        </p:nvPicPr>
-        <p:blipFill>
-          <a:blip r:embed="rId3">
-            <a:extLst>
-              <a:ext uri="{28A0092B-C50C-407E-A947-70E740481C1C}">
-                <a14:useLocalDpi xmlns:a14="http://schemas.microsoft.com/office/drawing/2010/main" val="0"/>
-              </a:ext>
-              <a:ext uri="{96DAC541-7B7A-43D3-8B79-37D633B846F1}">
-                <asvg:svgBlip xmlns:asvg="http://schemas.microsoft.com/office/drawing/2016/SVG/main" r:embed="rId4"/>
-              </a:ext>
-            </a:extLst>
-          </a:blip>
-          <a:stretch>
-            <a:fillRect/>
-          </a:stretch>
-        </p:blipFill>
-        <p:spPr>
-          <a:xfrm>
-            <a:off x="4181462" y="-138063"/>
-            <a:ext cx="2868079" cy="2868079"/>
-          </a:xfrm>
-          <a:prstGeom prst="rect">
-            <a:avLst/>
-          </a:prstGeom>
-        </p:spPr>
-      </p:pic>
-      <p:grpSp>
-        <p:nvGrpSpPr>
-          <p:cNvPr id="15" name="Group 14">
-            <a:extLst>
-              <a:ext uri="{FF2B5EF4-FFF2-40B4-BE49-F238E27FC236}">
-                <a16:creationId xmlns:a16="http://schemas.microsoft.com/office/drawing/2014/main" id="{40C5B209-4AA9-4DED-8227-297A42EC8449}"/>
-              </a:ext>
-            </a:extLst>
-          </p:cNvPr>
-          <p:cNvGrpSpPr/>
-          <p:nvPr/>
-        </p:nvGrpSpPr>
-        <p:grpSpPr>
-          <a:xfrm>
-            <a:off x="8810605" y="2058065"/>
-            <a:ext cx="2915728" cy="2551953"/>
-            <a:chOff x="6109739" y="2155513"/>
-            <a:chExt cx="2915728" cy="2551953"/>
-          </a:xfrm>
-        </p:grpSpPr>
-        <p:sp>
-          <p:nvSpPr>
-            <p:cNvPr id="14" name="Rectangle: Rounded Corners 13">
-              <a:extLst>
-                <a:ext uri="{FF2B5EF4-FFF2-40B4-BE49-F238E27FC236}">
-                  <a16:creationId xmlns:a16="http://schemas.microsoft.com/office/drawing/2014/main" id="{2EEE5A17-A7AE-42DB-AC77-31B86878D050}"/>
-                </a:ext>
-              </a:extLst>
-            </p:cNvPr>
-            <p:cNvSpPr/>
-            <p:nvPr/>
-          </p:nvSpPr>
-          <p:spPr>
-            <a:xfrm>
-              <a:off x="6109739" y="2215165"/>
-              <a:ext cx="2915728" cy="2492301"/>
-            </a:xfrm>
-            <a:prstGeom prst="roundRect">
-              <a:avLst/>
-            </a:prstGeom>
-            <a:solidFill>
-              <a:schemeClr val="accent2">
-                <a:lumMod val="40000"/>
-                <a:lumOff val="60000"/>
-                <a:alpha val="50000"/>
-              </a:schemeClr>
-            </a:solidFill>
-            <a:ln>
-              <a:solidFill>
-                <a:schemeClr val="tx1"/>
-              </a:solidFill>
-            </a:ln>
-          </p:spPr>
-          <p:style>
-            <a:lnRef idx="0">
-              <a:scrgbClr r="0" g="0" b="0"/>
-            </a:lnRef>
-            <a:fillRef idx="0">
-              <a:scrgbClr r="0" g="0" b="0"/>
-            </a:fillRef>
-            <a:effectRef idx="0">
-              <a:scrgbClr r="0" g="0" b="0"/>
-            </a:effectRef>
-            <a:fontRef idx="minor">
-              <a:schemeClr val="lt1"/>
-            </a:fontRef>
-          </p:style>
-          <p:txBody>
-            <a:bodyPr rtlCol="0" anchor="ctr"/>
-            <a:lstStyle/>
-            <a:p>
-              <a:pPr algn="ctr"/>
-              <a:endParaRPr lang="en-US" dirty="0"/>
-            </a:p>
-          </p:txBody>
-        </p:sp>
-        <p:pic>
-          <p:nvPicPr>
-            <p:cNvPr id="9" name="Graphic 8" descr="Snowflake">
-              <a:extLst>
-                <a:ext uri="{FF2B5EF4-FFF2-40B4-BE49-F238E27FC236}">
-                  <a16:creationId xmlns:a16="http://schemas.microsoft.com/office/drawing/2014/main" id="{FC727A84-CBF2-49F0-9E8E-1B2922386E78}"/>
-                </a:ext>
-              </a:extLst>
-            </p:cNvPr>
-            <p:cNvPicPr>
-              <a:picLocks noChangeAspect="1"/>
-            </p:cNvPicPr>
-            <p:nvPr/>
-          </p:nvPicPr>
-          <p:blipFill>
-            <a:blip r:embed="rId5">
-              <a:extLst>
-                <a:ext uri="{28A0092B-C50C-407E-A947-70E740481C1C}">
-                  <a14:useLocalDpi xmlns:a14="http://schemas.microsoft.com/office/drawing/2010/main" val="0"/>
-                </a:ext>
-                <a:ext uri="{96DAC541-7B7A-43D3-8B79-37D633B846F1}">
-                  <asvg:svgBlip xmlns:asvg="http://schemas.microsoft.com/office/drawing/2016/SVG/main" r:embed="rId6"/>
-                </a:ext>
-              </a:extLst>
-            </a:blip>
-            <a:stretch>
-              <a:fillRect/>
-            </a:stretch>
-          </p:blipFill>
-          <p:spPr>
-            <a:xfrm>
-              <a:off x="6267446" y="2155513"/>
-              <a:ext cx="1384727" cy="1384727"/>
-            </a:xfrm>
-            <a:prstGeom prst="rect">
-              <a:avLst/>
-            </a:prstGeom>
-          </p:spPr>
-        </p:pic>
-        <p:pic>
-          <p:nvPicPr>
-            <p:cNvPr id="11" name="Graphic 10" descr="Sun">
-              <a:extLst>
-                <a:ext uri="{FF2B5EF4-FFF2-40B4-BE49-F238E27FC236}">
-                  <a16:creationId xmlns:a16="http://schemas.microsoft.com/office/drawing/2014/main" id="{B8B76924-6095-48AC-ADE0-2531BF0FB1B7}"/>
-                </a:ext>
-              </a:extLst>
-            </p:cNvPr>
-            <p:cNvPicPr>
-              <a:picLocks noChangeAspect="1"/>
-            </p:cNvPicPr>
-            <p:nvPr/>
-          </p:nvPicPr>
-          <p:blipFill>
-            <a:blip r:embed="rId7">
-              <a:extLst>
-                <a:ext uri="{28A0092B-C50C-407E-A947-70E740481C1C}">
-                  <a14:useLocalDpi xmlns:a14="http://schemas.microsoft.com/office/drawing/2010/main" val="0"/>
-                </a:ext>
-                <a:ext uri="{96DAC541-7B7A-43D3-8B79-37D633B846F1}">
-                  <asvg:svgBlip xmlns:asvg="http://schemas.microsoft.com/office/drawing/2016/SVG/main" r:embed="rId8"/>
-                </a:ext>
-              </a:extLst>
-            </a:blip>
-            <a:stretch>
-              <a:fillRect/>
-            </a:stretch>
-          </p:blipFill>
-          <p:spPr>
-            <a:xfrm>
-              <a:off x="6736918" y="3234662"/>
-              <a:ext cx="1384727" cy="1384727"/>
-            </a:xfrm>
-            <a:prstGeom prst="rect">
-              <a:avLst/>
-            </a:prstGeom>
-          </p:spPr>
-        </p:pic>
-        <p:pic>
-          <p:nvPicPr>
-            <p:cNvPr id="13" name="Graphic 12" descr="Thermometer">
-              <a:extLst>
-                <a:ext uri="{FF2B5EF4-FFF2-40B4-BE49-F238E27FC236}">
-                  <a16:creationId xmlns:a16="http://schemas.microsoft.com/office/drawing/2014/main" id="{1D866872-9456-46EB-A190-D86AE4E3D0E3}"/>
-                </a:ext>
-              </a:extLst>
-            </p:cNvPr>
-            <p:cNvPicPr>
-              <a:picLocks noChangeAspect="1"/>
-            </p:cNvPicPr>
-            <p:nvPr/>
-          </p:nvPicPr>
-          <p:blipFill>
-            <a:blip r:embed="rId9">
-              <a:extLst>
-                <a:ext uri="{28A0092B-C50C-407E-A947-70E740481C1C}">
-                  <a14:useLocalDpi xmlns:a14="http://schemas.microsoft.com/office/drawing/2010/main" val="0"/>
-                </a:ext>
-                <a:ext uri="{96DAC541-7B7A-43D3-8B79-37D633B846F1}">
-                  <asvg:svgBlip xmlns:asvg="http://schemas.microsoft.com/office/drawing/2016/SVG/main" r:embed="rId10"/>
-                </a:ext>
-              </a:extLst>
-            </a:blip>
-            <a:stretch>
-              <a:fillRect/>
-            </a:stretch>
-          </p:blipFill>
-          <p:spPr>
-            <a:xfrm>
-              <a:off x="7571312" y="2378732"/>
-              <a:ext cx="1384727" cy="1384727"/>
-            </a:xfrm>
-            <a:prstGeom prst="rect">
-              <a:avLst/>
-            </a:prstGeom>
-          </p:spPr>
-        </p:pic>
-      </p:grpSp>
-      <p:sp>
-        <p:nvSpPr>
-          <p:cNvPr id="16" name="TextBox 15">
-            <a:extLst>
-              <a:ext uri="{FF2B5EF4-FFF2-40B4-BE49-F238E27FC236}">
-                <a16:creationId xmlns:a16="http://schemas.microsoft.com/office/drawing/2014/main" id="{7F3F1ED2-9593-4327-A919-6F94842E9FF0}"/>
-              </a:ext>
-            </a:extLst>
-          </p:cNvPr>
-          <p:cNvSpPr txBox="1"/>
-          <p:nvPr/>
-        </p:nvSpPr>
-        <p:spPr>
-          <a:xfrm>
-            <a:off x="883592" y="5690975"/>
-            <a:ext cx="1158034" cy="461665"/>
-          </a:xfrm>
-          <a:prstGeom prst="rect">
-            <a:avLst/>
-          </a:prstGeom>
-        </p:spPr>
-        <p:style>
-          <a:lnRef idx="2">
-            <a:schemeClr val="dk1"/>
-          </a:lnRef>
-          <a:fillRef idx="1">
-            <a:schemeClr val="lt1"/>
-          </a:fillRef>
-          <a:effectRef idx="0">
-            <a:schemeClr val="dk1"/>
-          </a:effectRef>
-          <a:fontRef idx="minor">
-            <a:schemeClr val="dk1"/>
-          </a:fontRef>
-        </p:style>
-        <p:txBody>
-          <a:bodyPr wrap="square" rtlCol="0">
-            <a:spAutoFit/>
-          </a:bodyPr>
-          <a:lstStyle/>
-          <a:p>
-            <a:pPr algn="ctr"/>
-            <a:r>
-              <a:rPr lang="en-US" sz="2400" b="1" dirty="0"/>
-              <a:t>Argon</a:t>
-            </a:r>
-          </a:p>
-        </p:txBody>
-      </p:sp>
-      <p:sp>
-        <p:nvSpPr>
-          <p:cNvPr id="17" name="TextBox 16">
-            <a:extLst>
-              <a:ext uri="{FF2B5EF4-FFF2-40B4-BE49-F238E27FC236}">
-                <a16:creationId xmlns:a16="http://schemas.microsoft.com/office/drawing/2014/main" id="{C3CD7E23-4859-4854-85A9-32CCFD2CBFB4}"/>
-              </a:ext>
-            </a:extLst>
-          </p:cNvPr>
-          <p:cNvSpPr txBox="1"/>
-          <p:nvPr/>
-        </p:nvSpPr>
-        <p:spPr>
-          <a:xfrm>
-            <a:off x="4489117" y="5690975"/>
-            <a:ext cx="2252770" cy="461665"/>
-          </a:xfrm>
-          <a:prstGeom prst="rect">
-            <a:avLst/>
-          </a:prstGeom>
-        </p:spPr>
-        <p:style>
-          <a:lnRef idx="2">
-            <a:schemeClr val="dk1"/>
-          </a:lnRef>
-          <a:fillRef idx="1">
-            <a:schemeClr val="lt1"/>
-          </a:fillRef>
-          <a:effectRef idx="0">
-            <a:schemeClr val="dk1"/>
-          </a:effectRef>
-          <a:fontRef idx="minor">
-            <a:schemeClr val="dk1"/>
-          </a:fontRef>
-        </p:style>
-        <p:txBody>
-          <a:bodyPr wrap="square" rtlCol="0">
-            <a:spAutoFit/>
-          </a:bodyPr>
-          <a:lstStyle/>
-          <a:p>
-            <a:pPr algn="ctr"/>
-            <a:r>
-              <a:rPr lang="en-US" sz="2400" b="1" dirty="0"/>
-              <a:t>Particle Cloud</a:t>
-            </a:r>
-          </a:p>
-        </p:txBody>
-      </p:sp>
-      <p:sp>
-        <p:nvSpPr>
-          <p:cNvPr id="18" name="TextBox 17">
-            <a:extLst>
-              <a:ext uri="{FF2B5EF4-FFF2-40B4-BE49-F238E27FC236}">
-                <a16:creationId xmlns:a16="http://schemas.microsoft.com/office/drawing/2014/main" id="{78DF10E0-2FF4-4ACD-B086-F78C18167F2A}"/>
-              </a:ext>
-            </a:extLst>
-          </p:cNvPr>
-          <p:cNvSpPr txBox="1"/>
-          <p:nvPr/>
-        </p:nvSpPr>
-        <p:spPr>
-          <a:xfrm>
-            <a:off x="9142085" y="5690975"/>
-            <a:ext cx="2252770" cy="461665"/>
-          </a:xfrm>
-          <a:prstGeom prst="rect">
-            <a:avLst/>
-          </a:prstGeom>
-        </p:spPr>
-        <p:style>
-          <a:lnRef idx="2">
-            <a:schemeClr val="dk1"/>
-          </a:lnRef>
-          <a:fillRef idx="1">
-            <a:schemeClr val="lt1"/>
-          </a:fillRef>
-          <a:effectRef idx="0">
-            <a:schemeClr val="dk1"/>
-          </a:effectRef>
-          <a:fontRef idx="minor">
-            <a:schemeClr val="dk1"/>
-          </a:fontRef>
-        </p:style>
-        <p:txBody>
-          <a:bodyPr wrap="square" rtlCol="0">
-            <a:spAutoFit/>
-          </a:bodyPr>
-          <a:lstStyle/>
-          <a:p>
-            <a:pPr algn="ctr"/>
-            <a:r>
-              <a:rPr lang="en-US" sz="2400" b="1" dirty="0"/>
-              <a:t>Weather API</a:t>
-            </a:r>
-          </a:p>
-        </p:txBody>
-      </p:sp>
-      <p:sp>
-        <p:nvSpPr>
-          <p:cNvPr id="4" name="Arc 3">
-            <a:extLst>
-              <a:ext uri="{FF2B5EF4-FFF2-40B4-BE49-F238E27FC236}">
-                <a16:creationId xmlns:a16="http://schemas.microsoft.com/office/drawing/2014/main" id="{BD1EE0FC-033B-42EB-BD4E-A75E1076F0C6}"/>
-              </a:ext>
-            </a:extLst>
-          </p:cNvPr>
-          <p:cNvSpPr/>
-          <p:nvPr/>
-        </p:nvSpPr>
-        <p:spPr>
-          <a:xfrm>
-            <a:off x="1602481" y="1277055"/>
-            <a:ext cx="4595119" cy="1646003"/>
-          </a:xfrm>
-          <a:prstGeom prst="arc">
-            <a:avLst>
-              <a:gd name="adj1" fmla="val 11292682"/>
-              <a:gd name="adj2" fmla="val 16981830"/>
-            </a:avLst>
-          </a:prstGeom>
-          <a:ln w="57150">
-            <a:solidFill>
-              <a:schemeClr val="bg1">
-                <a:lumMod val="85000"/>
-              </a:schemeClr>
-            </a:solidFill>
-            <a:tailEnd type="triangle" w="lg" len="med"/>
-          </a:ln>
-        </p:spPr>
-        <p:style>
-          <a:lnRef idx="1">
-            <a:schemeClr val="accent1"/>
-          </a:lnRef>
-          <a:fillRef idx="0">
-            <a:schemeClr val="accent1"/>
-          </a:fillRef>
-          <a:effectRef idx="0">
-            <a:schemeClr val="accent1"/>
-          </a:effectRef>
-          <a:fontRef idx="minor">
-            <a:schemeClr val="tx1"/>
-          </a:fontRef>
-        </p:style>
-        <p:txBody>
-          <a:bodyPr rot="0" spcFirstLastPara="0" vertOverflow="overflow" horzOverflow="overflow" vert="horz" wrap="square" lIns="91440" tIns="45720" rIns="91440" bIns="45720" numCol="1" spcCol="0" rtlCol="0" fromWordArt="0" anchor="ctr" anchorCtr="0" forceAA="0" compatLnSpc="1">
-            <a:prstTxWarp prst="textNoShape">
-              <a:avLst/>
-            </a:prstTxWarp>
-            <a:noAutofit/>
-          </a:bodyPr>
-          <a:lstStyle/>
-          <a:p>
-            <a:pPr algn="ctr"/>
-            <a:endParaRPr lang="en-US">
-              <a:solidFill>
-                <a:schemeClr val="bg2">
-                  <a:lumMod val="75000"/>
-                </a:schemeClr>
-              </a:solidFill>
-            </a:endParaRPr>
-          </a:p>
-        </p:txBody>
-      </p:sp>
-      <p:sp>
-        <p:nvSpPr>
-          <p:cNvPr id="19" name="TextBox 18">
-            <a:extLst>
-              <a:ext uri="{FF2B5EF4-FFF2-40B4-BE49-F238E27FC236}">
-                <a16:creationId xmlns:a16="http://schemas.microsoft.com/office/drawing/2014/main" id="{2D4149D2-611E-4090-B69A-E92276D44F48}"/>
-              </a:ext>
-            </a:extLst>
-          </p:cNvPr>
-          <p:cNvSpPr txBox="1"/>
-          <p:nvPr/>
-        </p:nvSpPr>
-        <p:spPr>
-          <a:xfrm>
-            <a:off x="1872254" y="243695"/>
-            <a:ext cx="2027786" cy="923330"/>
-          </a:xfrm>
-          <a:prstGeom prst="rect">
-            <a:avLst/>
-          </a:prstGeom>
-          <a:noFill/>
-        </p:spPr>
-        <p:txBody>
-          <a:bodyPr wrap="square" rtlCol="0">
-            <a:spAutoFit/>
-          </a:bodyPr>
-          <a:lstStyle/>
-          <a:p>
-            <a:pPr algn="ctr"/>
-            <a:r>
-              <a:rPr lang="en-US" b="1" dirty="0">
-                <a:solidFill>
-                  <a:schemeClr val="bg1">
-                    <a:lumMod val="85000"/>
-                  </a:schemeClr>
-                </a:solidFill>
-              </a:rPr>
-              <a:t>Send request via </a:t>
-            </a:r>
-            <a:r>
-              <a:rPr lang="en-US" b="1" dirty="0" err="1">
-                <a:solidFill>
-                  <a:schemeClr val="bg1">
-                    <a:lumMod val="85000"/>
-                  </a:schemeClr>
-                </a:solidFill>
-              </a:rPr>
-              <a:t>Particle.publish</a:t>
-            </a:r>
-            <a:r>
-              <a:rPr lang="en-US" b="1" dirty="0">
-                <a:solidFill>
-                  <a:schemeClr val="bg1">
-                    <a:lumMod val="85000"/>
-                  </a:schemeClr>
-                </a:solidFill>
-              </a:rPr>
-              <a:t>() to webhook</a:t>
-            </a:r>
-          </a:p>
-        </p:txBody>
-      </p:sp>
-      <p:sp>
-        <p:nvSpPr>
-          <p:cNvPr id="20" name="TextBox 19">
-            <a:extLst>
-              <a:ext uri="{FF2B5EF4-FFF2-40B4-BE49-F238E27FC236}">
-                <a16:creationId xmlns:a16="http://schemas.microsoft.com/office/drawing/2014/main" id="{181926D2-6827-4E7F-87F9-59F421A23196}"/>
-              </a:ext>
-            </a:extLst>
-          </p:cNvPr>
-          <p:cNvSpPr txBox="1"/>
-          <p:nvPr/>
-        </p:nvSpPr>
-        <p:spPr>
-          <a:xfrm>
-            <a:off x="7761587" y="520694"/>
-            <a:ext cx="2261373" cy="923330"/>
-          </a:xfrm>
-          <a:prstGeom prst="rect">
-            <a:avLst/>
-          </a:prstGeom>
-          <a:noFill/>
-        </p:spPr>
-        <p:txBody>
-          <a:bodyPr wrap="square" rtlCol="0">
-            <a:spAutoFit/>
-          </a:bodyPr>
-          <a:lstStyle/>
-          <a:p>
-            <a:pPr algn="ctr"/>
-            <a:r>
-              <a:rPr lang="en-US" b="1" dirty="0">
-                <a:solidFill>
-                  <a:schemeClr val="bg1">
-                    <a:lumMod val="85000"/>
-                  </a:schemeClr>
-                </a:solidFill>
-              </a:rPr>
-              <a:t>Particle webhook connects to API endpoint</a:t>
-            </a:r>
-          </a:p>
-        </p:txBody>
-      </p:sp>
-      <p:sp>
-        <p:nvSpPr>
-          <p:cNvPr id="22" name="Arc 21">
-            <a:extLst>
-              <a:ext uri="{FF2B5EF4-FFF2-40B4-BE49-F238E27FC236}">
-                <a16:creationId xmlns:a16="http://schemas.microsoft.com/office/drawing/2014/main" id="{53158D47-55D2-4762-A3BA-61D655491B12}"/>
-              </a:ext>
-            </a:extLst>
-          </p:cNvPr>
-          <p:cNvSpPr/>
-          <p:nvPr/>
-        </p:nvSpPr>
-        <p:spPr>
-          <a:xfrm>
-            <a:off x="4751981" y="1277055"/>
-            <a:ext cx="4595119" cy="1646003"/>
-          </a:xfrm>
-          <a:prstGeom prst="arc">
-            <a:avLst>
-              <a:gd name="adj1" fmla="val 15081720"/>
-              <a:gd name="adj2" fmla="val 21236164"/>
-            </a:avLst>
-          </a:prstGeom>
-          <a:ln w="57150">
-            <a:solidFill>
-              <a:schemeClr val="bg1">
-                <a:lumMod val="85000"/>
-              </a:schemeClr>
-            </a:solidFill>
-            <a:tailEnd type="triangle" w="lg" len="med"/>
-          </a:ln>
-        </p:spPr>
-        <p:style>
-          <a:lnRef idx="1">
-            <a:schemeClr val="accent1"/>
-          </a:lnRef>
-          <a:fillRef idx="0">
-            <a:schemeClr val="accent1"/>
-          </a:fillRef>
-          <a:effectRef idx="0">
-            <a:schemeClr val="accent1"/>
-          </a:effectRef>
-          <a:fontRef idx="minor">
-            <a:schemeClr val="tx1"/>
-          </a:fontRef>
-        </p:style>
-        <p:txBody>
-          <a:bodyPr rot="0" spcFirstLastPara="0" vertOverflow="overflow" horzOverflow="overflow" vert="horz" wrap="square" lIns="91440" tIns="45720" rIns="91440" bIns="45720" numCol="1" spcCol="0" rtlCol="0" fromWordArt="0" anchor="ctr" anchorCtr="0" forceAA="0" compatLnSpc="1">
-            <a:prstTxWarp prst="textNoShape">
-              <a:avLst/>
-            </a:prstTxWarp>
-            <a:noAutofit/>
-          </a:bodyPr>
-          <a:lstStyle/>
-          <a:p>
-            <a:pPr algn="ctr"/>
-            <a:endParaRPr lang="en-US">
-              <a:solidFill>
-                <a:schemeClr val="bg2">
-                  <a:lumMod val="75000"/>
-                </a:schemeClr>
-              </a:solidFill>
-            </a:endParaRPr>
-          </a:p>
-        </p:txBody>
-      </p:sp>
-      <p:sp>
-        <p:nvSpPr>
-          <p:cNvPr id="24" name="Arc 23">
-            <a:extLst>
-              <a:ext uri="{FF2B5EF4-FFF2-40B4-BE49-F238E27FC236}">
-                <a16:creationId xmlns:a16="http://schemas.microsoft.com/office/drawing/2014/main" id="{B94720B2-15C5-4040-BBAB-CEF7AF33872D}"/>
-              </a:ext>
-            </a:extLst>
-          </p:cNvPr>
-          <p:cNvSpPr/>
-          <p:nvPr/>
-        </p:nvSpPr>
-        <p:spPr>
-          <a:xfrm>
-            <a:off x="6055847" y="1037667"/>
-            <a:ext cx="4595119" cy="1646003"/>
-          </a:xfrm>
-          <a:prstGeom prst="arc">
-            <a:avLst>
-              <a:gd name="adj1" fmla="val 4386021"/>
-              <a:gd name="adj2" fmla="val 10484368"/>
-            </a:avLst>
-          </a:prstGeom>
-          <a:ln w="57150">
-            <a:solidFill>
-              <a:srgbClr val="FF0000"/>
-            </a:solidFill>
-            <a:tailEnd type="triangle" w="lg" len="med"/>
-          </a:ln>
-        </p:spPr>
-        <p:style>
-          <a:lnRef idx="1">
-            <a:schemeClr val="accent1"/>
-          </a:lnRef>
-          <a:fillRef idx="0">
-            <a:schemeClr val="accent1"/>
-          </a:fillRef>
-          <a:effectRef idx="0">
-            <a:schemeClr val="accent1"/>
-          </a:effectRef>
-          <a:fontRef idx="minor">
-            <a:schemeClr val="tx1"/>
-          </a:fontRef>
-        </p:style>
-        <p:txBody>
-          <a:bodyPr rtlCol="0" anchor="ctr"/>
-          <a:lstStyle/>
-          <a:p>
-            <a:pPr algn="ctr"/>
-            <a:endParaRPr lang="en-US"/>
-          </a:p>
-        </p:txBody>
-      </p:sp>
-      <p:sp>
-        <p:nvSpPr>
-          <p:cNvPr id="26" name="TextBox 25">
-            <a:extLst>
-              <a:ext uri="{FF2B5EF4-FFF2-40B4-BE49-F238E27FC236}">
-                <a16:creationId xmlns:a16="http://schemas.microsoft.com/office/drawing/2014/main" id="{C616FBDC-574E-4D29-B3F3-541CF31BB759}"/>
-              </a:ext>
-            </a:extLst>
-          </p:cNvPr>
-          <p:cNvSpPr txBox="1"/>
-          <p:nvPr/>
-        </p:nvSpPr>
-        <p:spPr>
-          <a:xfrm>
-            <a:off x="6132035" y="2863548"/>
-            <a:ext cx="2261373" cy="923330"/>
-          </a:xfrm>
-          <a:prstGeom prst="rect">
-            <a:avLst/>
-          </a:prstGeom>
-          <a:noFill/>
-        </p:spPr>
-        <p:txBody>
-          <a:bodyPr wrap="square" rtlCol="0">
-            <a:spAutoFit/>
-          </a:bodyPr>
-          <a:lstStyle/>
-          <a:p>
-            <a:pPr algn="ctr"/>
-            <a:r>
-              <a:rPr lang="en-US" b="1" dirty="0"/>
-              <a:t>API responds with request JSON-formatted data</a:t>
-            </a:r>
-          </a:p>
-        </p:txBody>
-      </p:sp>
-    </p:spTree>
-    <p:extLst>
-      <p:ext uri="{BB962C8B-B14F-4D97-AF65-F5344CB8AC3E}">
-        <p14:creationId xmlns:p14="http://schemas.microsoft.com/office/powerpoint/2010/main" val="3893865506"/>
-      </p:ext>
-    </p:extLst>
-  </p:cSld>
-  <p:clrMapOvr>
-    <a:masterClrMapping/>
-  </p:clrMapOvr>
-</p:sld>
-</file>
-
-<file path=ppt/slides/slide5.xml><?xml version="1.0" encoding="utf-8"?>
-<p:sld xmlns:a="http://schemas.openxmlformats.org/drawingml/2006/main" xmlns:r="http://schemas.openxmlformats.org/officeDocument/2006/relationships" xmlns:p="http://schemas.openxmlformats.org/presentationml/2006/main">
-  <p:cSld>
-    <p:spTree>
-      <p:nvGrpSpPr>
-        <p:cNvPr id="1" name=""/>
-        <p:cNvGrpSpPr/>
-        <p:nvPr/>
-      </p:nvGrpSpPr>
-      <p:grpSpPr>
-        <a:xfrm>
-          <a:off x="0" y="0"/>
-          <a:ext cx="0" cy="0"/>
-          <a:chOff x="0" y="0"/>
-          <a:chExt cx="0" cy="0"/>
-        </a:xfrm>
-      </p:grpSpPr>
-      <p:pic>
-        <p:nvPicPr>
-          <p:cNvPr id="5" name="Picture 4" descr="Qr code&#10;&#10;Description automatically generated">
-            <a:extLst>
-              <a:ext uri="{FF2B5EF4-FFF2-40B4-BE49-F238E27FC236}">
-                <a16:creationId xmlns:a16="http://schemas.microsoft.com/office/drawing/2014/main" id="{C04133BD-C7DA-4A5B-86FC-4CD20E82A00C}"/>
-              </a:ext>
-            </a:extLst>
-          </p:cNvPr>
-          <p:cNvPicPr>
-            <a:picLocks noChangeAspect="1"/>
-          </p:cNvPicPr>
-          <p:nvPr/>
-        </p:nvPicPr>
-        <p:blipFill>
-          <a:blip r:embed="rId2">
-            <a:extLst>
-              <a:ext uri="{28A0092B-C50C-407E-A947-70E740481C1C}">
-                <a14:useLocalDpi xmlns:a14="http://schemas.microsoft.com/office/drawing/2010/main" val="0"/>
-              </a:ext>
-            </a:extLst>
-          </a:blip>
-          <a:stretch>
-            <a:fillRect/>
-          </a:stretch>
-        </p:blipFill>
-        <p:spPr>
-          <a:xfrm>
-            <a:off x="867820" y="2324796"/>
-            <a:ext cx="1189579" cy="2691972"/>
-          </a:xfrm>
-          <a:prstGeom prst="rect">
-            <a:avLst/>
-          </a:prstGeom>
-        </p:spPr>
-      </p:pic>
-      <p:pic>
-        <p:nvPicPr>
-          <p:cNvPr id="7" name="Graphic 6" descr="Cloud">
-            <a:extLst>
-              <a:ext uri="{FF2B5EF4-FFF2-40B4-BE49-F238E27FC236}">
-                <a16:creationId xmlns:a16="http://schemas.microsoft.com/office/drawing/2014/main" id="{3A87124C-1FD9-4AE0-A262-F1564B6C0154}"/>
-              </a:ext>
-            </a:extLst>
-          </p:cNvPr>
-          <p:cNvPicPr>
-            <a:picLocks noChangeAspect="1"/>
-          </p:cNvPicPr>
-          <p:nvPr/>
-        </p:nvPicPr>
-        <p:blipFill>
-          <a:blip r:embed="rId3">
-            <a:extLst>
-              <a:ext uri="{28A0092B-C50C-407E-A947-70E740481C1C}">
-                <a14:useLocalDpi xmlns:a14="http://schemas.microsoft.com/office/drawing/2010/main" val="0"/>
-              </a:ext>
-              <a:ext uri="{96DAC541-7B7A-43D3-8B79-37D633B846F1}">
-                <asvg:svgBlip xmlns:asvg="http://schemas.microsoft.com/office/drawing/2016/SVG/main" r:embed="rId4"/>
-              </a:ext>
-            </a:extLst>
-          </a:blip>
-          <a:stretch>
-            <a:fillRect/>
-          </a:stretch>
-        </p:blipFill>
-        <p:spPr>
-          <a:xfrm>
-            <a:off x="4181462" y="-138063"/>
-            <a:ext cx="2868079" cy="2868079"/>
-          </a:xfrm>
-          <a:prstGeom prst="rect">
-            <a:avLst/>
-          </a:prstGeom>
-        </p:spPr>
-      </p:pic>
-      <p:grpSp>
-        <p:nvGrpSpPr>
-          <p:cNvPr id="15" name="Group 14">
-            <a:extLst>
-              <a:ext uri="{FF2B5EF4-FFF2-40B4-BE49-F238E27FC236}">
-                <a16:creationId xmlns:a16="http://schemas.microsoft.com/office/drawing/2014/main" id="{40C5B209-4AA9-4DED-8227-297A42EC8449}"/>
-              </a:ext>
-            </a:extLst>
-          </p:cNvPr>
-          <p:cNvGrpSpPr/>
-          <p:nvPr/>
-        </p:nvGrpSpPr>
-        <p:grpSpPr>
-          <a:xfrm>
-            <a:off x="8810605" y="2058065"/>
-            <a:ext cx="2915728" cy="2551953"/>
-            <a:chOff x="6109739" y="2155513"/>
-            <a:chExt cx="2915728" cy="2551953"/>
-          </a:xfrm>
-        </p:grpSpPr>
-        <p:sp>
-          <p:nvSpPr>
-            <p:cNvPr id="14" name="Rectangle: Rounded Corners 13">
-              <a:extLst>
-                <a:ext uri="{FF2B5EF4-FFF2-40B4-BE49-F238E27FC236}">
-                  <a16:creationId xmlns:a16="http://schemas.microsoft.com/office/drawing/2014/main" id="{2EEE5A17-A7AE-42DB-AC77-31B86878D050}"/>
-                </a:ext>
-              </a:extLst>
-            </p:cNvPr>
-            <p:cNvSpPr/>
-            <p:nvPr/>
-          </p:nvSpPr>
-          <p:spPr>
-            <a:xfrm>
-              <a:off x="6109739" y="2215165"/>
-              <a:ext cx="2915728" cy="2492301"/>
-            </a:xfrm>
-            <a:prstGeom prst="roundRect">
-              <a:avLst/>
-            </a:prstGeom>
-            <a:solidFill>
-              <a:schemeClr val="accent2">
-                <a:lumMod val="40000"/>
-                <a:lumOff val="60000"/>
-                <a:alpha val="50000"/>
-              </a:schemeClr>
-            </a:solidFill>
-            <a:ln>
-              <a:solidFill>
-                <a:schemeClr val="tx1"/>
-              </a:solidFill>
-            </a:ln>
-          </p:spPr>
-          <p:style>
-            <a:lnRef idx="0">
-              <a:scrgbClr r="0" g="0" b="0"/>
-            </a:lnRef>
-            <a:fillRef idx="0">
-              <a:scrgbClr r="0" g="0" b="0"/>
-            </a:fillRef>
-            <a:effectRef idx="0">
-              <a:scrgbClr r="0" g="0" b="0"/>
-            </a:effectRef>
-            <a:fontRef idx="minor">
-              <a:schemeClr val="lt1"/>
-            </a:fontRef>
-          </p:style>
-          <p:txBody>
-            <a:bodyPr rtlCol="0" anchor="ctr"/>
-            <a:lstStyle/>
-            <a:p>
-              <a:pPr algn="ctr"/>
-              <a:endParaRPr lang="en-US" dirty="0"/>
-            </a:p>
-          </p:txBody>
-        </p:sp>
-        <p:pic>
-          <p:nvPicPr>
-            <p:cNvPr id="9" name="Graphic 8" descr="Snowflake">
-              <a:extLst>
-                <a:ext uri="{FF2B5EF4-FFF2-40B4-BE49-F238E27FC236}">
-                  <a16:creationId xmlns:a16="http://schemas.microsoft.com/office/drawing/2014/main" id="{FC727A84-CBF2-49F0-9E8E-1B2922386E78}"/>
-                </a:ext>
-              </a:extLst>
-            </p:cNvPr>
-            <p:cNvPicPr>
-              <a:picLocks noChangeAspect="1"/>
-            </p:cNvPicPr>
-            <p:nvPr/>
-          </p:nvPicPr>
-          <p:blipFill>
-            <a:blip r:embed="rId5">
-              <a:extLst>
-                <a:ext uri="{28A0092B-C50C-407E-A947-70E740481C1C}">
-                  <a14:useLocalDpi xmlns:a14="http://schemas.microsoft.com/office/drawing/2010/main" val="0"/>
-                </a:ext>
-                <a:ext uri="{96DAC541-7B7A-43D3-8B79-37D633B846F1}">
-                  <asvg:svgBlip xmlns:asvg="http://schemas.microsoft.com/office/drawing/2016/SVG/main" r:embed="rId6"/>
-                </a:ext>
-              </a:extLst>
-            </a:blip>
-            <a:stretch>
-              <a:fillRect/>
-            </a:stretch>
-          </p:blipFill>
-          <p:spPr>
-            <a:xfrm>
-              <a:off x="6267446" y="2155513"/>
-              <a:ext cx="1384727" cy="1384727"/>
-            </a:xfrm>
-            <a:prstGeom prst="rect">
-              <a:avLst/>
-            </a:prstGeom>
-          </p:spPr>
-        </p:pic>
-        <p:pic>
-          <p:nvPicPr>
-            <p:cNvPr id="11" name="Graphic 10" descr="Sun">
-              <a:extLst>
-                <a:ext uri="{FF2B5EF4-FFF2-40B4-BE49-F238E27FC236}">
-                  <a16:creationId xmlns:a16="http://schemas.microsoft.com/office/drawing/2014/main" id="{B8B76924-6095-48AC-ADE0-2531BF0FB1B7}"/>
-                </a:ext>
-              </a:extLst>
-            </p:cNvPr>
-            <p:cNvPicPr>
-              <a:picLocks noChangeAspect="1"/>
-            </p:cNvPicPr>
-            <p:nvPr/>
-          </p:nvPicPr>
-          <p:blipFill>
-            <a:blip r:embed="rId7">
-              <a:extLst>
-                <a:ext uri="{28A0092B-C50C-407E-A947-70E740481C1C}">
-                  <a14:useLocalDpi xmlns:a14="http://schemas.microsoft.com/office/drawing/2010/main" val="0"/>
-                </a:ext>
-                <a:ext uri="{96DAC541-7B7A-43D3-8B79-37D633B846F1}">
-                  <asvg:svgBlip xmlns:asvg="http://schemas.microsoft.com/office/drawing/2016/SVG/main" r:embed="rId8"/>
-                </a:ext>
-              </a:extLst>
-            </a:blip>
-            <a:stretch>
-              <a:fillRect/>
-            </a:stretch>
-          </p:blipFill>
-          <p:spPr>
-            <a:xfrm>
-              <a:off x="6736918" y="3234662"/>
-              <a:ext cx="1384727" cy="1384727"/>
-            </a:xfrm>
-            <a:prstGeom prst="rect">
-              <a:avLst/>
-            </a:prstGeom>
-          </p:spPr>
-        </p:pic>
-        <p:pic>
-          <p:nvPicPr>
-            <p:cNvPr id="13" name="Graphic 12" descr="Thermometer">
-              <a:extLst>
-                <a:ext uri="{FF2B5EF4-FFF2-40B4-BE49-F238E27FC236}">
-                  <a16:creationId xmlns:a16="http://schemas.microsoft.com/office/drawing/2014/main" id="{1D866872-9456-46EB-A190-D86AE4E3D0E3}"/>
-                </a:ext>
-              </a:extLst>
-            </p:cNvPr>
-            <p:cNvPicPr>
-              <a:picLocks noChangeAspect="1"/>
-            </p:cNvPicPr>
-            <p:nvPr/>
-          </p:nvPicPr>
-          <p:blipFill>
-            <a:blip r:embed="rId9">
-              <a:extLst>
-                <a:ext uri="{28A0092B-C50C-407E-A947-70E740481C1C}">
-                  <a14:useLocalDpi xmlns:a14="http://schemas.microsoft.com/office/drawing/2010/main" val="0"/>
-                </a:ext>
-                <a:ext uri="{96DAC541-7B7A-43D3-8B79-37D633B846F1}">
-                  <asvg:svgBlip xmlns:asvg="http://schemas.microsoft.com/office/drawing/2016/SVG/main" r:embed="rId10"/>
-                </a:ext>
-              </a:extLst>
-            </a:blip>
-            <a:stretch>
-              <a:fillRect/>
-            </a:stretch>
-          </p:blipFill>
-          <p:spPr>
-            <a:xfrm>
-              <a:off x="7571312" y="2378732"/>
-              <a:ext cx="1384727" cy="1384727"/>
-            </a:xfrm>
-            <a:prstGeom prst="rect">
-              <a:avLst/>
-            </a:prstGeom>
-          </p:spPr>
-        </p:pic>
-      </p:grpSp>
-      <p:sp>
-        <p:nvSpPr>
-          <p:cNvPr id="16" name="TextBox 15">
-            <a:extLst>
-              <a:ext uri="{FF2B5EF4-FFF2-40B4-BE49-F238E27FC236}">
-                <a16:creationId xmlns:a16="http://schemas.microsoft.com/office/drawing/2014/main" id="{7F3F1ED2-9593-4327-A919-6F94842E9FF0}"/>
-              </a:ext>
-            </a:extLst>
-          </p:cNvPr>
-          <p:cNvSpPr txBox="1"/>
-          <p:nvPr/>
-        </p:nvSpPr>
-        <p:spPr>
-          <a:xfrm>
-            <a:off x="883592" y="5690975"/>
-            <a:ext cx="1158034" cy="461665"/>
-          </a:xfrm>
-          <a:prstGeom prst="rect">
-            <a:avLst/>
-          </a:prstGeom>
-        </p:spPr>
-        <p:style>
-          <a:lnRef idx="2">
-            <a:schemeClr val="dk1"/>
-          </a:lnRef>
-          <a:fillRef idx="1">
-            <a:schemeClr val="lt1"/>
-          </a:fillRef>
-          <a:effectRef idx="0">
-            <a:schemeClr val="dk1"/>
-          </a:effectRef>
-          <a:fontRef idx="minor">
-            <a:schemeClr val="dk1"/>
-          </a:fontRef>
-        </p:style>
-        <p:txBody>
-          <a:bodyPr wrap="square" rtlCol="0">
-            <a:spAutoFit/>
-          </a:bodyPr>
-          <a:lstStyle/>
-          <a:p>
-            <a:pPr algn="ctr"/>
-            <a:r>
-              <a:rPr lang="en-US" sz="2400" b="1" dirty="0"/>
-              <a:t>Argon</a:t>
+              <a:t>Photon</a:t>
             </a:r>
           </a:p>
         </p:txBody>
@@ -8176,7 +8156,7 @@
             <a:pPr algn="ctr"/>
             <a:r>
               <a:rPr lang="en-US" b="1" dirty="0"/>
-              <a:t>Argon receives JSON data via </a:t>
+              <a:t>Photon receives JSON data via </a:t>
             </a:r>
             <a:r>
               <a:rPr lang="en-US" b="1" dirty="0" err="1"/>
@@ -8189,6 +8169,41 @@
           </a:p>
         </p:txBody>
       </p:sp>
+      <p:pic>
+        <p:nvPicPr>
+          <p:cNvPr id="2" name="Picture 1">
+            <a:extLst>
+              <a:ext uri="{FF2B5EF4-FFF2-40B4-BE49-F238E27FC236}">
+                <a16:creationId xmlns:a16="http://schemas.microsoft.com/office/drawing/2014/main" id="{3F37EEF0-CD0A-0123-34B2-2AB63667E749}"/>
+              </a:ext>
+            </a:extLst>
+          </p:cNvPr>
+          <p:cNvPicPr>
+            <a:picLocks noChangeAspect="1"/>
+          </p:cNvPicPr>
+          <p:nvPr/>
+        </p:nvPicPr>
+        <p:blipFill>
+          <a:blip r:embed="rId10">
+            <a:extLst>
+              <a:ext uri="{28A0092B-C50C-407E-A947-70E740481C1C}">
+                <a14:useLocalDpi xmlns:a14="http://schemas.microsoft.com/office/drawing/2010/main" val="0"/>
+              </a:ext>
+            </a:extLst>
+          </a:blip>
+          <a:srcRect/>
+          <a:stretch/>
+        </p:blipFill>
+        <p:spPr>
+          <a:xfrm>
+            <a:off x="867820" y="2333051"/>
+            <a:ext cx="1189579" cy="2675462"/>
+          </a:xfrm>
+          <a:prstGeom prst="rect">
+            <a:avLst/>
+          </a:prstGeom>
+        </p:spPr>
+      </p:pic>
     </p:spTree>
     <p:extLst>
       <p:ext uri="{BB962C8B-B14F-4D97-AF65-F5344CB8AC3E}">
@@ -8310,7 +8325,7 @@
       </p:sp>
       <p:pic>
         <p:nvPicPr>
-          <p:cNvPr id="5" name="Picture 4" descr="Qr code&#10;&#10;Description automatically generated">
+          <p:cNvPr id="5" name="Picture 4">
             <a:extLst>
               <a:ext uri="{FF2B5EF4-FFF2-40B4-BE49-F238E27FC236}">
                 <a16:creationId xmlns:a16="http://schemas.microsoft.com/office/drawing/2014/main" id="{C04133BD-C7DA-4A5B-86FC-4CD20E82A00C}"/>
@@ -8324,21 +8339,20 @@
         </p:nvPicPr>
         <p:blipFill>
           <a:blip r:embed="rId2">
-            <a:lum bright="70000" contrast="-70000"/>
+            <a:alphaModFix amt="35000"/>
             <a:extLst>
               <a:ext uri="{28A0092B-C50C-407E-A947-70E740481C1C}">
                 <a14:useLocalDpi xmlns:a14="http://schemas.microsoft.com/office/drawing/2010/main" val="0"/>
               </a:ext>
             </a:extLst>
           </a:blip>
-          <a:stretch>
-            <a:fillRect/>
-          </a:stretch>
+          <a:srcRect/>
+          <a:stretch/>
         </p:blipFill>
         <p:spPr>
           <a:xfrm>
-            <a:off x="867820" y="2324796"/>
-            <a:ext cx="1189579" cy="2691972"/>
+            <a:off x="867820" y="2333051"/>
+            <a:ext cx="1189579" cy="2675462"/>
           </a:xfrm>
           <a:prstGeom prst="rect">
             <a:avLst/>
@@ -8639,7 +8653,7 @@
                   </a:schemeClr>
                 </a:solidFill>
               </a:rPr>
-              <a:t>Argon</a:t>
+              <a:t>Photon</a:t>
             </a:r>
           </a:p>
         </p:txBody>
@@ -9088,7 +9102,7 @@
             <a:pPr algn="ctr"/>
             <a:r>
               <a:rPr lang="en-US" b="1" dirty="0"/>
-              <a:t>Argon receives JSON data via </a:t>
+              <a:t>Photon receives JSON data via </a:t>
             </a:r>
             <a:r>
               <a:rPr lang="en-US" b="1" dirty="0" err="1"/>
@@ -9244,10 +9258,10 @@
       </p:grpSpPr>
       <p:pic>
         <p:nvPicPr>
-          <p:cNvPr id="5" name="Picture 4" descr="Qr code&#10;&#10;Description automatically generated">
-            <a:extLst>
-              <a:ext uri="{FF2B5EF4-FFF2-40B4-BE49-F238E27FC236}">
-                <a16:creationId xmlns:a16="http://schemas.microsoft.com/office/drawing/2014/main" id="{C04133BD-C7DA-4A5B-86FC-4CD20E82A00C}"/>
+          <p:cNvPr id="7" name="Graphic 6" descr="Cloud">
+            <a:extLst>
+              <a:ext uri="{FF2B5EF4-FFF2-40B4-BE49-F238E27FC236}">
+                <a16:creationId xmlns:a16="http://schemas.microsoft.com/office/drawing/2014/main" id="{3A87124C-1FD9-4AE0-A262-F1564B6C0154}"/>
               </a:ext>
             </a:extLst>
           </p:cNvPr>
@@ -9262,44 +9276,8 @@
               <a:ext uri="{28A0092B-C50C-407E-A947-70E740481C1C}">
                 <a14:useLocalDpi xmlns:a14="http://schemas.microsoft.com/office/drawing/2010/main" val="0"/>
               </a:ext>
-            </a:extLst>
-          </a:blip>
-          <a:stretch>
-            <a:fillRect/>
-          </a:stretch>
-        </p:blipFill>
-        <p:spPr>
-          <a:xfrm>
-            <a:off x="867820" y="2324796"/>
-            <a:ext cx="1189579" cy="2691972"/>
-          </a:xfrm>
-          <a:prstGeom prst="rect">
-            <a:avLst/>
-          </a:prstGeom>
-        </p:spPr>
-      </p:pic>
-      <p:pic>
-        <p:nvPicPr>
-          <p:cNvPr id="7" name="Graphic 6" descr="Cloud">
-            <a:extLst>
-              <a:ext uri="{FF2B5EF4-FFF2-40B4-BE49-F238E27FC236}">
-                <a16:creationId xmlns:a16="http://schemas.microsoft.com/office/drawing/2014/main" id="{3A87124C-1FD9-4AE0-A262-F1564B6C0154}"/>
-              </a:ext>
-            </a:extLst>
-          </p:cNvPr>
-          <p:cNvPicPr>
-            <a:picLocks noChangeAspect="1"/>
-          </p:cNvPicPr>
-          <p:nvPr/>
-        </p:nvPicPr>
-        <p:blipFill>
-          <a:blip r:embed="rId3">
-            <a:extLst>
-              <a:ext uri="{28A0092B-C50C-407E-A947-70E740481C1C}">
-                <a14:useLocalDpi xmlns:a14="http://schemas.microsoft.com/office/drawing/2010/main" val="0"/>
-              </a:ext>
               <a:ext uri="{96DAC541-7B7A-43D3-8B79-37D633B846F1}">
-                <asvg:svgBlip xmlns:asvg="http://schemas.microsoft.com/office/drawing/2016/SVG/main" r:embed="rId4"/>
+                <asvg:svgBlip xmlns:asvg="http://schemas.microsoft.com/office/drawing/2016/SVG/main" r:embed="rId3"/>
               </a:ext>
             </a:extLst>
           </a:blip>
@@ -9408,13 +9386,13 @@
             <p:nvPr/>
           </p:nvPicPr>
           <p:blipFill>
-            <a:blip r:embed="rId5">
+            <a:blip r:embed="rId4">
               <a:extLst>
                 <a:ext uri="{28A0092B-C50C-407E-A947-70E740481C1C}">
                   <a14:useLocalDpi xmlns:a14="http://schemas.microsoft.com/office/drawing/2010/main" val="0"/>
                 </a:ext>
                 <a:ext uri="{96DAC541-7B7A-43D3-8B79-37D633B846F1}">
-                  <asvg:svgBlip xmlns:asvg="http://schemas.microsoft.com/office/drawing/2016/SVG/main" r:embed="rId6"/>
+                  <asvg:svgBlip xmlns:asvg="http://schemas.microsoft.com/office/drawing/2016/SVG/main" r:embed="rId5"/>
                 </a:ext>
               </a:extLst>
             </a:blip>
@@ -9447,13 +9425,13 @@
             <p:nvPr/>
           </p:nvPicPr>
           <p:blipFill>
-            <a:blip r:embed="rId7">
+            <a:blip r:embed="rId6">
               <a:extLst>
                 <a:ext uri="{28A0092B-C50C-407E-A947-70E740481C1C}">
                   <a14:useLocalDpi xmlns:a14="http://schemas.microsoft.com/office/drawing/2010/main" val="0"/>
                 </a:ext>
                 <a:ext uri="{96DAC541-7B7A-43D3-8B79-37D633B846F1}">
-                  <asvg:svgBlip xmlns:asvg="http://schemas.microsoft.com/office/drawing/2016/SVG/main" r:embed="rId8"/>
+                  <asvg:svgBlip xmlns:asvg="http://schemas.microsoft.com/office/drawing/2016/SVG/main" r:embed="rId7"/>
                 </a:ext>
               </a:extLst>
             </a:blip>
@@ -9486,13 +9464,13 @@
             <p:nvPr/>
           </p:nvPicPr>
           <p:blipFill>
-            <a:blip r:embed="rId9">
+            <a:blip r:embed="rId8">
               <a:extLst>
                 <a:ext uri="{28A0092B-C50C-407E-A947-70E740481C1C}">
                   <a14:useLocalDpi xmlns:a14="http://schemas.microsoft.com/office/drawing/2010/main" val="0"/>
                 </a:ext>
                 <a:ext uri="{96DAC541-7B7A-43D3-8B79-37D633B846F1}">
-                  <asvg:svgBlip xmlns:asvg="http://schemas.microsoft.com/office/drawing/2016/SVG/main" r:embed="rId10"/>
+                  <asvg:svgBlip xmlns:asvg="http://schemas.microsoft.com/office/drawing/2016/SVG/main" r:embed="rId9"/>
                 </a:ext>
               </a:extLst>
             </a:blip>
@@ -9555,7 +9533,7 @@
             <a:pPr algn="ctr"/>
             <a:r>
               <a:rPr lang="en-US" sz="2400" b="1" dirty="0"/>
-              <a:t>Argon</a:t>
+              <a:t>Photon</a:t>
             </a:r>
           </a:p>
         </p:txBody>
@@ -9673,7 +9651,7 @@
           <p:nvPr/>
         </p:nvPicPr>
         <p:blipFill>
-          <a:blip r:embed="rId11"/>
+          <a:blip r:embed="rId10"/>
           <a:stretch>
             <a:fillRect/>
           </a:stretch>
@@ -9806,6 +9784,41 @@
           </a:p>
         </p:txBody>
       </p:sp>
+      <p:pic>
+        <p:nvPicPr>
+          <p:cNvPr id="2" name="Picture 1">
+            <a:extLst>
+              <a:ext uri="{FF2B5EF4-FFF2-40B4-BE49-F238E27FC236}">
+                <a16:creationId xmlns:a16="http://schemas.microsoft.com/office/drawing/2014/main" id="{30363B2E-7F2A-E118-FD66-D938B1073D0F}"/>
+              </a:ext>
+            </a:extLst>
+          </p:cNvPr>
+          <p:cNvPicPr>
+            <a:picLocks noChangeAspect="1"/>
+          </p:cNvPicPr>
+          <p:nvPr/>
+        </p:nvPicPr>
+        <p:blipFill>
+          <a:blip r:embed="rId11">
+            <a:extLst>
+              <a:ext uri="{28A0092B-C50C-407E-A947-70E740481C1C}">
+                <a14:useLocalDpi xmlns:a14="http://schemas.microsoft.com/office/drawing/2010/main" val="0"/>
+              </a:ext>
+            </a:extLst>
+          </a:blip>
+          <a:srcRect/>
+          <a:stretch/>
+        </p:blipFill>
+        <p:spPr>
+          <a:xfrm>
+            <a:off x="867820" y="2333051"/>
+            <a:ext cx="1189579" cy="2675462"/>
+          </a:xfrm>
+          <a:prstGeom prst="rect">
+            <a:avLst/>
+          </a:prstGeom>
+        </p:spPr>
+      </p:pic>
     </p:spTree>
     <p:extLst>
       <p:ext uri="{BB962C8B-B14F-4D97-AF65-F5344CB8AC3E}">
@@ -9838,10 +9851,10 @@
       </p:grpSpPr>
       <p:pic>
         <p:nvPicPr>
-          <p:cNvPr id="5" name="Picture 4" descr="Qr code&#10;&#10;Description automatically generated">
-            <a:extLst>
-              <a:ext uri="{FF2B5EF4-FFF2-40B4-BE49-F238E27FC236}">
-                <a16:creationId xmlns:a16="http://schemas.microsoft.com/office/drawing/2014/main" id="{C04133BD-C7DA-4A5B-86FC-4CD20E82A00C}"/>
+          <p:cNvPr id="7" name="Graphic 6" descr="Cloud">
+            <a:extLst>
+              <a:ext uri="{FF2B5EF4-FFF2-40B4-BE49-F238E27FC236}">
+                <a16:creationId xmlns:a16="http://schemas.microsoft.com/office/drawing/2014/main" id="{3A87124C-1FD9-4AE0-A262-F1564B6C0154}"/>
               </a:ext>
             </a:extLst>
           </p:cNvPr>
@@ -9856,44 +9869,8 @@
               <a:ext uri="{28A0092B-C50C-407E-A947-70E740481C1C}">
                 <a14:useLocalDpi xmlns:a14="http://schemas.microsoft.com/office/drawing/2010/main" val="0"/>
               </a:ext>
-            </a:extLst>
-          </a:blip>
-          <a:stretch>
-            <a:fillRect/>
-          </a:stretch>
-        </p:blipFill>
-        <p:spPr>
-          <a:xfrm>
-            <a:off x="867820" y="2324796"/>
-            <a:ext cx="1189579" cy="2691972"/>
-          </a:xfrm>
-          <a:prstGeom prst="rect">
-            <a:avLst/>
-          </a:prstGeom>
-        </p:spPr>
-      </p:pic>
-      <p:pic>
-        <p:nvPicPr>
-          <p:cNvPr id="7" name="Graphic 6" descr="Cloud">
-            <a:extLst>
-              <a:ext uri="{FF2B5EF4-FFF2-40B4-BE49-F238E27FC236}">
-                <a16:creationId xmlns:a16="http://schemas.microsoft.com/office/drawing/2014/main" id="{3A87124C-1FD9-4AE0-A262-F1564B6C0154}"/>
-              </a:ext>
-            </a:extLst>
-          </p:cNvPr>
-          <p:cNvPicPr>
-            <a:picLocks noChangeAspect="1"/>
-          </p:cNvPicPr>
-          <p:nvPr/>
-        </p:nvPicPr>
-        <p:blipFill>
-          <a:blip r:embed="rId3">
-            <a:extLst>
-              <a:ext uri="{28A0092B-C50C-407E-A947-70E740481C1C}">
-                <a14:useLocalDpi xmlns:a14="http://schemas.microsoft.com/office/drawing/2010/main" val="0"/>
-              </a:ext>
               <a:ext uri="{96DAC541-7B7A-43D3-8B79-37D633B846F1}">
-                <asvg:svgBlip xmlns:asvg="http://schemas.microsoft.com/office/drawing/2016/SVG/main" r:embed="rId4"/>
+                <asvg:svgBlip xmlns:asvg="http://schemas.microsoft.com/office/drawing/2016/SVG/main" r:embed="rId3"/>
               </a:ext>
             </a:extLst>
           </a:blip>
@@ -10002,13 +9979,13 @@
             <p:nvPr/>
           </p:nvPicPr>
           <p:blipFill>
-            <a:blip r:embed="rId5">
+            <a:blip r:embed="rId4">
               <a:extLst>
                 <a:ext uri="{28A0092B-C50C-407E-A947-70E740481C1C}">
                   <a14:useLocalDpi xmlns:a14="http://schemas.microsoft.com/office/drawing/2010/main" val="0"/>
                 </a:ext>
                 <a:ext uri="{96DAC541-7B7A-43D3-8B79-37D633B846F1}">
-                  <asvg:svgBlip xmlns:asvg="http://schemas.microsoft.com/office/drawing/2016/SVG/main" r:embed="rId6"/>
+                  <asvg:svgBlip xmlns:asvg="http://schemas.microsoft.com/office/drawing/2016/SVG/main" r:embed="rId5"/>
                 </a:ext>
               </a:extLst>
             </a:blip>
@@ -10041,13 +10018,13 @@
             <p:nvPr/>
           </p:nvPicPr>
           <p:blipFill>
-            <a:blip r:embed="rId7">
+            <a:blip r:embed="rId6">
               <a:extLst>
                 <a:ext uri="{28A0092B-C50C-407E-A947-70E740481C1C}">
                   <a14:useLocalDpi xmlns:a14="http://schemas.microsoft.com/office/drawing/2010/main" val="0"/>
                 </a:ext>
                 <a:ext uri="{96DAC541-7B7A-43D3-8B79-37D633B846F1}">
-                  <asvg:svgBlip xmlns:asvg="http://schemas.microsoft.com/office/drawing/2016/SVG/main" r:embed="rId8"/>
+                  <asvg:svgBlip xmlns:asvg="http://schemas.microsoft.com/office/drawing/2016/SVG/main" r:embed="rId7"/>
                 </a:ext>
               </a:extLst>
             </a:blip>
@@ -10080,13 +10057,13 @@
             <p:nvPr/>
           </p:nvPicPr>
           <p:blipFill>
-            <a:blip r:embed="rId9">
+            <a:blip r:embed="rId8">
               <a:extLst>
                 <a:ext uri="{28A0092B-C50C-407E-A947-70E740481C1C}">
                   <a14:useLocalDpi xmlns:a14="http://schemas.microsoft.com/office/drawing/2010/main" val="0"/>
                 </a:ext>
                 <a:ext uri="{96DAC541-7B7A-43D3-8B79-37D633B846F1}">
-                  <asvg:svgBlip xmlns:asvg="http://schemas.microsoft.com/office/drawing/2016/SVG/main" r:embed="rId10"/>
+                  <asvg:svgBlip xmlns:asvg="http://schemas.microsoft.com/office/drawing/2016/SVG/main" r:embed="rId9"/>
                 </a:ext>
               </a:extLst>
             </a:blip>
@@ -10149,7 +10126,7 @@
             <a:pPr algn="ctr"/>
             <a:r>
               <a:rPr lang="en-US" sz="2400" b="1" dirty="0"/>
-              <a:t>Argon</a:t>
+              <a:t>Photon</a:t>
             </a:r>
           </a:p>
         </p:txBody>
@@ -10267,7 +10244,7 @@
           <p:nvPr/>
         </p:nvPicPr>
         <p:blipFill>
-          <a:blip r:embed="rId11"/>
+          <a:blip r:embed="rId10"/>
           <a:stretch>
             <a:fillRect/>
           </a:stretch>
@@ -10514,6 +10491,41 @@
           </a:p>
         </p:txBody>
       </p:sp>
+      <p:pic>
+        <p:nvPicPr>
+          <p:cNvPr id="3" name="Picture 2">
+            <a:extLst>
+              <a:ext uri="{FF2B5EF4-FFF2-40B4-BE49-F238E27FC236}">
+                <a16:creationId xmlns:a16="http://schemas.microsoft.com/office/drawing/2014/main" id="{4D10F35F-3D3D-E3E1-8CE2-18219489B602}"/>
+              </a:ext>
+            </a:extLst>
+          </p:cNvPr>
+          <p:cNvPicPr>
+            <a:picLocks noChangeAspect="1"/>
+          </p:cNvPicPr>
+          <p:nvPr/>
+        </p:nvPicPr>
+        <p:blipFill>
+          <a:blip r:embed="rId11">
+            <a:extLst>
+              <a:ext uri="{28A0092B-C50C-407E-A947-70E740481C1C}">
+                <a14:useLocalDpi xmlns:a14="http://schemas.microsoft.com/office/drawing/2010/main" val="0"/>
+              </a:ext>
+            </a:extLst>
+          </a:blip>
+          <a:srcRect/>
+          <a:stretch/>
+        </p:blipFill>
+        <p:spPr>
+          <a:xfrm>
+            <a:off x="867820" y="2333051"/>
+            <a:ext cx="1189579" cy="2675462"/>
+          </a:xfrm>
+          <a:prstGeom prst="rect">
+            <a:avLst/>
+          </a:prstGeom>
+        </p:spPr>
+      </p:pic>
     </p:spTree>
     <p:extLst>
       <p:ext uri="{BB962C8B-B14F-4D97-AF65-F5344CB8AC3E}">
@@ -10546,10 +10558,10 @@
       </p:grpSpPr>
       <p:pic>
         <p:nvPicPr>
-          <p:cNvPr id="5" name="Picture 4" descr="Qr code&#10;&#10;Description automatically generated">
-            <a:extLst>
-              <a:ext uri="{FF2B5EF4-FFF2-40B4-BE49-F238E27FC236}">
-                <a16:creationId xmlns:a16="http://schemas.microsoft.com/office/drawing/2014/main" id="{C04133BD-C7DA-4A5B-86FC-4CD20E82A00C}"/>
+          <p:cNvPr id="7" name="Graphic 6" descr="Cloud">
+            <a:extLst>
+              <a:ext uri="{FF2B5EF4-FFF2-40B4-BE49-F238E27FC236}">
+                <a16:creationId xmlns:a16="http://schemas.microsoft.com/office/drawing/2014/main" id="{3A87124C-1FD9-4AE0-A262-F1564B6C0154}"/>
               </a:ext>
             </a:extLst>
           </p:cNvPr>
@@ -10564,44 +10576,8 @@
               <a:ext uri="{28A0092B-C50C-407E-A947-70E740481C1C}">
                 <a14:useLocalDpi xmlns:a14="http://schemas.microsoft.com/office/drawing/2010/main" val="0"/>
               </a:ext>
-            </a:extLst>
-          </a:blip>
-          <a:stretch>
-            <a:fillRect/>
-          </a:stretch>
-        </p:blipFill>
-        <p:spPr>
-          <a:xfrm>
-            <a:off x="867820" y="2324796"/>
-            <a:ext cx="1189579" cy="2691972"/>
-          </a:xfrm>
-          <a:prstGeom prst="rect">
-            <a:avLst/>
-          </a:prstGeom>
-        </p:spPr>
-      </p:pic>
-      <p:pic>
-        <p:nvPicPr>
-          <p:cNvPr id="7" name="Graphic 6" descr="Cloud">
-            <a:extLst>
-              <a:ext uri="{FF2B5EF4-FFF2-40B4-BE49-F238E27FC236}">
-                <a16:creationId xmlns:a16="http://schemas.microsoft.com/office/drawing/2014/main" id="{3A87124C-1FD9-4AE0-A262-F1564B6C0154}"/>
-              </a:ext>
-            </a:extLst>
-          </p:cNvPr>
-          <p:cNvPicPr>
-            <a:picLocks noChangeAspect="1"/>
-          </p:cNvPicPr>
-          <p:nvPr/>
-        </p:nvPicPr>
-        <p:blipFill>
-          <a:blip r:embed="rId3">
-            <a:extLst>
-              <a:ext uri="{28A0092B-C50C-407E-A947-70E740481C1C}">
-                <a14:useLocalDpi xmlns:a14="http://schemas.microsoft.com/office/drawing/2010/main" val="0"/>
-              </a:ext>
               <a:ext uri="{96DAC541-7B7A-43D3-8B79-37D633B846F1}">
-                <asvg:svgBlip xmlns:asvg="http://schemas.microsoft.com/office/drawing/2016/SVG/main" r:embed="rId4"/>
+                <asvg:svgBlip xmlns:asvg="http://schemas.microsoft.com/office/drawing/2016/SVG/main" r:embed="rId3"/>
               </a:ext>
             </a:extLst>
           </a:blip>
@@ -10710,13 +10686,13 @@
             <p:nvPr/>
           </p:nvPicPr>
           <p:blipFill>
-            <a:blip r:embed="rId5">
+            <a:blip r:embed="rId4">
               <a:extLst>
                 <a:ext uri="{28A0092B-C50C-407E-A947-70E740481C1C}">
                   <a14:useLocalDpi xmlns:a14="http://schemas.microsoft.com/office/drawing/2010/main" val="0"/>
                 </a:ext>
                 <a:ext uri="{96DAC541-7B7A-43D3-8B79-37D633B846F1}">
-                  <asvg:svgBlip xmlns:asvg="http://schemas.microsoft.com/office/drawing/2016/SVG/main" r:embed="rId6"/>
+                  <asvg:svgBlip xmlns:asvg="http://schemas.microsoft.com/office/drawing/2016/SVG/main" r:embed="rId5"/>
                 </a:ext>
               </a:extLst>
             </a:blip>
@@ -10749,13 +10725,13 @@
             <p:nvPr/>
           </p:nvPicPr>
           <p:blipFill>
-            <a:blip r:embed="rId7">
+            <a:blip r:embed="rId6">
               <a:extLst>
                 <a:ext uri="{28A0092B-C50C-407E-A947-70E740481C1C}">
                   <a14:useLocalDpi xmlns:a14="http://schemas.microsoft.com/office/drawing/2010/main" val="0"/>
                 </a:ext>
                 <a:ext uri="{96DAC541-7B7A-43D3-8B79-37D633B846F1}">
-                  <asvg:svgBlip xmlns:asvg="http://schemas.microsoft.com/office/drawing/2016/SVG/main" r:embed="rId8"/>
+                  <asvg:svgBlip xmlns:asvg="http://schemas.microsoft.com/office/drawing/2016/SVG/main" r:embed="rId7"/>
                 </a:ext>
               </a:extLst>
             </a:blip>
@@ -10788,13 +10764,13 @@
             <p:nvPr/>
           </p:nvPicPr>
           <p:blipFill>
-            <a:blip r:embed="rId9">
+            <a:blip r:embed="rId8">
               <a:extLst>
                 <a:ext uri="{28A0092B-C50C-407E-A947-70E740481C1C}">
                   <a14:useLocalDpi xmlns:a14="http://schemas.microsoft.com/office/drawing/2010/main" val="0"/>
                 </a:ext>
                 <a:ext uri="{96DAC541-7B7A-43D3-8B79-37D633B846F1}">
-                  <asvg:svgBlip xmlns:asvg="http://schemas.microsoft.com/office/drawing/2016/SVG/main" r:embed="rId10"/>
+                  <asvg:svgBlip xmlns:asvg="http://schemas.microsoft.com/office/drawing/2016/SVG/main" r:embed="rId9"/>
                 </a:ext>
               </a:extLst>
             </a:blip>
@@ -10857,7 +10833,7 @@
             <a:pPr algn="ctr"/>
             <a:r>
               <a:rPr lang="en-US" sz="2400" b="1" dirty="0"/>
-              <a:t>Argon</a:t>
+              <a:t>Photon</a:t>
             </a:r>
           </a:p>
         </p:txBody>
@@ -10975,7 +10951,7 @@
           <p:nvPr/>
         </p:nvPicPr>
         <p:blipFill>
-          <a:blip r:embed="rId11"/>
+          <a:blip r:embed="rId10"/>
           <a:stretch>
             <a:fillRect/>
           </a:stretch>
@@ -11281,6 +11257,41 @@
           </a:p>
         </p:txBody>
       </p:sp>
+      <p:pic>
+        <p:nvPicPr>
+          <p:cNvPr id="2" name="Picture 1">
+            <a:extLst>
+              <a:ext uri="{FF2B5EF4-FFF2-40B4-BE49-F238E27FC236}">
+                <a16:creationId xmlns:a16="http://schemas.microsoft.com/office/drawing/2014/main" id="{C2811096-5F43-5144-304A-EC5DEFDFE8A5}"/>
+              </a:ext>
+            </a:extLst>
+          </p:cNvPr>
+          <p:cNvPicPr>
+            <a:picLocks noChangeAspect="1"/>
+          </p:cNvPicPr>
+          <p:nvPr/>
+        </p:nvPicPr>
+        <p:blipFill>
+          <a:blip r:embed="rId11">
+            <a:extLst>
+              <a:ext uri="{28A0092B-C50C-407E-A947-70E740481C1C}">
+                <a14:useLocalDpi xmlns:a14="http://schemas.microsoft.com/office/drawing/2010/main" val="0"/>
+              </a:ext>
+            </a:extLst>
+          </a:blip>
+          <a:srcRect/>
+          <a:stretch/>
+        </p:blipFill>
+        <p:spPr>
+          <a:xfrm>
+            <a:off x="867820" y="2333051"/>
+            <a:ext cx="1189579" cy="2675462"/>
+          </a:xfrm>
+          <a:prstGeom prst="rect">
+            <a:avLst/>
+          </a:prstGeom>
+        </p:spPr>
+      </p:pic>
     </p:spTree>
     <p:extLst>
       <p:ext uri="{BB962C8B-B14F-4D97-AF65-F5344CB8AC3E}">
